--- a/output/wordlabs-visit-3day.pptx
+++ b/output/wordlabs-visit-3day.pptx
@@ -5622,7 +5622,7 @@
                 <a:ea typeface="Trebuchet MS" pitchFamily="34" charset="-122"/>
                 <a:cs typeface="Trebuchet MS" pitchFamily="34" charset="-120"/>
               </a:rPr>
-              <a:t>0</a:t>
+              <a:t>1</a:t>
             </a:r>
             <a:pPr algn="ctr" indent="0" marL="0">
               <a:buNone/>
@@ -6040,7 +6040,7 @@
                 <a:ea typeface="Calibri" pitchFamily="34" charset="-122"/>
                 <a:cs typeface="Calibri" pitchFamily="34" charset="-120"/>
               </a:rPr>
-              <a:t>The </a:t>
+              <a:t>The friendly </a:t>
             </a:r>
             <a:pPr algn="l" indent="0" marL="0">
               <a:buNone/>
@@ -6071,7 +6071,7 @@
                 <a:ea typeface="Calibri" pitchFamily="34" charset="-122"/>
                 <a:cs typeface="Calibri" pitchFamily="34" charset="-120"/>
               </a:rPr>
-              <a:t> signed in at the front office before </a:t>
+              <a:t> signed the guestbook, and we loved </a:t>
             </a:r>
             <a:pPr algn="l" indent="0" marL="0">
               <a:buNone/>
@@ -6102,7 +6102,7 @@
                 <a:ea typeface="Calibri" pitchFamily="34" charset="-122"/>
                 <a:cs typeface="Calibri" pitchFamily="34" charset="-120"/>
               </a:rPr>
-              <a:t> our classroom.</a:t>
+              <a:t> the art gallery together.</a:t>
             </a:r>
             <a:endParaRPr lang="en-US" sz="1800" dirty="0"/>
           </a:p>
@@ -9116,7 +9116,7 @@
                 <a:ea typeface="Trebuchet MS" pitchFamily="34" charset="-122"/>
                 <a:cs typeface="Trebuchet MS" pitchFamily="34" charset="-120"/>
               </a:rPr>
-              <a:t>vis</a:t>
+              <a:t>vi</a:t>
             </a:r>
             <a:endParaRPr lang="en-US" sz="1400" dirty="0"/>
           </a:p>
@@ -9221,7 +9221,7 @@
                 <a:ea typeface="Trebuchet MS" pitchFamily="34" charset="-122"/>
                 <a:cs typeface="Trebuchet MS" pitchFamily="34" charset="-120"/>
               </a:rPr>
-              <a:t>it</a:t>
+              <a:t>si</a:t>
             </a:r>
             <a:endParaRPr lang="en-US" sz="1400" dirty="0"/>
           </a:p>
@@ -9326,7 +9326,7 @@
                 <a:ea typeface="Trebuchet MS" pitchFamily="34" charset="-122"/>
                 <a:cs typeface="Trebuchet MS" pitchFamily="34" charset="-120"/>
               </a:rPr>
-              <a:t>or</a:t>
+              <a:t>tor</a:t>
             </a:r>
             <a:endParaRPr lang="en-US" sz="1400" dirty="0"/>
           </a:p>
@@ -10338,7 +10338,7 @@
                 <a:ea typeface="Trebuchet MS" pitchFamily="34" charset="-122"/>
                 <a:cs typeface="Trebuchet MS" pitchFamily="34" charset="-120"/>
               </a:rPr>
-              <a:t>vis</a:t>
+              <a:t>vi</a:t>
             </a:r>
             <a:endParaRPr lang="en-US" sz="1400" dirty="0"/>
           </a:p>
@@ -10443,7 +10443,7 @@
                 <a:ea typeface="Trebuchet MS" pitchFamily="34" charset="-122"/>
                 <a:cs typeface="Trebuchet MS" pitchFamily="34" charset="-120"/>
               </a:rPr>
-              <a:t>it</a:t>
+              <a:t>si</a:t>
             </a:r>
             <a:endParaRPr lang="en-US" sz="1400" dirty="0"/>
           </a:p>
@@ -10548,7 +10548,7 @@
                 <a:ea typeface="Trebuchet MS" pitchFamily="34" charset="-122"/>
                 <a:cs typeface="Trebuchet MS" pitchFamily="34" charset="-120"/>
               </a:rPr>
-              <a:t>or</a:t>
+              <a:t>tor</a:t>
             </a:r>
             <a:endParaRPr lang="en-US" sz="1400" dirty="0"/>
           </a:p>
@@ -12624,7 +12624,7 @@
                 <a:ea typeface="Calibri" pitchFamily="34" charset="-122"/>
                 <a:cs typeface="Calibri" pitchFamily="34" charset="-120"/>
               </a:rPr>
-              <a:t>ongoing action</a:t>
+              <a:t>action happening now</a:t>
             </a:r>
             <a:endParaRPr lang="en-US" sz="850" dirty="0"/>
           </a:p>
@@ -13609,7 +13609,7 @@
                 <a:ea typeface="Calibri" pitchFamily="34" charset="-122"/>
                 <a:cs typeface="Calibri" pitchFamily="34" charset="-120"/>
               </a:rPr>
-              <a:t>ongoing action</a:t>
+              <a:t>action happening now</a:t>
             </a:r>
             <a:endParaRPr lang="en-US" sz="850" dirty="0"/>
           </a:p>
@@ -13768,7 +13768,7 @@
                 <a:ea typeface="Trebuchet MS" pitchFamily="34" charset="-122"/>
                 <a:cs typeface="Trebuchet MS" pitchFamily="34" charset="-120"/>
               </a:rPr>
-              <a:t>vis</a:t>
+              <a:t>vi</a:t>
             </a:r>
             <a:endParaRPr lang="en-US" sz="1400" dirty="0"/>
           </a:p>
@@ -13873,7 +13873,7 @@
                 <a:ea typeface="Trebuchet MS" pitchFamily="34" charset="-122"/>
                 <a:cs typeface="Trebuchet MS" pitchFamily="34" charset="-120"/>
               </a:rPr>
-              <a:t>it</a:t>
+              <a:t>si</a:t>
             </a:r>
             <a:endParaRPr lang="en-US" sz="1400" dirty="0"/>
           </a:p>
@@ -13978,7 +13978,7 @@
                 <a:ea typeface="Trebuchet MS" pitchFamily="34" charset="-122"/>
                 <a:cs typeface="Trebuchet MS" pitchFamily="34" charset="-120"/>
               </a:rPr>
-              <a:t>ing</a:t>
+              <a:t>ting</a:t>
             </a:r>
             <a:endParaRPr lang="en-US" sz="1400" dirty="0"/>
           </a:p>
@@ -15096,7 +15096,7 @@
                 <a:ea typeface="Calibri" pitchFamily="34" charset="-122"/>
                 <a:cs typeface="Calibri" pitchFamily="34" charset="-120"/>
               </a:rPr>
-              <a:t>ongoing action</a:t>
+              <a:t>action happening now</a:t>
             </a:r>
             <a:endParaRPr lang="en-US" sz="850" dirty="0"/>
           </a:p>
@@ -15255,7 +15255,7 @@
                 <a:ea typeface="Trebuchet MS" pitchFamily="34" charset="-122"/>
                 <a:cs typeface="Trebuchet MS" pitchFamily="34" charset="-120"/>
               </a:rPr>
-              <a:t>vis</a:t>
+              <a:t>vi</a:t>
             </a:r>
             <a:endParaRPr lang="en-US" sz="1400" dirty="0"/>
           </a:p>
@@ -15360,7 +15360,7 @@
                 <a:ea typeface="Trebuchet MS" pitchFamily="34" charset="-122"/>
                 <a:cs typeface="Trebuchet MS" pitchFamily="34" charset="-120"/>
               </a:rPr>
-              <a:t>it</a:t>
+              <a:t>si</a:t>
             </a:r>
             <a:endParaRPr lang="en-US" sz="1400" dirty="0"/>
           </a:p>
@@ -15465,7 +15465,7 @@
                 <a:ea typeface="Trebuchet MS" pitchFamily="34" charset="-122"/>
                 <a:cs typeface="Trebuchet MS" pitchFamily="34" charset="-120"/>
               </a:rPr>
-              <a:t>ing</a:t>
+              <a:t>ting</a:t>
             </a:r>
             <a:endParaRPr lang="en-US" sz="1400" dirty="0"/>
           </a:p>
@@ -17319,7 +17319,7 @@
                 <a:ea typeface="Calibri" pitchFamily="34" charset="-122"/>
                 <a:cs typeface="Calibri" pitchFamily="34" charset="-120"/>
               </a:rPr>
-              <a:t>Our </a:t>
+              <a:t>After the </a:t>
             </a:r>
             <a:pPr algn="l" indent="0" marL="0">
               <a:buNone/>
@@ -17336,7 +17336,7 @@
                 <a:ea typeface="Calibri" pitchFamily="34" charset="-122"/>
                 <a:cs typeface="Calibri" pitchFamily="34" charset="-120"/>
               </a:rPr>
-              <a:t>visitors</a:t>
+              <a:t>visitation</a:t>
             </a:r>
             <a:pPr algn="l" indent="0" marL="0">
               <a:buNone/>
@@ -17350,7 +17350,7 @@
                 <a:ea typeface="Calibri" pitchFamily="34" charset="-122"/>
                 <a:cs typeface="Calibri" pitchFamily="34" charset="-120"/>
               </a:rPr>
-              <a:t> enjoyed </a:t>
+              <a:t>, Mum said we could </a:t>
             </a:r>
             <a:pPr algn="l" indent="0" marL="0">
               <a:buNone/>
@@ -17367,7 +17367,7 @@
                 <a:ea typeface="Calibri" pitchFamily="34" charset="-122"/>
                 <a:cs typeface="Calibri" pitchFamily="34" charset="-120"/>
               </a:rPr>
-              <a:t>revisiting</a:t>
+              <a:t>revisit</a:t>
             </a:r>
             <a:pPr algn="l" indent="0" marL="0">
               <a:buNone/>
@@ -17381,7 +17381,7 @@
                 <a:ea typeface="Calibri" pitchFamily="34" charset="-122"/>
                 <a:cs typeface="Calibri" pitchFamily="34" charset="-120"/>
               </a:rPr>
-              <a:t> the museum, and the </a:t>
+              <a:t> the farm; the </a:t>
             </a:r>
             <a:pPr algn="l" indent="0" marL="0">
               <a:buNone/>
@@ -17398,7 +17398,7 @@
                 <a:ea typeface="Calibri" pitchFamily="34" charset="-122"/>
                 <a:cs typeface="Calibri" pitchFamily="34" charset="-120"/>
               </a:rPr>
-              <a:t>visitation</a:t>
+              <a:t>visited</a:t>
             </a:r>
             <a:pPr algn="l" indent="0" marL="0">
               <a:buNone/>
@@ -17412,7 +17412,7 @@
                 <a:ea typeface="Calibri" pitchFamily="34" charset="-122"/>
                 <a:cs typeface="Calibri" pitchFamily="34" charset="-120"/>
               </a:rPr>
-              <a:t> was a great success!</a:t>
+              <a:t> animals were so cute!</a:t>
             </a:r>
             <a:endParaRPr lang="en-US" sz="1800" dirty="0"/>
           </a:p>
@@ -17567,7 +17567,7 @@
                 <a:ea typeface="Trebuchet MS" pitchFamily="34" charset="-122"/>
                 <a:cs typeface="Trebuchet MS" pitchFamily="34" charset="-120"/>
               </a:rPr>
-              <a:t>visitors</a:t>
+              <a:t>visitation</a:t>
             </a:r>
             <a:endParaRPr lang="en-US" sz="1400" dirty="0"/>
           </a:p>
@@ -17695,7 +17695,7 @@
                 <a:ea typeface="Trebuchet MS" pitchFamily="34" charset="-122"/>
                 <a:cs typeface="Trebuchet MS" pitchFamily="34" charset="-120"/>
               </a:rPr>
-              <a:t>revisiting</a:t>
+              <a:t>revisit</a:t>
             </a:r>
             <a:endParaRPr lang="en-US" sz="1400" dirty="0"/>
           </a:p>
@@ -17823,7 +17823,7 @@
                 <a:ea typeface="Trebuchet MS" pitchFamily="34" charset="-122"/>
                 <a:cs typeface="Trebuchet MS" pitchFamily="34" charset="-120"/>
               </a:rPr>
-              <a:t>visitation</a:t>
+              <a:t>visited</a:t>
             </a:r>
             <a:endParaRPr lang="en-US" sz="1400" dirty="0"/>
           </a:p>
@@ -18293,7 +18293,7 @@
                 <a:ea typeface="Trebuchet MS" pitchFamily="34" charset="-122"/>
                 <a:cs typeface="Trebuchet MS" pitchFamily="34" charset="-120"/>
               </a:rPr>
-              <a:t>visitors</a:t>
+              <a:t>visitation</a:t>
             </a:r>
             <a:endParaRPr lang="en-US" sz="2800" dirty="0"/>
           </a:p>
@@ -19120,7 +19120,7 @@
                 <a:ea typeface="Trebuchet MS" pitchFamily="34" charset="-122"/>
                 <a:cs typeface="Trebuchet MS" pitchFamily="34" charset="-120"/>
               </a:rPr>
-              <a:t>visitors</a:t>
+              <a:t>visitation</a:t>
             </a:r>
             <a:endParaRPr lang="en-US" sz="2800" dirty="0"/>
           </a:p>
@@ -19200,7 +19200,7 @@
         </p:nvSpPr>
         <p:spPr>
           <a:xfrm>
-            <a:off x="2221992" y="2258568"/>
+            <a:off x="2938272" y="2258568"/>
             <a:ext cx="1828800" cy="292608"/>
           </a:xfrm>
           <a:prstGeom prst="rect">
@@ -19234,7 +19234,7 @@
         </p:nvSpPr>
         <p:spPr>
           <a:xfrm>
-            <a:off x="2221992" y="2258568"/>
+            <a:off x="2938272" y="2258568"/>
             <a:ext cx="1828800" cy="292608"/>
           </a:xfrm>
           <a:prstGeom prst="rect">
@@ -19273,7 +19273,7 @@
         </p:nvSpPr>
         <p:spPr>
           <a:xfrm>
-            <a:off x="2221992" y="2569464"/>
+            <a:off x="2938272" y="2569464"/>
             <a:ext cx="1828800" cy="201168"/>
           </a:xfrm>
           <a:prstGeom prst="rect">
@@ -19312,7 +19312,7 @@
         </p:nvSpPr>
         <p:spPr>
           <a:xfrm>
-            <a:off x="4370832" y="2258568"/>
+            <a:off x="5803392" y="2258568"/>
             <a:ext cx="1828800" cy="292608"/>
           </a:xfrm>
           <a:prstGeom prst="rect">
@@ -19346,7 +19346,7 @@
         </p:nvSpPr>
         <p:spPr>
           <a:xfrm>
-            <a:off x="4370832" y="2258568"/>
+            <a:off x="5803392" y="2258568"/>
             <a:ext cx="1828800" cy="292608"/>
           </a:xfrm>
           <a:prstGeom prst="rect">
@@ -19371,7 +19371,7 @@
                 <a:ea typeface="Trebuchet MS" pitchFamily="34" charset="-122"/>
                 <a:cs typeface="Trebuchet MS" pitchFamily="34" charset="-120"/>
               </a:rPr>
-              <a:t>or</a:t>
+              <a:t>ation</a:t>
             </a:r>
             <a:endParaRPr lang="en-US" sz="1300" dirty="0"/>
           </a:p>
@@ -19385,7 +19385,7 @@
         </p:nvSpPr>
         <p:spPr>
           <a:xfrm>
-            <a:off x="4370832" y="2569464"/>
+            <a:off x="5803392" y="2569464"/>
             <a:ext cx="1828800" cy="201168"/>
           </a:xfrm>
           <a:prstGeom prst="rect">
@@ -19410,7 +19410,7 @@
                 <a:ea typeface="Calibri" pitchFamily="34" charset="-122"/>
                 <a:cs typeface="Calibri" pitchFamily="34" charset="-120"/>
               </a:rPr>
-              <a:t>a person who does something</a:t>
+              <a:t>the act or result of something</a:t>
             </a:r>
             <a:endParaRPr lang="en-US" sz="850" dirty="0"/>
           </a:p>
@@ -19424,30 +19424,23 @@
         </p:nvSpPr>
         <p:spPr>
           <a:xfrm>
-            <a:off x="6519672" y="2258568"/>
-            <a:ext cx="1828800" cy="292608"/>
+            <a:off x="365760" y="3273552"/>
+            <a:ext cx="1371600" cy="658368"/>
           </a:xfrm>
           <a:prstGeom prst="rect">
             <a:avLst>
-              <a:gd name="adj" fmla="val 25000"/>
+              <a:gd name="adj" fmla="val 8333"/>
             </a:avLst>
           </a:prstGeom>
           <a:solidFill>
-            <a:srgbClr val="FCE7F3"/>
-          </a:solidFill>
-          <a:ln w="19050">
-            <a:solidFill>
-              <a:srgbClr val="DB2777"/>
-            </a:solidFill>
-            <a:prstDash val="solid"/>
-          </a:ln>
-          <a:effectLst>
-            <a:outerShdw sx="100000" sy="100000" kx="0" ky="0" algn="bl" rotWithShape="0" blurRad="101600" dist="38100" dir="8100000">
-              <a:srgbClr val="000000">
-                <a:alpha val="12000"/>
-              </a:srgbClr>
-            </a:outerShdw>
-          </a:effectLst>
+            <a:srgbClr val="E2E8F0"/>
+          </a:solidFill>
+          <a:ln w="12700">
+            <a:solidFill>
+              <a:srgbClr val="E2E8F0"/>
+            </a:solidFill>
+            <a:prstDash val="solid"/>
+          </a:ln>
         </p:spPr>
       </p:sp>
       <p:sp>
@@ -19458,90 +19451,117 @@
         </p:nvSpPr>
         <p:spPr>
           <a:xfrm>
-            <a:off x="6519672" y="2258568"/>
-            <a:ext cx="1828800" cy="292608"/>
-          </a:xfrm>
-          <a:prstGeom prst="rect">
-            <a:avLst/>
-          </a:prstGeom>
-          <a:noFill/>
-          <a:ln/>
-        </p:spPr>
-        <p:txBody>
-          <a:bodyPr wrap="square" lIns="0" tIns="0" rIns="0" bIns="0" rtlCol="0" anchor="ctr"/>
-          <a:lstStyle/>
-          <a:p>
-            <a:pPr algn="ctr" indent="0" marL="0">
-              <a:buNone/>
-            </a:pPr>
-            <a:r>
-              <a:rPr lang="en-US" sz="1300" b="1" dirty="0">
-                <a:solidFill>
-                  <a:srgbClr val="9D174D"/>
+            <a:off x="365760" y="3273552"/>
+            <a:ext cx="1371600" cy="658368"/>
+          </a:xfrm>
+          <a:prstGeom prst="rect">
+            <a:avLst/>
+          </a:prstGeom>
+          <a:noFill/>
+          <a:ln/>
+        </p:spPr>
+        <p:txBody>
+          <a:bodyPr wrap="square" lIns="0" tIns="0" rIns="0" bIns="0" rtlCol="0" anchor="ctr"/>
+          <a:lstStyle/>
+          <a:p>
+            <a:pPr algn="ctr" indent="0" marL="0">
+              <a:buNone/>
+            </a:pPr>
+            <a:r>
+              <a:rPr lang="en-US" sz="1100" b="1" dirty="0">
+                <a:solidFill>
+                  <a:srgbClr val="475569"/>
                 </a:solidFill>
                 <a:latin typeface="Trebuchet MS" pitchFamily="34" charset="0"/>
                 <a:ea typeface="Trebuchet MS" pitchFamily="34" charset="-122"/>
                 <a:cs typeface="Trebuchet MS" pitchFamily="34" charset="-120"/>
               </a:rPr>
-              <a:t>s</a:t>
-            </a:r>
-            <a:endParaRPr lang="en-US" sz="1300" dirty="0"/>
-          </a:p>
-        </p:txBody>
-      </p:sp>
-      <p:sp>
-        <p:nvSpPr>
-          <p:cNvPr id="24" name="Text 22"/>
-          <p:cNvSpPr/>
-          <p:nvPr/>
-        </p:nvSpPr>
-        <p:spPr>
-          <a:xfrm>
-            <a:off x="6519672" y="2569464"/>
-            <a:ext cx="1828800" cy="201168"/>
-          </a:xfrm>
-          <a:prstGeom prst="rect">
-            <a:avLst/>
-          </a:prstGeom>
-          <a:noFill/>
-          <a:ln/>
-        </p:spPr>
-        <p:txBody>
-          <a:bodyPr wrap="square" lIns="0" tIns="0" rIns="0" bIns="0" rtlCol="0" anchor="t"/>
-          <a:lstStyle/>
-          <a:p>
-            <a:pPr algn="ctr" indent="0" marL="0">
-              <a:buNone/>
-            </a:pPr>
-            <a:r>
-              <a:rPr lang="en-US" sz="850" dirty="0">
-                <a:solidFill>
-                  <a:srgbClr val="475569"/>
+              <a:t>Syllables</a:t>
+            </a:r>
+            <a:endParaRPr lang="en-US" sz="1100" dirty="0"/>
+          </a:p>
+        </p:txBody>
+      </p:sp>
+      <p:sp>
+        <p:nvSpPr>
+          <p:cNvPr id="24" name="Shape 22"/>
+          <p:cNvSpPr/>
+          <p:nvPr/>
+        </p:nvSpPr>
+        <p:spPr>
+          <a:xfrm>
+            <a:off x="1874520" y="3273552"/>
+            <a:ext cx="6903720" cy="658368"/>
+          </a:xfrm>
+          <a:prstGeom prst="rect">
+            <a:avLst>
+              <a:gd name="adj" fmla="val 8333"/>
+            </a:avLst>
+          </a:prstGeom>
+          <a:solidFill>
+            <a:srgbClr val="F8FAFC"/>
+          </a:solidFill>
+          <a:ln w="12700">
+            <a:solidFill>
+              <a:srgbClr val="E2E8F0"/>
+            </a:solidFill>
+            <a:prstDash val="dash"/>
+          </a:ln>
+        </p:spPr>
+      </p:sp>
+      <p:sp>
+        <p:nvSpPr>
+          <p:cNvPr id="25" name="Text 23"/>
+          <p:cNvSpPr/>
+          <p:nvPr/>
+        </p:nvSpPr>
+        <p:spPr>
+          <a:xfrm>
+            <a:off x="1874520" y="3273552"/>
+            <a:ext cx="6903720" cy="658368"/>
+          </a:xfrm>
+          <a:prstGeom prst="rect">
+            <a:avLst/>
+          </a:prstGeom>
+          <a:noFill/>
+          <a:ln/>
+        </p:spPr>
+        <p:txBody>
+          <a:bodyPr wrap="square" rtlCol="0" anchor="ctr"/>
+          <a:lstStyle/>
+          <a:p>
+            <a:pPr algn="ctr" indent="0" marL="0">
+              <a:buNone/>
+            </a:pPr>
+            <a:r>
+              <a:rPr lang="en-US" sz="1100" i="1" dirty="0">
+                <a:solidFill>
+                  <a:srgbClr val="CBD5E1"/>
                 </a:solidFill>
                 <a:latin typeface="Calibri" pitchFamily="34" charset="0"/>
                 <a:ea typeface="Calibri" pitchFamily="34" charset="-122"/>
                 <a:cs typeface="Calibri" pitchFamily="34" charset="-120"/>
               </a:rPr>
-              <a:t>more than one</a:t>
-            </a:r>
-            <a:endParaRPr lang="en-US" sz="850" dirty="0"/>
-          </a:p>
-        </p:txBody>
-      </p:sp>
-      <p:sp>
-        <p:nvSpPr>
-          <p:cNvPr id="25" name="Shape 23"/>
-          <p:cNvSpPr/>
-          <p:nvPr/>
-        </p:nvSpPr>
-        <p:spPr>
-          <a:xfrm>
-            <a:off x="365760" y="3273552"/>
-            <a:ext cx="1371600" cy="658368"/>
+              <a:t>Write here...</a:t>
+            </a:r>
+            <a:endParaRPr lang="en-US" sz="1100" dirty="0"/>
+          </a:p>
+        </p:txBody>
+      </p:sp>
+      <p:sp>
+        <p:nvSpPr>
+          <p:cNvPr id="26" name="Shape 24"/>
+          <p:cNvSpPr/>
+          <p:nvPr/>
+        </p:nvSpPr>
+        <p:spPr>
+          <a:xfrm>
+            <a:off x="365760" y="4096512"/>
+            <a:ext cx="1371600" cy="804672"/>
           </a:xfrm>
           <a:prstGeom prst="rect">
             <a:avLst>
-              <a:gd name="adj" fmla="val 8333"/>
+              <a:gd name="adj" fmla="val 6818"/>
             </a:avLst>
           </a:prstGeom>
           <a:solidFill>
@@ -19557,14 +19577,14 @@
       </p:sp>
       <p:sp>
         <p:nvSpPr>
-          <p:cNvPr id="26" name="Text 24"/>
-          <p:cNvSpPr/>
-          <p:nvPr/>
-        </p:nvSpPr>
-        <p:spPr>
-          <a:xfrm>
-            <a:off x="365760" y="3273552"/>
-            <a:ext cx="1371600" cy="658368"/>
+          <p:cNvPr id="27" name="Text 25"/>
+          <p:cNvSpPr/>
+          <p:nvPr/>
+        </p:nvSpPr>
+        <p:spPr>
+          <a:xfrm>
+            <a:off x="365760" y="4096512"/>
+            <a:ext cx="1371600" cy="804672"/>
           </a:xfrm>
           <a:prstGeom prst="rect">
             <a:avLst/>
@@ -19588,7 +19608,7 @@
                 <a:ea typeface="Trebuchet MS" pitchFamily="34" charset="-122"/>
                 <a:cs typeface="Trebuchet MS" pitchFamily="34" charset="-120"/>
               </a:rPr>
-              <a:t>Syllables</a:t>
+              <a:t>Phonemes</a:t>
             </a:r>
             <a:endParaRPr lang="en-US" sz="1100" dirty="0"/>
           </a:p>
@@ -19596,80 +19616,14 @@
       </p:sp>
       <p:sp>
         <p:nvSpPr>
-          <p:cNvPr id="27" name="Shape 25"/>
-          <p:cNvSpPr/>
-          <p:nvPr/>
-        </p:nvSpPr>
-        <p:spPr>
-          <a:xfrm>
-            <a:off x="1874520" y="3273552"/>
-            <a:ext cx="6903720" cy="658368"/>
-          </a:xfrm>
-          <a:prstGeom prst="rect">
-            <a:avLst>
-              <a:gd name="adj" fmla="val 8333"/>
-            </a:avLst>
-          </a:prstGeom>
-          <a:solidFill>
-            <a:srgbClr val="F8FAFC"/>
-          </a:solidFill>
-          <a:ln w="12700">
-            <a:solidFill>
-              <a:srgbClr val="E2E8F0"/>
-            </a:solidFill>
-            <a:prstDash val="dash"/>
-          </a:ln>
-        </p:spPr>
-      </p:sp>
-      <p:sp>
-        <p:nvSpPr>
-          <p:cNvPr id="28" name="Text 26"/>
-          <p:cNvSpPr/>
-          <p:nvPr/>
-        </p:nvSpPr>
-        <p:spPr>
-          <a:xfrm>
-            <a:off x="1874520" y="3273552"/>
-            <a:ext cx="6903720" cy="658368"/>
-          </a:xfrm>
-          <a:prstGeom prst="rect">
-            <a:avLst/>
-          </a:prstGeom>
-          <a:noFill/>
-          <a:ln/>
-        </p:spPr>
-        <p:txBody>
-          <a:bodyPr wrap="square" rtlCol="0" anchor="ctr"/>
-          <a:lstStyle/>
-          <a:p>
-            <a:pPr algn="ctr" indent="0" marL="0">
-              <a:buNone/>
-            </a:pPr>
-            <a:r>
-              <a:rPr lang="en-US" sz="1100" i="1" dirty="0">
-                <a:solidFill>
-                  <a:srgbClr val="CBD5E1"/>
-                </a:solidFill>
-                <a:latin typeface="Calibri" pitchFamily="34" charset="0"/>
-                <a:ea typeface="Calibri" pitchFamily="34" charset="-122"/>
-                <a:cs typeface="Calibri" pitchFamily="34" charset="-120"/>
-              </a:rPr>
-              <a:t>Write here...</a:t>
-            </a:r>
-            <a:endParaRPr lang="en-US" sz="1100" dirty="0"/>
-          </a:p>
-        </p:txBody>
-      </p:sp>
-      <p:sp>
-        <p:nvSpPr>
-          <p:cNvPr id="29" name="Shape 27"/>
-          <p:cNvSpPr/>
-          <p:nvPr/>
-        </p:nvSpPr>
-        <p:spPr>
-          <a:xfrm>
-            <a:off x="365760" y="4096512"/>
-            <a:ext cx="1371600" cy="804672"/>
+          <p:cNvPr id="28" name="Shape 26"/>
+          <p:cNvSpPr/>
+          <p:nvPr/>
+        </p:nvSpPr>
+        <p:spPr>
+          <a:xfrm>
+            <a:off x="1874520" y="4096512"/>
+            <a:ext cx="6903720" cy="804672"/>
           </a:xfrm>
           <a:prstGeom prst="rect">
             <a:avLst>
@@ -19677,85 +19631,19 @@
             </a:avLst>
           </a:prstGeom>
           <a:solidFill>
-            <a:srgbClr val="E2E8F0"/>
+            <a:srgbClr val="F8FAFC"/>
           </a:solidFill>
           <a:ln w="12700">
             <a:solidFill>
               <a:srgbClr val="E2E8F0"/>
             </a:solidFill>
-            <a:prstDash val="solid"/>
-          </a:ln>
-        </p:spPr>
-      </p:sp>
-      <p:sp>
-        <p:nvSpPr>
-          <p:cNvPr id="30" name="Text 28"/>
-          <p:cNvSpPr/>
-          <p:nvPr/>
-        </p:nvSpPr>
-        <p:spPr>
-          <a:xfrm>
-            <a:off x="365760" y="4096512"/>
-            <a:ext cx="1371600" cy="804672"/>
-          </a:xfrm>
-          <a:prstGeom prst="rect">
-            <a:avLst/>
-          </a:prstGeom>
-          <a:noFill/>
-          <a:ln/>
-        </p:spPr>
-        <p:txBody>
-          <a:bodyPr wrap="square" lIns="0" tIns="0" rIns="0" bIns="0" rtlCol="0" anchor="ctr"/>
-          <a:lstStyle/>
-          <a:p>
-            <a:pPr algn="ctr" indent="0" marL="0">
-              <a:buNone/>
-            </a:pPr>
-            <a:r>
-              <a:rPr lang="en-US" sz="1100" b="1" dirty="0">
-                <a:solidFill>
-                  <a:srgbClr val="475569"/>
-                </a:solidFill>
-                <a:latin typeface="Trebuchet MS" pitchFamily="34" charset="0"/>
-                <a:ea typeface="Trebuchet MS" pitchFamily="34" charset="-122"/>
-                <a:cs typeface="Trebuchet MS" pitchFamily="34" charset="-120"/>
-              </a:rPr>
-              <a:t>Phonemes</a:t>
-            </a:r>
-            <a:endParaRPr lang="en-US" sz="1100" dirty="0"/>
-          </a:p>
-        </p:txBody>
-      </p:sp>
-      <p:sp>
-        <p:nvSpPr>
-          <p:cNvPr id="31" name="Shape 29"/>
-          <p:cNvSpPr/>
-          <p:nvPr/>
-        </p:nvSpPr>
-        <p:spPr>
-          <a:xfrm>
-            <a:off x="1874520" y="4096512"/>
-            <a:ext cx="6903720" cy="804672"/>
-          </a:xfrm>
-          <a:prstGeom prst="rect">
-            <a:avLst>
-              <a:gd name="adj" fmla="val 6818"/>
-            </a:avLst>
-          </a:prstGeom>
-          <a:solidFill>
-            <a:srgbClr val="F8FAFC"/>
-          </a:solidFill>
-          <a:ln w="12700">
-            <a:solidFill>
-              <a:srgbClr val="E2E8F0"/>
-            </a:solidFill>
             <a:prstDash val="dash"/>
           </a:ln>
         </p:spPr>
       </p:sp>
       <p:sp>
         <p:nvSpPr>
-          <p:cNvPr id="32" name="Text 30"/>
+          <p:cNvPr id="29" name="Text 27"/>
           <p:cNvSpPr/>
           <p:nvPr/>
         </p:nvSpPr>
@@ -20217,7 +20105,7 @@
                 <a:ea typeface="Trebuchet MS" pitchFamily="34" charset="-122"/>
                 <a:cs typeface="Trebuchet MS" pitchFamily="34" charset="-120"/>
               </a:rPr>
-              <a:t>visitors</a:t>
+              <a:t>visitation</a:t>
             </a:r>
             <a:endParaRPr lang="en-US" sz="2800" dirty="0"/>
           </a:p>
@@ -20297,7 +20185,7 @@
         </p:nvSpPr>
         <p:spPr>
           <a:xfrm>
-            <a:off x="2221992" y="2258568"/>
+            <a:off x="2938272" y="2258568"/>
             <a:ext cx="1828800" cy="292608"/>
           </a:xfrm>
           <a:prstGeom prst="rect">
@@ -20331,7 +20219,7 @@
         </p:nvSpPr>
         <p:spPr>
           <a:xfrm>
-            <a:off x="2221992" y="2258568"/>
+            <a:off x="2938272" y="2258568"/>
             <a:ext cx="1828800" cy="292608"/>
           </a:xfrm>
           <a:prstGeom prst="rect">
@@ -20370,7 +20258,7 @@
         </p:nvSpPr>
         <p:spPr>
           <a:xfrm>
-            <a:off x="2221992" y="2569464"/>
+            <a:off x="2938272" y="2569464"/>
             <a:ext cx="1828800" cy="201168"/>
           </a:xfrm>
           <a:prstGeom prst="rect">
@@ -20409,7 +20297,7 @@
         </p:nvSpPr>
         <p:spPr>
           <a:xfrm>
-            <a:off x="4370832" y="2258568"/>
+            <a:off x="5803392" y="2258568"/>
             <a:ext cx="1828800" cy="292608"/>
           </a:xfrm>
           <a:prstGeom prst="rect">
@@ -20443,7 +20331,7 @@
         </p:nvSpPr>
         <p:spPr>
           <a:xfrm>
-            <a:off x="4370832" y="2258568"/>
+            <a:off x="5803392" y="2258568"/>
             <a:ext cx="1828800" cy="292608"/>
           </a:xfrm>
           <a:prstGeom prst="rect">
@@ -20468,7 +20356,7 @@
                 <a:ea typeface="Trebuchet MS" pitchFamily="34" charset="-122"/>
                 <a:cs typeface="Trebuchet MS" pitchFamily="34" charset="-120"/>
               </a:rPr>
-              <a:t>or</a:t>
+              <a:t>ation</a:t>
             </a:r>
             <a:endParaRPr lang="en-US" sz="1300" dirty="0"/>
           </a:p>
@@ -20482,7 +20370,7 @@
         </p:nvSpPr>
         <p:spPr>
           <a:xfrm>
-            <a:off x="4370832" y="2569464"/>
+            <a:off x="5803392" y="2569464"/>
             <a:ext cx="1828800" cy="201168"/>
           </a:xfrm>
           <a:prstGeom prst="rect">
@@ -20507,7 +20395,7 @@
                 <a:ea typeface="Calibri" pitchFamily="34" charset="-122"/>
                 <a:cs typeface="Calibri" pitchFamily="34" charset="-120"/>
               </a:rPr>
-              <a:t>a person who does something</a:t>
+              <a:t>the act or result of something</a:t>
             </a:r>
             <a:endParaRPr lang="en-US" sz="850" dirty="0"/>
           </a:p>
@@ -20521,30 +20409,23 @@
         </p:nvSpPr>
         <p:spPr>
           <a:xfrm>
-            <a:off x="6519672" y="2258568"/>
-            <a:ext cx="1828800" cy="292608"/>
+            <a:off x="365760" y="3273552"/>
+            <a:ext cx="1371600" cy="658368"/>
           </a:xfrm>
           <a:prstGeom prst="rect">
             <a:avLst>
-              <a:gd name="adj" fmla="val 25000"/>
+              <a:gd name="adj" fmla="val 8333"/>
             </a:avLst>
           </a:prstGeom>
           <a:solidFill>
-            <a:srgbClr val="FCE7F3"/>
-          </a:solidFill>
-          <a:ln w="19050">
-            <a:solidFill>
-              <a:srgbClr val="DB2777"/>
-            </a:solidFill>
-            <a:prstDash val="solid"/>
-          </a:ln>
-          <a:effectLst>
-            <a:outerShdw sx="100000" sy="100000" kx="0" ky="0" algn="bl" rotWithShape="0" blurRad="101600" dist="38100" dir="8100000">
-              <a:srgbClr val="000000">
-                <a:alpha val="12000"/>
-              </a:srgbClr>
-            </a:outerShdw>
-          </a:effectLst>
+            <a:srgbClr val="E2E8F0"/>
+          </a:solidFill>
+          <a:ln w="12700">
+            <a:solidFill>
+              <a:srgbClr val="E2E8F0"/>
+            </a:solidFill>
+            <a:prstDash val="solid"/>
+          </a:ln>
         </p:spPr>
       </p:sp>
       <p:sp>
@@ -20555,86 +20436,47 @@
         </p:nvSpPr>
         <p:spPr>
           <a:xfrm>
-            <a:off x="6519672" y="2258568"/>
-            <a:ext cx="1828800" cy="292608"/>
-          </a:xfrm>
-          <a:prstGeom prst="rect">
-            <a:avLst/>
-          </a:prstGeom>
-          <a:noFill/>
-          <a:ln/>
-        </p:spPr>
-        <p:txBody>
-          <a:bodyPr wrap="square" lIns="0" tIns="0" rIns="0" bIns="0" rtlCol="0" anchor="ctr"/>
-          <a:lstStyle/>
-          <a:p>
-            <a:pPr algn="ctr" indent="0" marL="0">
-              <a:buNone/>
-            </a:pPr>
-            <a:r>
-              <a:rPr lang="en-US" sz="1300" b="1" dirty="0">
-                <a:solidFill>
-                  <a:srgbClr val="9D174D"/>
+            <a:off x="365760" y="3273552"/>
+            <a:ext cx="1371600" cy="658368"/>
+          </a:xfrm>
+          <a:prstGeom prst="rect">
+            <a:avLst/>
+          </a:prstGeom>
+          <a:noFill/>
+          <a:ln/>
+        </p:spPr>
+        <p:txBody>
+          <a:bodyPr wrap="square" lIns="0" tIns="0" rIns="0" bIns="0" rtlCol="0" anchor="ctr"/>
+          <a:lstStyle/>
+          <a:p>
+            <a:pPr algn="ctr" indent="0" marL="0">
+              <a:buNone/>
+            </a:pPr>
+            <a:r>
+              <a:rPr lang="en-US" sz="1100" b="1" dirty="0">
+                <a:solidFill>
+                  <a:srgbClr val="475569"/>
                 </a:solidFill>
                 <a:latin typeface="Trebuchet MS" pitchFamily="34" charset="0"/>
                 <a:ea typeface="Trebuchet MS" pitchFamily="34" charset="-122"/>
                 <a:cs typeface="Trebuchet MS" pitchFamily="34" charset="-120"/>
               </a:rPr>
-              <a:t>s</a:t>
-            </a:r>
-            <a:endParaRPr lang="en-US" sz="1300" dirty="0"/>
-          </a:p>
-        </p:txBody>
-      </p:sp>
-      <p:sp>
-        <p:nvSpPr>
-          <p:cNvPr id="24" name="Text 22"/>
-          <p:cNvSpPr/>
-          <p:nvPr/>
-        </p:nvSpPr>
-        <p:spPr>
-          <a:xfrm>
-            <a:off x="6519672" y="2569464"/>
-            <a:ext cx="1828800" cy="201168"/>
-          </a:xfrm>
-          <a:prstGeom prst="rect">
-            <a:avLst/>
-          </a:prstGeom>
-          <a:noFill/>
-          <a:ln/>
-        </p:spPr>
-        <p:txBody>
-          <a:bodyPr wrap="square" lIns="0" tIns="0" rIns="0" bIns="0" rtlCol="0" anchor="t"/>
-          <a:lstStyle/>
-          <a:p>
-            <a:pPr algn="ctr" indent="0" marL="0">
-              <a:buNone/>
-            </a:pPr>
-            <a:r>
-              <a:rPr lang="en-US" sz="850" dirty="0">
-                <a:solidFill>
-                  <a:srgbClr val="475569"/>
-                </a:solidFill>
-                <a:latin typeface="Calibri" pitchFamily="34" charset="0"/>
-                <a:ea typeface="Calibri" pitchFamily="34" charset="-122"/>
-                <a:cs typeface="Calibri" pitchFamily="34" charset="-120"/>
-              </a:rPr>
-              <a:t>more than one</a:t>
-            </a:r>
-            <a:endParaRPr lang="en-US" sz="850" dirty="0"/>
-          </a:p>
-        </p:txBody>
-      </p:sp>
-      <p:sp>
-        <p:nvSpPr>
-          <p:cNvPr id="25" name="Shape 23"/>
-          <p:cNvSpPr/>
-          <p:nvPr/>
-        </p:nvSpPr>
-        <p:spPr>
-          <a:xfrm>
-            <a:off x="365760" y="3273552"/>
-            <a:ext cx="1371600" cy="658368"/>
+              <a:t>Syllables</a:t>
+            </a:r>
+            <a:endParaRPr lang="en-US" sz="1100" dirty="0"/>
+          </a:p>
+        </p:txBody>
+      </p:sp>
+      <p:sp>
+        <p:nvSpPr>
+          <p:cNvPr id="24" name="Shape 22"/>
+          <p:cNvSpPr/>
+          <p:nvPr/>
+        </p:nvSpPr>
+        <p:spPr>
+          <a:xfrm>
+            <a:off x="1874520" y="3273552"/>
+            <a:ext cx="6903720" cy="658368"/>
           </a:xfrm>
           <a:prstGeom prst="rect">
             <a:avLst>
@@ -20642,11 +20484,38 @@
             </a:avLst>
           </a:prstGeom>
           <a:solidFill>
-            <a:srgbClr val="E2E8F0"/>
-          </a:solidFill>
-          <a:ln w="12700">
-            <a:solidFill>
-              <a:srgbClr val="E2E8F0"/>
+            <a:srgbClr val="CCFBF1"/>
+          </a:solidFill>
+          <a:ln w="12700">
+            <a:solidFill>
+              <a:srgbClr val="0D9488"/>
+            </a:solidFill>
+            <a:prstDash val="solid"/>
+          </a:ln>
+        </p:spPr>
+      </p:sp>
+      <p:sp>
+        <p:nvSpPr>
+          <p:cNvPr id="25" name="Shape 23"/>
+          <p:cNvSpPr/>
+          <p:nvPr/>
+        </p:nvSpPr>
+        <p:spPr>
+          <a:xfrm>
+            <a:off x="1975104" y="3364992"/>
+            <a:ext cx="1554480" cy="475488"/>
+          </a:xfrm>
+          <a:prstGeom prst="rect">
+            <a:avLst>
+              <a:gd name="adj" fmla="val 9615"/>
+            </a:avLst>
+          </a:prstGeom>
+          <a:solidFill>
+            <a:srgbClr val="FFFFFF"/>
+          </a:solidFill>
+          <a:ln w="12700">
+            <a:solidFill>
+              <a:srgbClr val="0D9488"/>
             </a:solidFill>
             <a:prstDash val="solid"/>
           </a:ln>
@@ -20660,63 +20529,75 @@
         </p:nvSpPr>
         <p:spPr>
           <a:xfrm>
-            <a:off x="365760" y="3273552"/>
-            <a:ext cx="1371600" cy="658368"/>
-          </a:xfrm>
-          <a:prstGeom prst="rect">
-            <a:avLst/>
-          </a:prstGeom>
-          <a:noFill/>
-          <a:ln/>
-        </p:spPr>
-        <p:txBody>
-          <a:bodyPr wrap="square" lIns="0" tIns="0" rIns="0" bIns="0" rtlCol="0" anchor="ctr"/>
-          <a:lstStyle/>
-          <a:p>
-            <a:pPr algn="ctr" indent="0" marL="0">
-              <a:buNone/>
-            </a:pPr>
-            <a:r>
-              <a:rPr lang="en-US" sz="1100" b="1" dirty="0">
-                <a:solidFill>
-                  <a:srgbClr val="475569"/>
+            <a:off x="1975104" y="3364992"/>
+            <a:ext cx="1554480" cy="475488"/>
+          </a:xfrm>
+          <a:prstGeom prst="rect">
+            <a:avLst/>
+          </a:prstGeom>
+          <a:noFill/>
+          <a:ln/>
+        </p:spPr>
+        <p:txBody>
+          <a:bodyPr wrap="square" lIns="0" tIns="0" rIns="0" bIns="0" rtlCol="0" anchor="ctr"/>
+          <a:lstStyle/>
+          <a:p>
+            <a:pPr algn="ctr" indent="0" marL="0">
+              <a:buNone/>
+            </a:pPr>
+            <a:r>
+              <a:rPr lang="en-US" sz="1400" b="1" dirty="0">
+                <a:solidFill>
+                  <a:srgbClr val="0D9488"/>
                 </a:solidFill>
                 <a:latin typeface="Trebuchet MS" pitchFamily="34" charset="0"/>
                 <a:ea typeface="Trebuchet MS" pitchFamily="34" charset="-122"/>
                 <a:cs typeface="Trebuchet MS" pitchFamily="34" charset="-120"/>
               </a:rPr>
-              <a:t>Syllables</a:t>
-            </a:r>
-            <a:endParaRPr lang="en-US" sz="1100" dirty="0"/>
-          </a:p>
-        </p:txBody>
-      </p:sp>
-      <p:sp>
-        <p:nvSpPr>
-          <p:cNvPr id="27" name="Shape 25"/>
-          <p:cNvSpPr/>
-          <p:nvPr/>
-        </p:nvSpPr>
-        <p:spPr>
-          <a:xfrm>
-            <a:off x="1874520" y="3273552"/>
-            <a:ext cx="6903720" cy="658368"/>
-          </a:xfrm>
-          <a:prstGeom prst="rect">
-            <a:avLst>
-              <a:gd name="adj" fmla="val 8333"/>
-            </a:avLst>
-          </a:prstGeom>
-          <a:solidFill>
-            <a:srgbClr val="CCFBF1"/>
-          </a:solidFill>
-          <a:ln w="12700">
-            <a:solidFill>
-              <a:srgbClr val="0D9488"/>
-            </a:solidFill>
-            <a:prstDash val="solid"/>
-          </a:ln>
-        </p:spPr>
+              <a:t>vi</a:t>
+            </a:r>
+            <a:endParaRPr lang="en-US" sz="1400" dirty="0"/>
+          </a:p>
+        </p:txBody>
+      </p:sp>
+      <p:sp>
+        <p:nvSpPr>
+          <p:cNvPr id="27" name="Text 25"/>
+          <p:cNvSpPr/>
+          <p:nvPr/>
+        </p:nvSpPr>
+        <p:spPr>
+          <a:xfrm>
+            <a:off x="3529584" y="3364992"/>
+            <a:ext cx="73152" cy="475488"/>
+          </a:xfrm>
+          <a:prstGeom prst="rect">
+            <a:avLst/>
+          </a:prstGeom>
+          <a:noFill/>
+          <a:ln/>
+        </p:spPr>
+        <p:txBody>
+          <a:bodyPr wrap="square" lIns="0" tIns="0" rIns="0" bIns="0" rtlCol="0" anchor="ctr"/>
+          <a:lstStyle/>
+          <a:p>
+            <a:pPr algn="ctr" indent="0" marL="0">
+              <a:buNone/>
+            </a:pPr>
+            <a:r>
+              <a:rPr lang="en-US" sz="1600" b="1" dirty="0">
+                <a:solidFill>
+                  <a:srgbClr val="0D9488"/>
+                </a:solidFill>
+                <a:latin typeface="Trebuchet MS" pitchFamily="34" charset="0"/>
+                <a:ea typeface="Trebuchet MS" pitchFamily="34" charset="-122"/>
+                <a:cs typeface="Trebuchet MS" pitchFamily="34" charset="-120"/>
+              </a:rPr>
+              <a:t>·</a:t>
+            </a:r>
+            <a:endParaRPr lang="en-US" sz="1600" dirty="0"/>
+          </a:p>
+        </p:txBody>
       </p:sp>
       <p:sp>
         <p:nvSpPr>
@@ -20726,8 +20607,8 @@
         </p:nvSpPr>
         <p:spPr>
           <a:xfrm>
-            <a:off x="2313432" y="3364992"/>
-            <a:ext cx="1645920" cy="475488"/>
+            <a:off x="3602736" y="3364992"/>
+            <a:ext cx="1554480" cy="475488"/>
           </a:xfrm>
           <a:prstGeom prst="rect">
             <a:avLst>
@@ -20753,8 +20634,8 @@
         </p:nvSpPr>
         <p:spPr>
           <a:xfrm>
-            <a:off x="2313432" y="3364992"/>
-            <a:ext cx="1645920" cy="475488"/>
+            <a:off x="3602736" y="3364992"/>
+            <a:ext cx="1554480" cy="475488"/>
           </a:xfrm>
           <a:prstGeom prst="rect">
             <a:avLst/>
@@ -20778,7 +20659,7 @@
                 <a:ea typeface="Trebuchet MS" pitchFamily="34" charset="-122"/>
                 <a:cs typeface="Trebuchet MS" pitchFamily="34" charset="-120"/>
               </a:rPr>
-              <a:t>vis</a:t>
+              <a:t>si</a:t>
             </a:r>
             <a:endParaRPr lang="en-US" sz="1400" dirty="0"/>
           </a:p>
@@ -20792,8 +20673,8 @@
         </p:nvSpPr>
         <p:spPr>
           <a:xfrm>
-            <a:off x="3959352" y="3364992"/>
-            <a:ext cx="411480" cy="475488"/>
+            <a:off x="5157216" y="3364992"/>
+            <a:ext cx="73152" cy="475488"/>
           </a:xfrm>
           <a:prstGeom prst="rect">
             <a:avLst/>
@@ -20831,8 +20712,8 @@
         </p:nvSpPr>
         <p:spPr>
           <a:xfrm>
-            <a:off x="4370832" y="3364992"/>
-            <a:ext cx="1645920" cy="475488"/>
+            <a:off x="5230368" y="3364992"/>
+            <a:ext cx="1554480" cy="475488"/>
           </a:xfrm>
           <a:prstGeom prst="rect">
             <a:avLst>
@@ -20858,8 +20739,8 @@
         </p:nvSpPr>
         <p:spPr>
           <a:xfrm>
-            <a:off x="4370832" y="3364992"/>
-            <a:ext cx="1645920" cy="475488"/>
+            <a:off x="5230368" y="3364992"/>
+            <a:ext cx="1554480" cy="475488"/>
           </a:xfrm>
           <a:prstGeom prst="rect">
             <a:avLst/>
@@ -20883,7 +20764,7 @@
                 <a:ea typeface="Trebuchet MS" pitchFamily="34" charset="-122"/>
                 <a:cs typeface="Trebuchet MS" pitchFamily="34" charset="-120"/>
               </a:rPr>
-              <a:t>it</a:t>
+              <a:t>ta</a:t>
             </a:r>
             <a:endParaRPr lang="en-US" sz="1400" dirty="0"/>
           </a:p>
@@ -20897,8 +20778,8 @@
         </p:nvSpPr>
         <p:spPr>
           <a:xfrm>
-            <a:off x="6016752" y="3364992"/>
-            <a:ext cx="411480" cy="475488"/>
+            <a:off x="6784848" y="3364992"/>
+            <a:ext cx="73152" cy="475488"/>
           </a:xfrm>
           <a:prstGeom prst="rect">
             <a:avLst/>
@@ -20936,8 +20817,8 @@
         </p:nvSpPr>
         <p:spPr>
           <a:xfrm>
-            <a:off x="6428232" y="3364992"/>
-            <a:ext cx="1645920" cy="475488"/>
+            <a:off x="6858000" y="3364992"/>
+            <a:ext cx="1554480" cy="475488"/>
           </a:xfrm>
           <a:prstGeom prst="rect">
             <a:avLst>
@@ -20963,8 +20844,8 @@
         </p:nvSpPr>
         <p:spPr>
           <a:xfrm>
-            <a:off x="6428232" y="3364992"/>
-            <a:ext cx="1645920" cy="475488"/>
+            <a:off x="6858000" y="3364992"/>
+            <a:ext cx="1554480" cy="475488"/>
           </a:xfrm>
           <a:prstGeom prst="rect">
             <a:avLst/>
@@ -20988,7 +20869,7 @@
                 <a:ea typeface="Trebuchet MS" pitchFamily="34" charset="-122"/>
                 <a:cs typeface="Trebuchet MS" pitchFamily="34" charset="-120"/>
               </a:rPr>
-              <a:t>ors</a:t>
+              <a:t>tion</a:t>
             </a:r>
             <a:endParaRPr lang="en-US" sz="1400" dirty="0"/>
           </a:p>
@@ -21551,7 +21432,7 @@
                 <a:ea typeface="Trebuchet MS" pitchFamily="34" charset="-122"/>
                 <a:cs typeface="Trebuchet MS" pitchFamily="34" charset="-120"/>
               </a:rPr>
-              <a:t>visitors</a:t>
+              <a:t>visitation</a:t>
             </a:r>
             <a:endParaRPr lang="en-US" sz="2800" dirty="0"/>
           </a:p>
@@ -21631,7 +21512,7 @@
         </p:nvSpPr>
         <p:spPr>
           <a:xfrm>
-            <a:off x="2221992" y="2258568"/>
+            <a:off x="2938272" y="2258568"/>
             <a:ext cx="1828800" cy="292608"/>
           </a:xfrm>
           <a:prstGeom prst="rect">
@@ -21665,7 +21546,7 @@
         </p:nvSpPr>
         <p:spPr>
           <a:xfrm>
-            <a:off x="2221992" y="2258568"/>
+            <a:off x="2938272" y="2258568"/>
             <a:ext cx="1828800" cy="292608"/>
           </a:xfrm>
           <a:prstGeom prst="rect">
@@ -21704,7 +21585,7 @@
         </p:nvSpPr>
         <p:spPr>
           <a:xfrm>
-            <a:off x="2221992" y="2569464"/>
+            <a:off x="2938272" y="2569464"/>
             <a:ext cx="1828800" cy="201168"/>
           </a:xfrm>
           <a:prstGeom prst="rect">
@@ -21743,7 +21624,7 @@
         </p:nvSpPr>
         <p:spPr>
           <a:xfrm>
-            <a:off x="4370832" y="2258568"/>
+            <a:off x="5803392" y="2258568"/>
             <a:ext cx="1828800" cy="292608"/>
           </a:xfrm>
           <a:prstGeom prst="rect">
@@ -21777,7 +21658,7 @@
         </p:nvSpPr>
         <p:spPr>
           <a:xfrm>
-            <a:off x="4370832" y="2258568"/>
+            <a:off x="5803392" y="2258568"/>
             <a:ext cx="1828800" cy="292608"/>
           </a:xfrm>
           <a:prstGeom prst="rect">
@@ -21802,7 +21683,7 @@
                 <a:ea typeface="Trebuchet MS" pitchFamily="34" charset="-122"/>
                 <a:cs typeface="Trebuchet MS" pitchFamily="34" charset="-120"/>
               </a:rPr>
-              <a:t>or</a:t>
+              <a:t>ation</a:t>
             </a:r>
             <a:endParaRPr lang="en-US" sz="1300" dirty="0"/>
           </a:p>
@@ -21816,7 +21697,7 @@
         </p:nvSpPr>
         <p:spPr>
           <a:xfrm>
-            <a:off x="4370832" y="2569464"/>
+            <a:off x="5803392" y="2569464"/>
             <a:ext cx="1828800" cy="201168"/>
           </a:xfrm>
           <a:prstGeom prst="rect">
@@ -21841,7 +21722,7 @@
                 <a:ea typeface="Calibri" pitchFamily="34" charset="-122"/>
                 <a:cs typeface="Calibri" pitchFamily="34" charset="-120"/>
               </a:rPr>
-              <a:t>a person who does something</a:t>
+              <a:t>the act or result of something</a:t>
             </a:r>
             <a:endParaRPr lang="en-US" sz="850" dirty="0"/>
           </a:p>
@@ -21855,30 +21736,23 @@
         </p:nvSpPr>
         <p:spPr>
           <a:xfrm>
-            <a:off x="6519672" y="2258568"/>
-            <a:ext cx="1828800" cy="292608"/>
+            <a:off x="365760" y="3273552"/>
+            <a:ext cx="1371600" cy="658368"/>
           </a:xfrm>
           <a:prstGeom prst="rect">
             <a:avLst>
-              <a:gd name="adj" fmla="val 25000"/>
+              <a:gd name="adj" fmla="val 8333"/>
             </a:avLst>
           </a:prstGeom>
           <a:solidFill>
-            <a:srgbClr val="FCE7F3"/>
-          </a:solidFill>
-          <a:ln w="19050">
-            <a:solidFill>
-              <a:srgbClr val="DB2777"/>
-            </a:solidFill>
-            <a:prstDash val="solid"/>
-          </a:ln>
-          <a:effectLst>
-            <a:outerShdw sx="100000" sy="100000" kx="0" ky="0" algn="bl" rotWithShape="0" blurRad="101600" dist="38100" dir="8100000">
-              <a:srgbClr val="000000">
-                <a:alpha val="12000"/>
-              </a:srgbClr>
-            </a:outerShdw>
-          </a:effectLst>
+            <a:srgbClr val="E2E8F0"/>
+          </a:solidFill>
+          <a:ln w="12700">
+            <a:solidFill>
+              <a:srgbClr val="E2E8F0"/>
+            </a:solidFill>
+            <a:prstDash val="solid"/>
+          </a:ln>
         </p:spPr>
       </p:sp>
       <p:sp>
@@ -21889,47 +21763,746 @@
         </p:nvSpPr>
         <p:spPr>
           <a:xfrm>
-            <a:off x="6519672" y="2258568"/>
-            <a:ext cx="1828800" cy="292608"/>
-          </a:xfrm>
-          <a:prstGeom prst="rect">
-            <a:avLst/>
-          </a:prstGeom>
-          <a:noFill/>
-          <a:ln/>
-        </p:spPr>
-        <p:txBody>
-          <a:bodyPr wrap="square" lIns="0" tIns="0" rIns="0" bIns="0" rtlCol="0" anchor="ctr"/>
-          <a:lstStyle/>
-          <a:p>
-            <a:pPr algn="ctr" indent="0" marL="0">
-              <a:buNone/>
-            </a:pPr>
-            <a:r>
-              <a:rPr lang="en-US" sz="1300" b="1" dirty="0">
-                <a:solidFill>
-                  <a:srgbClr val="9D174D"/>
+            <a:off x="365760" y="3273552"/>
+            <a:ext cx="1371600" cy="658368"/>
+          </a:xfrm>
+          <a:prstGeom prst="rect">
+            <a:avLst/>
+          </a:prstGeom>
+          <a:noFill/>
+          <a:ln/>
+        </p:spPr>
+        <p:txBody>
+          <a:bodyPr wrap="square" lIns="0" tIns="0" rIns="0" bIns="0" rtlCol="0" anchor="ctr"/>
+          <a:lstStyle/>
+          <a:p>
+            <a:pPr algn="ctr" indent="0" marL="0">
+              <a:buNone/>
+            </a:pPr>
+            <a:r>
+              <a:rPr lang="en-US" sz="1100" b="1" dirty="0">
+                <a:solidFill>
+                  <a:srgbClr val="475569"/>
                 </a:solidFill>
                 <a:latin typeface="Trebuchet MS" pitchFamily="34" charset="0"/>
                 <a:ea typeface="Trebuchet MS" pitchFamily="34" charset="-122"/>
                 <a:cs typeface="Trebuchet MS" pitchFamily="34" charset="-120"/>
               </a:rPr>
+              <a:t>Syllables</a:t>
+            </a:r>
+            <a:endParaRPr lang="en-US" sz="1100" dirty="0"/>
+          </a:p>
+        </p:txBody>
+      </p:sp>
+      <p:sp>
+        <p:nvSpPr>
+          <p:cNvPr id="24" name="Shape 22"/>
+          <p:cNvSpPr/>
+          <p:nvPr/>
+        </p:nvSpPr>
+        <p:spPr>
+          <a:xfrm>
+            <a:off x="1874520" y="3273552"/>
+            <a:ext cx="6903720" cy="658368"/>
+          </a:xfrm>
+          <a:prstGeom prst="rect">
+            <a:avLst>
+              <a:gd name="adj" fmla="val 8333"/>
+            </a:avLst>
+          </a:prstGeom>
+          <a:solidFill>
+            <a:srgbClr val="CCFBF1"/>
+          </a:solidFill>
+          <a:ln w="12700">
+            <a:solidFill>
+              <a:srgbClr val="0D9488"/>
+            </a:solidFill>
+            <a:prstDash val="solid"/>
+          </a:ln>
+        </p:spPr>
+      </p:sp>
+      <p:sp>
+        <p:nvSpPr>
+          <p:cNvPr id="25" name="Shape 23"/>
+          <p:cNvSpPr/>
+          <p:nvPr/>
+        </p:nvSpPr>
+        <p:spPr>
+          <a:xfrm>
+            <a:off x="1975104" y="3364992"/>
+            <a:ext cx="1554480" cy="475488"/>
+          </a:xfrm>
+          <a:prstGeom prst="rect">
+            <a:avLst>
+              <a:gd name="adj" fmla="val 9615"/>
+            </a:avLst>
+          </a:prstGeom>
+          <a:solidFill>
+            <a:srgbClr val="FFFFFF"/>
+          </a:solidFill>
+          <a:ln w="12700">
+            <a:solidFill>
+              <a:srgbClr val="0D9488"/>
+            </a:solidFill>
+            <a:prstDash val="solid"/>
+          </a:ln>
+        </p:spPr>
+      </p:sp>
+      <p:sp>
+        <p:nvSpPr>
+          <p:cNvPr id="26" name="Text 24"/>
+          <p:cNvSpPr/>
+          <p:nvPr/>
+        </p:nvSpPr>
+        <p:spPr>
+          <a:xfrm>
+            <a:off x="1975104" y="3364992"/>
+            <a:ext cx="1554480" cy="475488"/>
+          </a:xfrm>
+          <a:prstGeom prst="rect">
+            <a:avLst/>
+          </a:prstGeom>
+          <a:noFill/>
+          <a:ln/>
+        </p:spPr>
+        <p:txBody>
+          <a:bodyPr wrap="square" lIns="0" tIns="0" rIns="0" bIns="0" rtlCol="0" anchor="ctr"/>
+          <a:lstStyle/>
+          <a:p>
+            <a:pPr algn="ctr" indent="0" marL="0">
+              <a:buNone/>
+            </a:pPr>
+            <a:r>
+              <a:rPr lang="en-US" sz="1400" b="1" dirty="0">
+                <a:solidFill>
+                  <a:srgbClr val="0D9488"/>
+                </a:solidFill>
+                <a:latin typeface="Trebuchet MS" pitchFamily="34" charset="0"/>
+                <a:ea typeface="Trebuchet MS" pitchFamily="34" charset="-122"/>
+                <a:cs typeface="Trebuchet MS" pitchFamily="34" charset="-120"/>
+              </a:rPr>
+              <a:t>vi</a:t>
+            </a:r>
+            <a:endParaRPr lang="en-US" sz="1400" dirty="0"/>
+          </a:p>
+        </p:txBody>
+      </p:sp>
+      <p:sp>
+        <p:nvSpPr>
+          <p:cNvPr id="27" name="Text 25"/>
+          <p:cNvSpPr/>
+          <p:nvPr/>
+        </p:nvSpPr>
+        <p:spPr>
+          <a:xfrm>
+            <a:off x="3529584" y="3364992"/>
+            <a:ext cx="73152" cy="475488"/>
+          </a:xfrm>
+          <a:prstGeom prst="rect">
+            <a:avLst/>
+          </a:prstGeom>
+          <a:noFill/>
+          <a:ln/>
+        </p:spPr>
+        <p:txBody>
+          <a:bodyPr wrap="square" lIns="0" tIns="0" rIns="0" bIns="0" rtlCol="0" anchor="ctr"/>
+          <a:lstStyle/>
+          <a:p>
+            <a:pPr algn="ctr" indent="0" marL="0">
+              <a:buNone/>
+            </a:pPr>
+            <a:r>
+              <a:rPr lang="en-US" sz="1600" b="1" dirty="0">
+                <a:solidFill>
+                  <a:srgbClr val="0D9488"/>
+                </a:solidFill>
+                <a:latin typeface="Trebuchet MS" pitchFamily="34" charset="0"/>
+                <a:ea typeface="Trebuchet MS" pitchFamily="34" charset="-122"/>
+                <a:cs typeface="Trebuchet MS" pitchFamily="34" charset="-120"/>
+              </a:rPr>
+              <a:t>·</a:t>
+            </a:r>
+            <a:endParaRPr lang="en-US" sz="1600" dirty="0"/>
+          </a:p>
+        </p:txBody>
+      </p:sp>
+      <p:sp>
+        <p:nvSpPr>
+          <p:cNvPr id="28" name="Shape 26"/>
+          <p:cNvSpPr/>
+          <p:nvPr/>
+        </p:nvSpPr>
+        <p:spPr>
+          <a:xfrm>
+            <a:off x="3602736" y="3364992"/>
+            <a:ext cx="1554480" cy="475488"/>
+          </a:xfrm>
+          <a:prstGeom prst="rect">
+            <a:avLst>
+              <a:gd name="adj" fmla="val 9615"/>
+            </a:avLst>
+          </a:prstGeom>
+          <a:solidFill>
+            <a:srgbClr val="FFFFFF"/>
+          </a:solidFill>
+          <a:ln w="12700">
+            <a:solidFill>
+              <a:srgbClr val="0D9488"/>
+            </a:solidFill>
+            <a:prstDash val="solid"/>
+          </a:ln>
+        </p:spPr>
+      </p:sp>
+      <p:sp>
+        <p:nvSpPr>
+          <p:cNvPr id="29" name="Text 27"/>
+          <p:cNvSpPr/>
+          <p:nvPr/>
+        </p:nvSpPr>
+        <p:spPr>
+          <a:xfrm>
+            <a:off x="3602736" y="3364992"/>
+            <a:ext cx="1554480" cy="475488"/>
+          </a:xfrm>
+          <a:prstGeom prst="rect">
+            <a:avLst/>
+          </a:prstGeom>
+          <a:noFill/>
+          <a:ln/>
+        </p:spPr>
+        <p:txBody>
+          <a:bodyPr wrap="square" lIns="0" tIns="0" rIns="0" bIns="0" rtlCol="0" anchor="ctr"/>
+          <a:lstStyle/>
+          <a:p>
+            <a:pPr algn="ctr" indent="0" marL="0">
+              <a:buNone/>
+            </a:pPr>
+            <a:r>
+              <a:rPr lang="en-US" sz="1400" b="1" dirty="0">
+                <a:solidFill>
+                  <a:srgbClr val="0D9488"/>
+                </a:solidFill>
+                <a:latin typeface="Trebuchet MS" pitchFamily="34" charset="0"/>
+                <a:ea typeface="Trebuchet MS" pitchFamily="34" charset="-122"/>
+                <a:cs typeface="Trebuchet MS" pitchFamily="34" charset="-120"/>
+              </a:rPr>
+              <a:t>si</a:t>
+            </a:r>
+            <a:endParaRPr lang="en-US" sz="1400" dirty="0"/>
+          </a:p>
+        </p:txBody>
+      </p:sp>
+      <p:sp>
+        <p:nvSpPr>
+          <p:cNvPr id="30" name="Text 28"/>
+          <p:cNvSpPr/>
+          <p:nvPr/>
+        </p:nvSpPr>
+        <p:spPr>
+          <a:xfrm>
+            <a:off x="5157216" y="3364992"/>
+            <a:ext cx="73152" cy="475488"/>
+          </a:xfrm>
+          <a:prstGeom prst="rect">
+            <a:avLst/>
+          </a:prstGeom>
+          <a:noFill/>
+          <a:ln/>
+        </p:spPr>
+        <p:txBody>
+          <a:bodyPr wrap="square" lIns="0" tIns="0" rIns="0" bIns="0" rtlCol="0" anchor="ctr"/>
+          <a:lstStyle/>
+          <a:p>
+            <a:pPr algn="ctr" indent="0" marL="0">
+              <a:buNone/>
+            </a:pPr>
+            <a:r>
+              <a:rPr lang="en-US" sz="1600" b="1" dirty="0">
+                <a:solidFill>
+                  <a:srgbClr val="0D9488"/>
+                </a:solidFill>
+                <a:latin typeface="Trebuchet MS" pitchFamily="34" charset="0"/>
+                <a:ea typeface="Trebuchet MS" pitchFamily="34" charset="-122"/>
+                <a:cs typeface="Trebuchet MS" pitchFamily="34" charset="-120"/>
+              </a:rPr>
+              <a:t>·</a:t>
+            </a:r>
+            <a:endParaRPr lang="en-US" sz="1600" dirty="0"/>
+          </a:p>
+        </p:txBody>
+      </p:sp>
+      <p:sp>
+        <p:nvSpPr>
+          <p:cNvPr id="31" name="Shape 29"/>
+          <p:cNvSpPr/>
+          <p:nvPr/>
+        </p:nvSpPr>
+        <p:spPr>
+          <a:xfrm>
+            <a:off x="5230368" y="3364992"/>
+            <a:ext cx="1554480" cy="475488"/>
+          </a:xfrm>
+          <a:prstGeom prst="rect">
+            <a:avLst>
+              <a:gd name="adj" fmla="val 9615"/>
+            </a:avLst>
+          </a:prstGeom>
+          <a:solidFill>
+            <a:srgbClr val="FFFFFF"/>
+          </a:solidFill>
+          <a:ln w="12700">
+            <a:solidFill>
+              <a:srgbClr val="0D9488"/>
+            </a:solidFill>
+            <a:prstDash val="solid"/>
+          </a:ln>
+        </p:spPr>
+      </p:sp>
+      <p:sp>
+        <p:nvSpPr>
+          <p:cNvPr id="32" name="Text 30"/>
+          <p:cNvSpPr/>
+          <p:nvPr/>
+        </p:nvSpPr>
+        <p:spPr>
+          <a:xfrm>
+            <a:off x="5230368" y="3364992"/>
+            <a:ext cx="1554480" cy="475488"/>
+          </a:xfrm>
+          <a:prstGeom prst="rect">
+            <a:avLst/>
+          </a:prstGeom>
+          <a:noFill/>
+          <a:ln/>
+        </p:spPr>
+        <p:txBody>
+          <a:bodyPr wrap="square" lIns="0" tIns="0" rIns="0" bIns="0" rtlCol="0" anchor="ctr"/>
+          <a:lstStyle/>
+          <a:p>
+            <a:pPr algn="ctr" indent="0" marL="0">
+              <a:buNone/>
+            </a:pPr>
+            <a:r>
+              <a:rPr lang="en-US" sz="1400" b="1" dirty="0">
+                <a:solidFill>
+                  <a:srgbClr val="0D9488"/>
+                </a:solidFill>
+                <a:latin typeface="Trebuchet MS" pitchFamily="34" charset="0"/>
+                <a:ea typeface="Trebuchet MS" pitchFamily="34" charset="-122"/>
+                <a:cs typeface="Trebuchet MS" pitchFamily="34" charset="-120"/>
+              </a:rPr>
+              <a:t>ta</a:t>
+            </a:r>
+            <a:endParaRPr lang="en-US" sz="1400" dirty="0"/>
+          </a:p>
+        </p:txBody>
+      </p:sp>
+      <p:sp>
+        <p:nvSpPr>
+          <p:cNvPr id="33" name="Text 31"/>
+          <p:cNvSpPr/>
+          <p:nvPr/>
+        </p:nvSpPr>
+        <p:spPr>
+          <a:xfrm>
+            <a:off x="6784848" y="3364992"/>
+            <a:ext cx="73152" cy="475488"/>
+          </a:xfrm>
+          <a:prstGeom prst="rect">
+            <a:avLst/>
+          </a:prstGeom>
+          <a:noFill/>
+          <a:ln/>
+        </p:spPr>
+        <p:txBody>
+          <a:bodyPr wrap="square" lIns="0" tIns="0" rIns="0" bIns="0" rtlCol="0" anchor="ctr"/>
+          <a:lstStyle/>
+          <a:p>
+            <a:pPr algn="ctr" indent="0" marL="0">
+              <a:buNone/>
+            </a:pPr>
+            <a:r>
+              <a:rPr lang="en-US" sz="1600" b="1" dirty="0">
+                <a:solidFill>
+                  <a:srgbClr val="0D9488"/>
+                </a:solidFill>
+                <a:latin typeface="Trebuchet MS" pitchFamily="34" charset="0"/>
+                <a:ea typeface="Trebuchet MS" pitchFamily="34" charset="-122"/>
+                <a:cs typeface="Trebuchet MS" pitchFamily="34" charset="-120"/>
+              </a:rPr>
+              <a:t>·</a:t>
+            </a:r>
+            <a:endParaRPr lang="en-US" sz="1600" dirty="0"/>
+          </a:p>
+        </p:txBody>
+      </p:sp>
+      <p:sp>
+        <p:nvSpPr>
+          <p:cNvPr id="34" name="Shape 32"/>
+          <p:cNvSpPr/>
+          <p:nvPr/>
+        </p:nvSpPr>
+        <p:spPr>
+          <a:xfrm>
+            <a:off x="6858000" y="3364992"/>
+            <a:ext cx="1554480" cy="475488"/>
+          </a:xfrm>
+          <a:prstGeom prst="rect">
+            <a:avLst>
+              <a:gd name="adj" fmla="val 9615"/>
+            </a:avLst>
+          </a:prstGeom>
+          <a:solidFill>
+            <a:srgbClr val="FFFFFF"/>
+          </a:solidFill>
+          <a:ln w="12700">
+            <a:solidFill>
+              <a:srgbClr val="0D9488"/>
+            </a:solidFill>
+            <a:prstDash val="solid"/>
+          </a:ln>
+        </p:spPr>
+      </p:sp>
+      <p:sp>
+        <p:nvSpPr>
+          <p:cNvPr id="35" name="Text 33"/>
+          <p:cNvSpPr/>
+          <p:nvPr/>
+        </p:nvSpPr>
+        <p:spPr>
+          <a:xfrm>
+            <a:off x="6858000" y="3364992"/>
+            <a:ext cx="1554480" cy="475488"/>
+          </a:xfrm>
+          <a:prstGeom prst="rect">
+            <a:avLst/>
+          </a:prstGeom>
+          <a:noFill/>
+          <a:ln/>
+        </p:spPr>
+        <p:txBody>
+          <a:bodyPr wrap="square" lIns="0" tIns="0" rIns="0" bIns="0" rtlCol="0" anchor="ctr"/>
+          <a:lstStyle/>
+          <a:p>
+            <a:pPr algn="ctr" indent="0" marL="0">
+              <a:buNone/>
+            </a:pPr>
+            <a:r>
+              <a:rPr lang="en-US" sz="1400" b="1" dirty="0">
+                <a:solidFill>
+                  <a:srgbClr val="0D9488"/>
+                </a:solidFill>
+                <a:latin typeface="Trebuchet MS" pitchFamily="34" charset="0"/>
+                <a:ea typeface="Trebuchet MS" pitchFamily="34" charset="-122"/>
+                <a:cs typeface="Trebuchet MS" pitchFamily="34" charset="-120"/>
+              </a:rPr>
+              <a:t>tion</a:t>
+            </a:r>
+            <a:endParaRPr lang="en-US" sz="1400" dirty="0"/>
+          </a:p>
+        </p:txBody>
+      </p:sp>
+      <p:sp>
+        <p:nvSpPr>
+          <p:cNvPr id="36" name="Shape 34"/>
+          <p:cNvSpPr/>
+          <p:nvPr/>
+        </p:nvSpPr>
+        <p:spPr>
+          <a:xfrm>
+            <a:off x="365760" y="4096512"/>
+            <a:ext cx="1371600" cy="804672"/>
+          </a:xfrm>
+          <a:prstGeom prst="rect">
+            <a:avLst>
+              <a:gd name="adj" fmla="val 6818"/>
+            </a:avLst>
+          </a:prstGeom>
+          <a:solidFill>
+            <a:srgbClr val="E2E8F0"/>
+          </a:solidFill>
+          <a:ln w="12700">
+            <a:solidFill>
+              <a:srgbClr val="E2E8F0"/>
+            </a:solidFill>
+            <a:prstDash val="solid"/>
+          </a:ln>
+        </p:spPr>
+      </p:sp>
+      <p:sp>
+        <p:nvSpPr>
+          <p:cNvPr id="37" name="Text 35"/>
+          <p:cNvSpPr/>
+          <p:nvPr/>
+        </p:nvSpPr>
+        <p:spPr>
+          <a:xfrm>
+            <a:off x="365760" y="4096512"/>
+            <a:ext cx="1371600" cy="804672"/>
+          </a:xfrm>
+          <a:prstGeom prst="rect">
+            <a:avLst/>
+          </a:prstGeom>
+          <a:noFill/>
+          <a:ln/>
+        </p:spPr>
+        <p:txBody>
+          <a:bodyPr wrap="square" lIns="0" tIns="0" rIns="0" bIns="0" rtlCol="0" anchor="ctr"/>
+          <a:lstStyle/>
+          <a:p>
+            <a:pPr algn="ctr" indent="0" marL="0">
+              <a:buNone/>
+            </a:pPr>
+            <a:r>
+              <a:rPr lang="en-US" sz="1100" b="1" dirty="0">
+                <a:solidFill>
+                  <a:srgbClr val="475569"/>
+                </a:solidFill>
+                <a:latin typeface="Trebuchet MS" pitchFamily="34" charset="0"/>
+                <a:ea typeface="Trebuchet MS" pitchFamily="34" charset="-122"/>
+                <a:cs typeface="Trebuchet MS" pitchFamily="34" charset="-120"/>
+              </a:rPr>
+              <a:t>Phonemes</a:t>
+            </a:r>
+            <a:endParaRPr lang="en-US" sz="1100" dirty="0"/>
+          </a:p>
+        </p:txBody>
+      </p:sp>
+      <p:sp>
+        <p:nvSpPr>
+          <p:cNvPr id="38" name="Shape 36"/>
+          <p:cNvSpPr/>
+          <p:nvPr/>
+        </p:nvSpPr>
+        <p:spPr>
+          <a:xfrm>
+            <a:off x="1874520" y="4096512"/>
+            <a:ext cx="6903720" cy="804672"/>
+          </a:xfrm>
+          <a:prstGeom prst="rect">
+            <a:avLst>
+              <a:gd name="adj" fmla="val 6818"/>
+            </a:avLst>
+          </a:prstGeom>
+          <a:solidFill>
+            <a:srgbClr val="FCE7F3"/>
+          </a:solidFill>
+          <a:ln w="12700">
+            <a:solidFill>
+              <a:srgbClr val="DB2777"/>
+            </a:solidFill>
+            <a:prstDash val="solid"/>
+          </a:ln>
+        </p:spPr>
+      </p:sp>
+      <p:sp>
+        <p:nvSpPr>
+          <p:cNvPr id="39" name="Shape 37"/>
+          <p:cNvSpPr/>
+          <p:nvPr/>
+        </p:nvSpPr>
+        <p:spPr>
+          <a:xfrm>
+            <a:off x="1951330" y="4169664"/>
+            <a:ext cx="676656" cy="384048"/>
+          </a:xfrm>
+          <a:prstGeom prst="rect">
+            <a:avLst>
+              <a:gd name="adj" fmla="val 9524"/>
+            </a:avLst>
+          </a:prstGeom>
+          <a:solidFill>
+            <a:srgbClr val="FFFFFF"/>
+          </a:solidFill>
+          <a:ln w="12700">
+            <a:solidFill>
+              <a:srgbClr val="DB2777"/>
+            </a:solidFill>
+            <a:prstDash val="solid"/>
+          </a:ln>
+        </p:spPr>
+      </p:sp>
+      <p:sp>
+        <p:nvSpPr>
+          <p:cNvPr id="40" name="Text 38"/>
+          <p:cNvSpPr/>
+          <p:nvPr/>
+        </p:nvSpPr>
+        <p:spPr>
+          <a:xfrm>
+            <a:off x="1951330" y="4169664"/>
+            <a:ext cx="676656" cy="384048"/>
+          </a:xfrm>
+          <a:prstGeom prst="rect">
+            <a:avLst/>
+          </a:prstGeom>
+          <a:noFill/>
+          <a:ln/>
+        </p:spPr>
+        <p:txBody>
+          <a:bodyPr wrap="square" lIns="0" tIns="0" rIns="0" bIns="0" rtlCol="0" anchor="ctr"/>
+          <a:lstStyle/>
+          <a:p>
+            <a:pPr algn="ctr" indent="0" marL="0">
+              <a:buNone/>
+            </a:pPr>
+            <a:r>
+              <a:rPr lang="en-US" sz="900" b="1" dirty="0">
+                <a:solidFill>
+                  <a:srgbClr val="9D174D"/>
+                </a:solidFill>
+                <a:latin typeface="Trebuchet MS" pitchFamily="34" charset="0"/>
+                <a:ea typeface="Trebuchet MS" pitchFamily="34" charset="-122"/>
+                <a:cs typeface="Trebuchet MS" pitchFamily="34" charset="-120"/>
+              </a:rPr>
+              <a:t>v</a:t>
+            </a:r>
+            <a:endParaRPr lang="en-US" sz="900" dirty="0"/>
+          </a:p>
+        </p:txBody>
+      </p:sp>
+      <p:sp>
+        <p:nvSpPr>
+          <p:cNvPr id="41" name="Shape 39"/>
+          <p:cNvSpPr/>
+          <p:nvPr/>
+        </p:nvSpPr>
+        <p:spPr>
+          <a:xfrm>
+            <a:off x="2677363" y="4169664"/>
+            <a:ext cx="676656" cy="384048"/>
+          </a:xfrm>
+          <a:prstGeom prst="rect">
+            <a:avLst>
+              <a:gd name="adj" fmla="val 9524"/>
+            </a:avLst>
+          </a:prstGeom>
+          <a:solidFill>
+            <a:srgbClr val="FFFFFF"/>
+          </a:solidFill>
+          <a:ln w="12700">
+            <a:solidFill>
+              <a:srgbClr val="DB2777"/>
+            </a:solidFill>
+            <a:prstDash val="solid"/>
+          </a:ln>
+        </p:spPr>
+      </p:sp>
+      <p:sp>
+        <p:nvSpPr>
+          <p:cNvPr id="42" name="Text 40"/>
+          <p:cNvSpPr/>
+          <p:nvPr/>
+        </p:nvSpPr>
+        <p:spPr>
+          <a:xfrm>
+            <a:off x="2677363" y="4169664"/>
+            <a:ext cx="676656" cy="384048"/>
+          </a:xfrm>
+          <a:prstGeom prst="rect">
+            <a:avLst/>
+          </a:prstGeom>
+          <a:noFill/>
+          <a:ln/>
+        </p:spPr>
+        <p:txBody>
+          <a:bodyPr wrap="square" lIns="0" tIns="0" rIns="0" bIns="0" rtlCol="0" anchor="ctr"/>
+          <a:lstStyle/>
+          <a:p>
+            <a:pPr algn="ctr" indent="0" marL="0">
+              <a:buNone/>
+            </a:pPr>
+            <a:r>
+              <a:rPr lang="en-US" sz="900" b="1" dirty="0">
+                <a:solidFill>
+                  <a:srgbClr val="9D174D"/>
+                </a:solidFill>
+                <a:latin typeface="Trebuchet MS" pitchFamily="34" charset="0"/>
+                <a:ea typeface="Trebuchet MS" pitchFamily="34" charset="-122"/>
+                <a:cs typeface="Trebuchet MS" pitchFamily="34" charset="-120"/>
+              </a:rPr>
+              <a:t>i</a:t>
+            </a:r>
+            <a:endParaRPr lang="en-US" sz="900" dirty="0"/>
+          </a:p>
+        </p:txBody>
+      </p:sp>
+      <p:sp>
+        <p:nvSpPr>
+          <p:cNvPr id="43" name="Shape 41"/>
+          <p:cNvSpPr/>
+          <p:nvPr/>
+        </p:nvSpPr>
+        <p:spPr>
+          <a:xfrm>
+            <a:off x="3403397" y="4169664"/>
+            <a:ext cx="676656" cy="384048"/>
+          </a:xfrm>
+          <a:prstGeom prst="rect">
+            <a:avLst>
+              <a:gd name="adj" fmla="val 9524"/>
+            </a:avLst>
+          </a:prstGeom>
+          <a:solidFill>
+            <a:srgbClr val="FFFFFF"/>
+          </a:solidFill>
+          <a:ln w="12700">
+            <a:solidFill>
+              <a:srgbClr val="DB2777"/>
+            </a:solidFill>
+            <a:prstDash val="solid"/>
+          </a:ln>
+        </p:spPr>
+      </p:sp>
+      <p:sp>
+        <p:nvSpPr>
+          <p:cNvPr id="44" name="Text 42"/>
+          <p:cNvSpPr/>
+          <p:nvPr/>
+        </p:nvSpPr>
+        <p:spPr>
+          <a:xfrm>
+            <a:off x="3403397" y="4169664"/>
+            <a:ext cx="676656" cy="384048"/>
+          </a:xfrm>
+          <a:prstGeom prst="rect">
+            <a:avLst/>
+          </a:prstGeom>
+          <a:noFill/>
+          <a:ln/>
+        </p:spPr>
+        <p:txBody>
+          <a:bodyPr wrap="square" lIns="0" tIns="0" rIns="0" bIns="0" rtlCol="0" anchor="ctr"/>
+          <a:lstStyle/>
+          <a:p>
+            <a:pPr algn="ctr" indent="0" marL="0">
+              <a:buNone/>
+            </a:pPr>
+            <a:r>
+              <a:rPr lang="en-US" sz="900" b="1" dirty="0">
+                <a:solidFill>
+                  <a:srgbClr val="9D174D"/>
+                </a:solidFill>
+                <a:latin typeface="Trebuchet MS" pitchFamily="34" charset="0"/>
+                <a:ea typeface="Trebuchet MS" pitchFamily="34" charset="-122"/>
+                <a:cs typeface="Trebuchet MS" pitchFamily="34" charset="-120"/>
+              </a:rPr>
               <a:t>s</a:t>
             </a:r>
-            <a:endParaRPr lang="en-US" sz="1300" dirty="0"/>
-          </a:p>
-        </p:txBody>
-      </p:sp>
-      <p:sp>
-        <p:nvSpPr>
-          <p:cNvPr id="24" name="Text 22"/>
-          <p:cNvSpPr/>
-          <p:nvPr/>
-        </p:nvSpPr>
-        <p:spPr>
-          <a:xfrm>
-            <a:off x="6519672" y="2569464"/>
-            <a:ext cx="1828800" cy="201168"/>
+            <a:endParaRPr lang="en-US" sz="900" dirty="0"/>
+          </a:p>
+        </p:txBody>
+      </p:sp>
+      <p:sp>
+        <p:nvSpPr>
+          <p:cNvPr id="45" name="Text 43"/>
+          <p:cNvSpPr/>
+          <p:nvPr/>
+        </p:nvSpPr>
+        <p:spPr>
+          <a:xfrm>
+            <a:off x="3403397" y="4572000"/>
+            <a:ext cx="676656" cy="219456"/>
           </a:xfrm>
           <a:prstGeom prst="rect">
             <a:avLst/>
@@ -21945,232 +22518,232 @@
               <a:buNone/>
             </a:pPr>
             <a:r>
-              <a:rPr lang="en-US" sz="850" dirty="0">
-                <a:solidFill>
-                  <a:srgbClr val="475569"/>
+              <a:rPr lang="en-US" sz="750" i="1" dirty="0">
+                <a:solidFill>
+                  <a:srgbClr val="94A3B8"/>
                 </a:solidFill>
                 <a:latin typeface="Calibri" pitchFamily="34" charset="0"/>
                 <a:ea typeface="Calibri" pitchFamily="34" charset="-122"/>
                 <a:cs typeface="Calibri" pitchFamily="34" charset="-120"/>
               </a:rPr>
-              <a:t>more than one</a:t>
-            </a:r>
-            <a:endParaRPr lang="en-US" sz="850" dirty="0"/>
-          </a:p>
-        </p:txBody>
-      </p:sp>
-      <p:sp>
-        <p:nvSpPr>
-          <p:cNvPr id="25" name="Shape 23"/>
-          <p:cNvSpPr/>
-          <p:nvPr/>
-        </p:nvSpPr>
-        <p:spPr>
-          <a:xfrm>
-            <a:off x="365760" y="3273552"/>
-            <a:ext cx="1371600" cy="658368"/>
+              <a:t>/z/</a:t>
+            </a:r>
+            <a:endParaRPr lang="en-US" sz="750" dirty="0"/>
+          </a:p>
+        </p:txBody>
+      </p:sp>
+      <p:sp>
+        <p:nvSpPr>
+          <p:cNvPr id="46" name="Shape 44"/>
+          <p:cNvSpPr/>
+          <p:nvPr/>
+        </p:nvSpPr>
+        <p:spPr>
+          <a:xfrm>
+            <a:off x="4129430" y="4169664"/>
+            <a:ext cx="676656" cy="384048"/>
           </a:xfrm>
           <a:prstGeom prst="rect">
             <a:avLst>
-              <a:gd name="adj" fmla="val 8333"/>
+              <a:gd name="adj" fmla="val 9524"/>
             </a:avLst>
           </a:prstGeom>
           <a:solidFill>
-            <a:srgbClr val="E2E8F0"/>
-          </a:solidFill>
-          <a:ln w="12700">
-            <a:solidFill>
-              <a:srgbClr val="E2E8F0"/>
-            </a:solidFill>
-            <a:prstDash val="solid"/>
-          </a:ln>
-        </p:spPr>
-      </p:sp>
-      <p:sp>
-        <p:nvSpPr>
-          <p:cNvPr id="26" name="Text 24"/>
-          <p:cNvSpPr/>
-          <p:nvPr/>
-        </p:nvSpPr>
-        <p:spPr>
-          <a:xfrm>
-            <a:off x="365760" y="3273552"/>
-            <a:ext cx="1371600" cy="658368"/>
-          </a:xfrm>
-          <a:prstGeom prst="rect">
-            <a:avLst/>
-          </a:prstGeom>
-          <a:noFill/>
-          <a:ln/>
-        </p:spPr>
-        <p:txBody>
-          <a:bodyPr wrap="square" lIns="0" tIns="0" rIns="0" bIns="0" rtlCol="0" anchor="ctr"/>
-          <a:lstStyle/>
-          <a:p>
-            <a:pPr algn="ctr" indent="0" marL="0">
-              <a:buNone/>
-            </a:pPr>
-            <a:r>
-              <a:rPr lang="en-US" sz="1100" b="1" dirty="0">
-                <a:solidFill>
-                  <a:srgbClr val="475569"/>
+            <a:srgbClr val="FFFFFF"/>
+          </a:solidFill>
+          <a:ln w="12700">
+            <a:solidFill>
+              <a:srgbClr val="DB2777"/>
+            </a:solidFill>
+            <a:prstDash val="solid"/>
+          </a:ln>
+        </p:spPr>
+      </p:sp>
+      <p:sp>
+        <p:nvSpPr>
+          <p:cNvPr id="47" name="Text 45"/>
+          <p:cNvSpPr/>
+          <p:nvPr/>
+        </p:nvSpPr>
+        <p:spPr>
+          <a:xfrm>
+            <a:off x="4129430" y="4169664"/>
+            <a:ext cx="676656" cy="384048"/>
+          </a:xfrm>
+          <a:prstGeom prst="rect">
+            <a:avLst/>
+          </a:prstGeom>
+          <a:noFill/>
+          <a:ln/>
+        </p:spPr>
+        <p:txBody>
+          <a:bodyPr wrap="square" lIns="0" tIns="0" rIns="0" bIns="0" rtlCol="0" anchor="ctr"/>
+          <a:lstStyle/>
+          <a:p>
+            <a:pPr algn="ctr" indent="0" marL="0">
+              <a:buNone/>
+            </a:pPr>
+            <a:r>
+              <a:rPr lang="en-US" sz="900" b="1" dirty="0">
+                <a:solidFill>
+                  <a:srgbClr val="9D174D"/>
                 </a:solidFill>
                 <a:latin typeface="Trebuchet MS" pitchFamily="34" charset="0"/>
                 <a:ea typeface="Trebuchet MS" pitchFamily="34" charset="-122"/>
                 <a:cs typeface="Trebuchet MS" pitchFamily="34" charset="-120"/>
               </a:rPr>
-              <a:t>Syllables</a:t>
-            </a:r>
-            <a:endParaRPr lang="en-US" sz="1100" dirty="0"/>
-          </a:p>
-        </p:txBody>
-      </p:sp>
-      <p:sp>
-        <p:nvSpPr>
-          <p:cNvPr id="27" name="Shape 25"/>
-          <p:cNvSpPr/>
-          <p:nvPr/>
-        </p:nvSpPr>
-        <p:spPr>
-          <a:xfrm>
-            <a:off x="1874520" y="3273552"/>
-            <a:ext cx="6903720" cy="658368"/>
+              <a:t>i</a:t>
+            </a:r>
+            <a:endParaRPr lang="en-US" sz="900" dirty="0"/>
+          </a:p>
+        </p:txBody>
+      </p:sp>
+      <p:sp>
+        <p:nvSpPr>
+          <p:cNvPr id="48" name="Shape 46"/>
+          <p:cNvSpPr/>
+          <p:nvPr/>
+        </p:nvSpPr>
+        <p:spPr>
+          <a:xfrm>
+            <a:off x="4855464" y="4169664"/>
+            <a:ext cx="676656" cy="384048"/>
           </a:xfrm>
           <a:prstGeom prst="rect">
             <a:avLst>
-              <a:gd name="adj" fmla="val 8333"/>
+              <a:gd name="adj" fmla="val 9524"/>
             </a:avLst>
           </a:prstGeom>
           <a:solidFill>
-            <a:srgbClr val="CCFBF1"/>
-          </a:solidFill>
-          <a:ln w="12700">
-            <a:solidFill>
-              <a:srgbClr val="0D9488"/>
-            </a:solidFill>
-            <a:prstDash val="solid"/>
-          </a:ln>
-        </p:spPr>
-      </p:sp>
-      <p:sp>
-        <p:nvSpPr>
-          <p:cNvPr id="28" name="Shape 26"/>
-          <p:cNvSpPr/>
-          <p:nvPr/>
-        </p:nvSpPr>
-        <p:spPr>
-          <a:xfrm>
-            <a:off x="2313432" y="3364992"/>
-            <a:ext cx="1645920" cy="475488"/>
-          </a:xfrm>
-          <a:prstGeom prst="rect">
-            <a:avLst>
-              <a:gd name="adj" fmla="val 9615"/>
-            </a:avLst>
-          </a:prstGeom>
-          <a:solidFill>
             <a:srgbClr val="FFFFFF"/>
           </a:solidFill>
           <a:ln w="12700">
             <a:solidFill>
-              <a:srgbClr val="0D9488"/>
-            </a:solidFill>
-            <a:prstDash val="solid"/>
-          </a:ln>
-        </p:spPr>
-      </p:sp>
-      <p:sp>
-        <p:nvSpPr>
-          <p:cNvPr id="29" name="Text 27"/>
-          <p:cNvSpPr/>
-          <p:nvPr/>
-        </p:nvSpPr>
-        <p:spPr>
-          <a:xfrm>
-            <a:off x="2313432" y="3364992"/>
-            <a:ext cx="1645920" cy="475488"/>
-          </a:xfrm>
-          <a:prstGeom prst="rect">
-            <a:avLst/>
-          </a:prstGeom>
-          <a:noFill/>
-          <a:ln/>
-        </p:spPr>
-        <p:txBody>
-          <a:bodyPr wrap="square" lIns="0" tIns="0" rIns="0" bIns="0" rtlCol="0" anchor="ctr"/>
-          <a:lstStyle/>
-          <a:p>
-            <a:pPr algn="ctr" indent="0" marL="0">
-              <a:buNone/>
-            </a:pPr>
-            <a:r>
-              <a:rPr lang="en-US" sz="1400" b="1" dirty="0">
-                <a:solidFill>
-                  <a:srgbClr val="0D9488"/>
+              <a:srgbClr val="DB2777"/>
+            </a:solidFill>
+            <a:prstDash val="solid"/>
+          </a:ln>
+        </p:spPr>
+      </p:sp>
+      <p:sp>
+        <p:nvSpPr>
+          <p:cNvPr id="49" name="Text 47"/>
+          <p:cNvSpPr/>
+          <p:nvPr/>
+        </p:nvSpPr>
+        <p:spPr>
+          <a:xfrm>
+            <a:off x="4855464" y="4169664"/>
+            <a:ext cx="676656" cy="384048"/>
+          </a:xfrm>
+          <a:prstGeom prst="rect">
+            <a:avLst/>
+          </a:prstGeom>
+          <a:noFill/>
+          <a:ln/>
+        </p:spPr>
+        <p:txBody>
+          <a:bodyPr wrap="square" lIns="0" tIns="0" rIns="0" bIns="0" rtlCol="0" anchor="ctr"/>
+          <a:lstStyle/>
+          <a:p>
+            <a:pPr algn="ctr" indent="0" marL="0">
+              <a:buNone/>
+            </a:pPr>
+            <a:r>
+              <a:rPr lang="en-US" sz="900" b="1" dirty="0">
+                <a:solidFill>
+                  <a:srgbClr val="9D174D"/>
                 </a:solidFill>
                 <a:latin typeface="Trebuchet MS" pitchFamily="34" charset="0"/>
                 <a:ea typeface="Trebuchet MS" pitchFamily="34" charset="-122"/>
                 <a:cs typeface="Trebuchet MS" pitchFamily="34" charset="-120"/>
               </a:rPr>
-              <a:t>vis</a:t>
-            </a:r>
-            <a:endParaRPr lang="en-US" sz="1400" dirty="0"/>
-          </a:p>
-        </p:txBody>
-      </p:sp>
-      <p:sp>
-        <p:nvSpPr>
-          <p:cNvPr id="30" name="Text 28"/>
-          <p:cNvSpPr/>
-          <p:nvPr/>
-        </p:nvSpPr>
-        <p:spPr>
-          <a:xfrm>
-            <a:off x="3959352" y="3364992"/>
-            <a:ext cx="411480" cy="475488"/>
-          </a:xfrm>
-          <a:prstGeom prst="rect">
-            <a:avLst/>
-          </a:prstGeom>
-          <a:noFill/>
-          <a:ln/>
-        </p:spPr>
-        <p:txBody>
-          <a:bodyPr wrap="square" lIns="0" tIns="0" rIns="0" bIns="0" rtlCol="0" anchor="ctr"/>
-          <a:lstStyle/>
-          <a:p>
-            <a:pPr algn="ctr" indent="0" marL="0">
-              <a:buNone/>
-            </a:pPr>
-            <a:r>
-              <a:rPr lang="en-US" sz="1600" b="1" dirty="0">
-                <a:solidFill>
-                  <a:srgbClr val="0D9488"/>
+              <a:t>t</a:t>
+            </a:r>
+            <a:endParaRPr lang="en-US" sz="900" dirty="0"/>
+          </a:p>
+        </p:txBody>
+      </p:sp>
+      <p:sp>
+        <p:nvSpPr>
+          <p:cNvPr id="50" name="Shape 48"/>
+          <p:cNvSpPr/>
+          <p:nvPr/>
+        </p:nvSpPr>
+        <p:spPr>
+          <a:xfrm>
+            <a:off x="5581498" y="4169664"/>
+            <a:ext cx="676656" cy="384048"/>
+          </a:xfrm>
+          <a:prstGeom prst="rect">
+            <a:avLst>
+              <a:gd name="adj" fmla="val 9524"/>
+            </a:avLst>
+          </a:prstGeom>
+          <a:solidFill>
+            <a:srgbClr val="FFFFFF"/>
+          </a:solidFill>
+          <a:ln w="12700">
+            <a:solidFill>
+              <a:srgbClr val="DB2777"/>
+            </a:solidFill>
+            <a:prstDash val="solid"/>
+          </a:ln>
+        </p:spPr>
+      </p:sp>
+      <p:sp>
+        <p:nvSpPr>
+          <p:cNvPr id="51" name="Text 49"/>
+          <p:cNvSpPr/>
+          <p:nvPr/>
+        </p:nvSpPr>
+        <p:spPr>
+          <a:xfrm>
+            <a:off x="5581498" y="4169664"/>
+            <a:ext cx="676656" cy="384048"/>
+          </a:xfrm>
+          <a:prstGeom prst="rect">
+            <a:avLst/>
+          </a:prstGeom>
+          <a:noFill/>
+          <a:ln/>
+        </p:spPr>
+        <p:txBody>
+          <a:bodyPr wrap="square" lIns="0" tIns="0" rIns="0" bIns="0" rtlCol="0" anchor="ctr"/>
+          <a:lstStyle/>
+          <a:p>
+            <a:pPr algn="ctr" indent="0" marL="0">
+              <a:buNone/>
+            </a:pPr>
+            <a:r>
+              <a:rPr lang="en-US" sz="900" b="1" dirty="0">
+                <a:solidFill>
+                  <a:srgbClr val="9D174D"/>
                 </a:solidFill>
                 <a:latin typeface="Trebuchet MS" pitchFamily="34" charset="0"/>
                 <a:ea typeface="Trebuchet MS" pitchFamily="34" charset="-122"/>
                 <a:cs typeface="Trebuchet MS" pitchFamily="34" charset="-120"/>
               </a:rPr>
-              <a:t>·</a:t>
-            </a:r>
-            <a:endParaRPr lang="en-US" sz="1600" dirty="0"/>
-          </a:p>
-        </p:txBody>
-      </p:sp>
-      <p:sp>
-        <p:nvSpPr>
-          <p:cNvPr id="31" name="Shape 29"/>
-          <p:cNvSpPr/>
-          <p:nvPr/>
-        </p:nvSpPr>
-        <p:spPr>
-          <a:xfrm>
-            <a:off x="4370832" y="3364992"/>
-            <a:ext cx="1645920" cy="475488"/>
+              <a:t>a</a:t>
+            </a:r>
+            <a:endParaRPr lang="en-US" sz="900" dirty="0"/>
+          </a:p>
+        </p:txBody>
+      </p:sp>
+      <p:sp>
+        <p:nvSpPr>
+          <p:cNvPr id="52" name="Shape 50"/>
+          <p:cNvSpPr/>
+          <p:nvPr/>
+        </p:nvSpPr>
+        <p:spPr>
+          <a:xfrm>
+            <a:off x="6307531" y="4169664"/>
+            <a:ext cx="676656" cy="384048"/>
           </a:xfrm>
           <a:prstGeom prst="rect">
             <a:avLst>
-              <a:gd name="adj" fmla="val 9615"/>
+              <a:gd name="adj" fmla="val 9524"/>
             </a:avLst>
           </a:prstGeom>
           <a:solidFill>
@@ -22178,104 +22751,170 @@
           </a:solidFill>
           <a:ln w="12700">
             <a:solidFill>
-              <a:srgbClr val="0D9488"/>
-            </a:solidFill>
-            <a:prstDash val="solid"/>
-          </a:ln>
-        </p:spPr>
-      </p:sp>
-      <p:sp>
-        <p:nvSpPr>
-          <p:cNvPr id="32" name="Text 30"/>
-          <p:cNvSpPr/>
-          <p:nvPr/>
-        </p:nvSpPr>
-        <p:spPr>
-          <a:xfrm>
-            <a:off x="4370832" y="3364992"/>
-            <a:ext cx="1645920" cy="475488"/>
-          </a:xfrm>
-          <a:prstGeom prst="rect">
-            <a:avLst/>
-          </a:prstGeom>
-          <a:noFill/>
-          <a:ln/>
-        </p:spPr>
-        <p:txBody>
-          <a:bodyPr wrap="square" lIns="0" tIns="0" rIns="0" bIns="0" rtlCol="0" anchor="ctr"/>
-          <a:lstStyle/>
-          <a:p>
-            <a:pPr algn="ctr" indent="0" marL="0">
-              <a:buNone/>
-            </a:pPr>
-            <a:r>
-              <a:rPr lang="en-US" sz="1400" b="1" dirty="0">
-                <a:solidFill>
-                  <a:srgbClr val="0D9488"/>
+              <a:srgbClr val="DB2777"/>
+            </a:solidFill>
+            <a:prstDash val="solid"/>
+          </a:ln>
+        </p:spPr>
+      </p:sp>
+      <p:sp>
+        <p:nvSpPr>
+          <p:cNvPr id="53" name="Text 51"/>
+          <p:cNvSpPr/>
+          <p:nvPr/>
+        </p:nvSpPr>
+        <p:spPr>
+          <a:xfrm>
+            <a:off x="6307531" y="4169664"/>
+            <a:ext cx="676656" cy="384048"/>
+          </a:xfrm>
+          <a:prstGeom prst="rect">
+            <a:avLst/>
+          </a:prstGeom>
+          <a:noFill/>
+          <a:ln/>
+        </p:spPr>
+        <p:txBody>
+          <a:bodyPr wrap="square" lIns="0" tIns="0" rIns="0" bIns="0" rtlCol="0" anchor="ctr"/>
+          <a:lstStyle/>
+          <a:p>
+            <a:pPr algn="ctr" indent="0" marL="0">
+              <a:buNone/>
+            </a:pPr>
+            <a:r>
+              <a:rPr lang="en-US" sz="900" b="1" dirty="0">
+                <a:solidFill>
+                  <a:srgbClr val="9D174D"/>
                 </a:solidFill>
                 <a:latin typeface="Trebuchet MS" pitchFamily="34" charset="0"/>
                 <a:ea typeface="Trebuchet MS" pitchFamily="34" charset="-122"/>
                 <a:cs typeface="Trebuchet MS" pitchFamily="34" charset="-120"/>
               </a:rPr>
-              <a:t>it</a:t>
-            </a:r>
-            <a:endParaRPr lang="en-US" sz="1400" dirty="0"/>
-          </a:p>
-        </p:txBody>
-      </p:sp>
-      <p:sp>
-        <p:nvSpPr>
-          <p:cNvPr id="33" name="Text 31"/>
-          <p:cNvSpPr/>
-          <p:nvPr/>
-        </p:nvSpPr>
-        <p:spPr>
-          <a:xfrm>
-            <a:off x="6016752" y="3364992"/>
-            <a:ext cx="411480" cy="475488"/>
-          </a:xfrm>
-          <a:prstGeom prst="rect">
-            <a:avLst/>
-          </a:prstGeom>
-          <a:noFill/>
-          <a:ln/>
-        </p:spPr>
-        <p:txBody>
-          <a:bodyPr wrap="square" lIns="0" tIns="0" rIns="0" bIns="0" rtlCol="0" anchor="ctr"/>
-          <a:lstStyle/>
-          <a:p>
-            <a:pPr algn="ctr" indent="0" marL="0">
-              <a:buNone/>
-            </a:pPr>
-            <a:r>
-              <a:rPr lang="en-US" sz="1600" b="1" dirty="0">
-                <a:solidFill>
-                  <a:srgbClr val="0D9488"/>
+              <a:t>t</a:t>
+            </a:r>
+            <a:endParaRPr lang="en-US" sz="900" dirty="0"/>
+          </a:p>
+        </p:txBody>
+      </p:sp>
+      <p:sp>
+        <p:nvSpPr>
+          <p:cNvPr id="54" name="Text 52"/>
+          <p:cNvSpPr/>
+          <p:nvPr/>
+        </p:nvSpPr>
+        <p:spPr>
+          <a:xfrm>
+            <a:off x="6307531" y="4572000"/>
+            <a:ext cx="676656" cy="219456"/>
+          </a:xfrm>
+          <a:prstGeom prst="rect">
+            <a:avLst/>
+          </a:prstGeom>
+          <a:noFill/>
+          <a:ln/>
+        </p:spPr>
+        <p:txBody>
+          <a:bodyPr wrap="square" lIns="0" tIns="0" rIns="0" bIns="0" rtlCol="0" anchor="t"/>
+          <a:lstStyle/>
+          <a:p>
+            <a:pPr algn="ctr" indent="0" marL="0">
+              <a:buNone/>
+            </a:pPr>
+            <a:r>
+              <a:rPr lang="en-US" sz="750" i="1" dirty="0">
+                <a:solidFill>
+                  <a:srgbClr val="94A3B8"/>
+                </a:solidFill>
+                <a:latin typeface="Calibri" pitchFamily="34" charset="0"/>
+                <a:ea typeface="Calibri" pitchFamily="34" charset="-122"/>
+                <a:cs typeface="Calibri" pitchFamily="34" charset="-120"/>
+              </a:rPr>
+              <a:t>/sh/</a:t>
+            </a:r>
+            <a:endParaRPr lang="en-US" sz="750" dirty="0"/>
+          </a:p>
+        </p:txBody>
+      </p:sp>
+      <p:sp>
+        <p:nvSpPr>
+          <p:cNvPr id="55" name="Shape 53"/>
+          <p:cNvSpPr/>
+          <p:nvPr/>
+        </p:nvSpPr>
+        <p:spPr>
+          <a:xfrm>
+            <a:off x="7033565" y="4169664"/>
+            <a:ext cx="676656" cy="384048"/>
+          </a:xfrm>
+          <a:prstGeom prst="rect">
+            <a:avLst>
+              <a:gd name="adj" fmla="val 9524"/>
+            </a:avLst>
+          </a:prstGeom>
+          <a:solidFill>
+            <a:srgbClr val="FFFFFF"/>
+          </a:solidFill>
+          <a:ln w="12700">
+            <a:solidFill>
+              <a:srgbClr val="DB2777"/>
+            </a:solidFill>
+            <a:prstDash val="solid"/>
+          </a:ln>
+        </p:spPr>
+      </p:sp>
+      <p:sp>
+        <p:nvSpPr>
+          <p:cNvPr id="56" name="Text 54"/>
+          <p:cNvSpPr/>
+          <p:nvPr/>
+        </p:nvSpPr>
+        <p:spPr>
+          <a:xfrm>
+            <a:off x="7033565" y="4169664"/>
+            <a:ext cx="676656" cy="384048"/>
+          </a:xfrm>
+          <a:prstGeom prst="rect">
+            <a:avLst/>
+          </a:prstGeom>
+          <a:noFill/>
+          <a:ln/>
+        </p:spPr>
+        <p:txBody>
+          <a:bodyPr wrap="square" lIns="0" tIns="0" rIns="0" bIns="0" rtlCol="0" anchor="ctr"/>
+          <a:lstStyle/>
+          <a:p>
+            <a:pPr algn="ctr" indent="0" marL="0">
+              <a:buNone/>
+            </a:pPr>
+            <a:r>
+              <a:rPr lang="en-US" sz="900" b="1" dirty="0">
+                <a:solidFill>
+                  <a:srgbClr val="9D174D"/>
                 </a:solidFill>
                 <a:latin typeface="Trebuchet MS" pitchFamily="34" charset="0"/>
                 <a:ea typeface="Trebuchet MS" pitchFamily="34" charset="-122"/>
                 <a:cs typeface="Trebuchet MS" pitchFamily="34" charset="-120"/>
               </a:rPr>
-              <a:t>·</a:t>
-            </a:r>
-            <a:endParaRPr lang="en-US" sz="1600" dirty="0"/>
-          </a:p>
-        </p:txBody>
-      </p:sp>
-      <p:sp>
-        <p:nvSpPr>
-          <p:cNvPr id="34" name="Shape 32"/>
-          <p:cNvSpPr/>
-          <p:nvPr/>
-        </p:nvSpPr>
-        <p:spPr>
-          <a:xfrm>
-            <a:off x="6428232" y="3364992"/>
-            <a:ext cx="1645920" cy="475488"/>
+              <a:t>io</a:t>
+            </a:r>
+            <a:endParaRPr lang="en-US" sz="900" dirty="0"/>
+          </a:p>
+        </p:txBody>
+      </p:sp>
+      <p:sp>
+        <p:nvSpPr>
+          <p:cNvPr id="57" name="Shape 55"/>
+          <p:cNvSpPr/>
+          <p:nvPr/>
+        </p:nvSpPr>
+        <p:spPr>
+          <a:xfrm>
+            <a:off x="7759598" y="4169664"/>
+            <a:ext cx="676656" cy="384048"/>
           </a:xfrm>
           <a:prstGeom prst="rect">
             <a:avLst>
-              <a:gd name="adj" fmla="val 9615"/>
+              <a:gd name="adj" fmla="val 9524"/>
             </a:avLst>
           </a:prstGeom>
           <a:solidFill>
@@ -22283,640 +22922,46 @@
           </a:solidFill>
           <a:ln w="12700">
             <a:solidFill>
-              <a:srgbClr val="0D9488"/>
-            </a:solidFill>
-            <a:prstDash val="solid"/>
-          </a:ln>
-        </p:spPr>
-      </p:sp>
-      <p:sp>
-        <p:nvSpPr>
-          <p:cNvPr id="35" name="Text 33"/>
-          <p:cNvSpPr/>
-          <p:nvPr/>
-        </p:nvSpPr>
-        <p:spPr>
-          <a:xfrm>
-            <a:off x="6428232" y="3364992"/>
-            <a:ext cx="1645920" cy="475488"/>
-          </a:xfrm>
-          <a:prstGeom prst="rect">
-            <a:avLst/>
-          </a:prstGeom>
-          <a:noFill/>
-          <a:ln/>
-        </p:spPr>
-        <p:txBody>
-          <a:bodyPr wrap="square" lIns="0" tIns="0" rIns="0" bIns="0" rtlCol="0" anchor="ctr"/>
-          <a:lstStyle/>
-          <a:p>
-            <a:pPr algn="ctr" indent="0" marL="0">
-              <a:buNone/>
-            </a:pPr>
-            <a:r>
-              <a:rPr lang="en-US" sz="1400" b="1" dirty="0">
-                <a:solidFill>
-                  <a:srgbClr val="0D9488"/>
+              <a:srgbClr val="DB2777"/>
+            </a:solidFill>
+            <a:prstDash val="solid"/>
+          </a:ln>
+        </p:spPr>
+      </p:sp>
+      <p:sp>
+        <p:nvSpPr>
+          <p:cNvPr id="58" name="Text 56"/>
+          <p:cNvSpPr/>
+          <p:nvPr/>
+        </p:nvSpPr>
+        <p:spPr>
+          <a:xfrm>
+            <a:off x="7759598" y="4169664"/>
+            <a:ext cx="676656" cy="384048"/>
+          </a:xfrm>
+          <a:prstGeom prst="rect">
+            <a:avLst/>
+          </a:prstGeom>
+          <a:noFill/>
+          <a:ln/>
+        </p:spPr>
+        <p:txBody>
+          <a:bodyPr wrap="square" lIns="0" tIns="0" rIns="0" bIns="0" rtlCol="0" anchor="ctr"/>
+          <a:lstStyle/>
+          <a:p>
+            <a:pPr algn="ctr" indent="0" marL="0">
+              <a:buNone/>
+            </a:pPr>
+            <a:r>
+              <a:rPr lang="en-US" sz="900" b="1" dirty="0">
+                <a:solidFill>
+                  <a:srgbClr val="9D174D"/>
                 </a:solidFill>
                 <a:latin typeface="Trebuchet MS" pitchFamily="34" charset="0"/>
                 <a:ea typeface="Trebuchet MS" pitchFamily="34" charset="-122"/>
                 <a:cs typeface="Trebuchet MS" pitchFamily="34" charset="-120"/>
               </a:rPr>
-              <a:t>ors</a:t>
-            </a:r>
-            <a:endParaRPr lang="en-US" sz="1400" dirty="0"/>
-          </a:p>
-        </p:txBody>
-      </p:sp>
-      <p:sp>
-        <p:nvSpPr>
-          <p:cNvPr id="36" name="Shape 34"/>
-          <p:cNvSpPr/>
-          <p:nvPr/>
-        </p:nvSpPr>
-        <p:spPr>
-          <a:xfrm>
-            <a:off x="365760" y="4096512"/>
-            <a:ext cx="1371600" cy="804672"/>
-          </a:xfrm>
-          <a:prstGeom prst="rect">
-            <a:avLst>
-              <a:gd name="adj" fmla="val 6818"/>
-            </a:avLst>
-          </a:prstGeom>
-          <a:solidFill>
-            <a:srgbClr val="E2E8F0"/>
-          </a:solidFill>
-          <a:ln w="12700">
-            <a:solidFill>
-              <a:srgbClr val="E2E8F0"/>
-            </a:solidFill>
-            <a:prstDash val="solid"/>
-          </a:ln>
-        </p:spPr>
-      </p:sp>
-      <p:sp>
-        <p:nvSpPr>
-          <p:cNvPr id="37" name="Text 35"/>
-          <p:cNvSpPr/>
-          <p:nvPr/>
-        </p:nvSpPr>
-        <p:spPr>
-          <a:xfrm>
-            <a:off x="365760" y="4096512"/>
-            <a:ext cx="1371600" cy="804672"/>
-          </a:xfrm>
-          <a:prstGeom prst="rect">
-            <a:avLst/>
-          </a:prstGeom>
-          <a:noFill/>
-          <a:ln/>
-        </p:spPr>
-        <p:txBody>
-          <a:bodyPr wrap="square" lIns="0" tIns="0" rIns="0" bIns="0" rtlCol="0" anchor="ctr"/>
-          <a:lstStyle/>
-          <a:p>
-            <a:pPr algn="ctr" indent="0" marL="0">
-              <a:buNone/>
-            </a:pPr>
-            <a:r>
-              <a:rPr lang="en-US" sz="1100" b="1" dirty="0">
-                <a:solidFill>
-                  <a:srgbClr val="475569"/>
-                </a:solidFill>
-                <a:latin typeface="Trebuchet MS" pitchFamily="34" charset="0"/>
-                <a:ea typeface="Trebuchet MS" pitchFamily="34" charset="-122"/>
-                <a:cs typeface="Trebuchet MS" pitchFamily="34" charset="-120"/>
-              </a:rPr>
-              <a:t>Phonemes</a:t>
-            </a:r>
-            <a:endParaRPr lang="en-US" sz="1100" dirty="0"/>
-          </a:p>
-        </p:txBody>
-      </p:sp>
-      <p:sp>
-        <p:nvSpPr>
-          <p:cNvPr id="38" name="Shape 36"/>
-          <p:cNvSpPr/>
-          <p:nvPr/>
-        </p:nvSpPr>
-        <p:spPr>
-          <a:xfrm>
-            <a:off x="1874520" y="4096512"/>
-            <a:ext cx="6903720" cy="804672"/>
-          </a:xfrm>
-          <a:prstGeom prst="rect">
-            <a:avLst>
-              <a:gd name="adj" fmla="val 6818"/>
-            </a:avLst>
-          </a:prstGeom>
-          <a:solidFill>
-            <a:srgbClr val="FCE7F3"/>
-          </a:solidFill>
-          <a:ln w="12700">
-            <a:solidFill>
-              <a:srgbClr val="DB2777"/>
-            </a:solidFill>
-            <a:prstDash val="solid"/>
-          </a:ln>
-        </p:spPr>
-      </p:sp>
-      <p:sp>
-        <p:nvSpPr>
-          <p:cNvPr id="39" name="Shape 37"/>
-          <p:cNvSpPr/>
-          <p:nvPr/>
-        </p:nvSpPr>
-        <p:spPr>
-          <a:xfrm>
-            <a:off x="2124837" y="4169664"/>
-            <a:ext cx="685800" cy="384048"/>
-          </a:xfrm>
-          <a:prstGeom prst="rect">
-            <a:avLst>
-              <a:gd name="adj" fmla="val 9524"/>
-            </a:avLst>
-          </a:prstGeom>
-          <a:solidFill>
-            <a:srgbClr val="FFFFFF"/>
-          </a:solidFill>
-          <a:ln w="12700">
-            <a:solidFill>
-              <a:srgbClr val="DB2777"/>
-            </a:solidFill>
-            <a:prstDash val="solid"/>
-          </a:ln>
-        </p:spPr>
-      </p:sp>
-      <p:sp>
-        <p:nvSpPr>
-          <p:cNvPr id="40" name="Text 38"/>
-          <p:cNvSpPr/>
-          <p:nvPr/>
-        </p:nvSpPr>
-        <p:spPr>
-          <a:xfrm>
-            <a:off x="2124837" y="4169664"/>
-            <a:ext cx="685800" cy="384048"/>
-          </a:xfrm>
-          <a:prstGeom prst="rect">
-            <a:avLst/>
-          </a:prstGeom>
-          <a:noFill/>
-          <a:ln/>
-        </p:spPr>
-        <p:txBody>
-          <a:bodyPr wrap="square" lIns="0" tIns="0" rIns="0" bIns="0" rtlCol="0" anchor="ctr"/>
-          <a:lstStyle/>
-          <a:p>
-            <a:pPr algn="ctr" indent="0" marL="0">
-              <a:buNone/>
-            </a:pPr>
-            <a:r>
-              <a:rPr lang="en-US" sz="900" b="1" dirty="0">
-                <a:solidFill>
-                  <a:srgbClr val="9D174D"/>
-                </a:solidFill>
-                <a:latin typeface="Trebuchet MS" pitchFamily="34" charset="0"/>
-                <a:ea typeface="Trebuchet MS" pitchFamily="34" charset="-122"/>
-                <a:cs typeface="Trebuchet MS" pitchFamily="34" charset="-120"/>
-              </a:rPr>
-              <a:t>v</a:t>
-            </a:r>
-            <a:endParaRPr lang="en-US" sz="900" dirty="0"/>
-          </a:p>
-        </p:txBody>
-      </p:sp>
-      <p:sp>
-        <p:nvSpPr>
-          <p:cNvPr id="41" name="Shape 39"/>
-          <p:cNvSpPr/>
-          <p:nvPr/>
-        </p:nvSpPr>
-        <p:spPr>
-          <a:xfrm>
-            <a:off x="3033522" y="4169664"/>
-            <a:ext cx="685800" cy="384048"/>
-          </a:xfrm>
-          <a:prstGeom prst="rect">
-            <a:avLst>
-              <a:gd name="adj" fmla="val 9524"/>
-            </a:avLst>
-          </a:prstGeom>
-          <a:solidFill>
-            <a:srgbClr val="FFFFFF"/>
-          </a:solidFill>
-          <a:ln w="12700">
-            <a:solidFill>
-              <a:srgbClr val="DB2777"/>
-            </a:solidFill>
-            <a:prstDash val="solid"/>
-          </a:ln>
-        </p:spPr>
-      </p:sp>
-      <p:sp>
-        <p:nvSpPr>
-          <p:cNvPr id="42" name="Text 40"/>
-          <p:cNvSpPr/>
-          <p:nvPr/>
-        </p:nvSpPr>
-        <p:spPr>
-          <a:xfrm>
-            <a:off x="3033522" y="4169664"/>
-            <a:ext cx="685800" cy="384048"/>
-          </a:xfrm>
-          <a:prstGeom prst="rect">
-            <a:avLst/>
-          </a:prstGeom>
-          <a:noFill/>
-          <a:ln/>
-        </p:spPr>
-        <p:txBody>
-          <a:bodyPr wrap="square" lIns="0" tIns="0" rIns="0" bIns="0" rtlCol="0" anchor="ctr"/>
-          <a:lstStyle/>
-          <a:p>
-            <a:pPr algn="ctr" indent="0" marL="0">
-              <a:buNone/>
-            </a:pPr>
-            <a:r>
-              <a:rPr lang="en-US" sz="900" b="1" dirty="0">
-                <a:solidFill>
-                  <a:srgbClr val="9D174D"/>
-                </a:solidFill>
-                <a:latin typeface="Trebuchet MS" pitchFamily="34" charset="0"/>
-                <a:ea typeface="Trebuchet MS" pitchFamily="34" charset="-122"/>
-                <a:cs typeface="Trebuchet MS" pitchFamily="34" charset="-120"/>
-              </a:rPr>
-              <a:t>i</a:t>
-            </a:r>
-            <a:endParaRPr lang="en-US" sz="900" dirty="0"/>
-          </a:p>
-        </p:txBody>
-      </p:sp>
-      <p:sp>
-        <p:nvSpPr>
-          <p:cNvPr id="43" name="Shape 41"/>
-          <p:cNvSpPr/>
-          <p:nvPr/>
-        </p:nvSpPr>
-        <p:spPr>
-          <a:xfrm>
-            <a:off x="3942207" y="4169664"/>
-            <a:ext cx="685800" cy="384048"/>
-          </a:xfrm>
-          <a:prstGeom prst="rect">
-            <a:avLst>
-              <a:gd name="adj" fmla="val 9524"/>
-            </a:avLst>
-          </a:prstGeom>
-          <a:solidFill>
-            <a:srgbClr val="FFFFFF"/>
-          </a:solidFill>
-          <a:ln w="12700">
-            <a:solidFill>
-              <a:srgbClr val="DB2777"/>
-            </a:solidFill>
-            <a:prstDash val="solid"/>
-          </a:ln>
-        </p:spPr>
-      </p:sp>
-      <p:sp>
-        <p:nvSpPr>
-          <p:cNvPr id="44" name="Text 42"/>
-          <p:cNvSpPr/>
-          <p:nvPr/>
-        </p:nvSpPr>
-        <p:spPr>
-          <a:xfrm>
-            <a:off x="3942207" y="4169664"/>
-            <a:ext cx="685800" cy="384048"/>
-          </a:xfrm>
-          <a:prstGeom prst="rect">
-            <a:avLst/>
-          </a:prstGeom>
-          <a:noFill/>
-          <a:ln/>
-        </p:spPr>
-        <p:txBody>
-          <a:bodyPr wrap="square" lIns="0" tIns="0" rIns="0" bIns="0" rtlCol="0" anchor="ctr"/>
-          <a:lstStyle/>
-          <a:p>
-            <a:pPr algn="ctr" indent="0" marL="0">
-              <a:buNone/>
-            </a:pPr>
-            <a:r>
-              <a:rPr lang="en-US" sz="900" b="1" dirty="0">
-                <a:solidFill>
-                  <a:srgbClr val="9D174D"/>
-                </a:solidFill>
-                <a:latin typeface="Trebuchet MS" pitchFamily="34" charset="0"/>
-                <a:ea typeface="Trebuchet MS" pitchFamily="34" charset="-122"/>
-                <a:cs typeface="Trebuchet MS" pitchFamily="34" charset="-120"/>
-              </a:rPr>
-              <a:t>s</a:t>
-            </a:r>
-            <a:endParaRPr lang="en-US" sz="900" dirty="0"/>
-          </a:p>
-        </p:txBody>
-      </p:sp>
-      <p:sp>
-        <p:nvSpPr>
-          <p:cNvPr id="45" name="Text 43"/>
-          <p:cNvSpPr/>
-          <p:nvPr/>
-        </p:nvSpPr>
-        <p:spPr>
-          <a:xfrm>
-            <a:off x="3942207" y="4572000"/>
-            <a:ext cx="685800" cy="219456"/>
-          </a:xfrm>
-          <a:prstGeom prst="rect">
-            <a:avLst/>
-          </a:prstGeom>
-          <a:noFill/>
-          <a:ln/>
-        </p:spPr>
-        <p:txBody>
-          <a:bodyPr wrap="square" lIns="0" tIns="0" rIns="0" bIns="0" rtlCol="0" anchor="t"/>
-          <a:lstStyle/>
-          <a:p>
-            <a:pPr algn="ctr" indent="0" marL="0">
-              <a:buNone/>
-            </a:pPr>
-            <a:r>
-              <a:rPr lang="en-US" sz="750" i="1" dirty="0">
-                <a:solidFill>
-                  <a:srgbClr val="94A3B8"/>
-                </a:solidFill>
-                <a:latin typeface="Calibri" pitchFamily="34" charset="0"/>
-                <a:ea typeface="Calibri" pitchFamily="34" charset="-122"/>
-                <a:cs typeface="Calibri" pitchFamily="34" charset="-120"/>
-              </a:rPr>
-              <a:t>/z/</a:t>
-            </a:r>
-            <a:endParaRPr lang="en-US" sz="750" dirty="0"/>
-          </a:p>
-        </p:txBody>
-      </p:sp>
-      <p:sp>
-        <p:nvSpPr>
-          <p:cNvPr id="46" name="Shape 44"/>
-          <p:cNvSpPr/>
-          <p:nvPr/>
-        </p:nvSpPr>
-        <p:spPr>
-          <a:xfrm>
-            <a:off x="4850892" y="4169664"/>
-            <a:ext cx="685800" cy="384048"/>
-          </a:xfrm>
-          <a:prstGeom prst="rect">
-            <a:avLst>
-              <a:gd name="adj" fmla="val 9524"/>
-            </a:avLst>
-          </a:prstGeom>
-          <a:solidFill>
-            <a:srgbClr val="FFFFFF"/>
-          </a:solidFill>
-          <a:ln w="12700">
-            <a:solidFill>
-              <a:srgbClr val="DB2777"/>
-            </a:solidFill>
-            <a:prstDash val="solid"/>
-          </a:ln>
-        </p:spPr>
-      </p:sp>
-      <p:sp>
-        <p:nvSpPr>
-          <p:cNvPr id="47" name="Text 45"/>
-          <p:cNvSpPr/>
-          <p:nvPr/>
-        </p:nvSpPr>
-        <p:spPr>
-          <a:xfrm>
-            <a:off x="4850892" y="4169664"/>
-            <a:ext cx="685800" cy="384048"/>
-          </a:xfrm>
-          <a:prstGeom prst="rect">
-            <a:avLst/>
-          </a:prstGeom>
-          <a:noFill/>
-          <a:ln/>
-        </p:spPr>
-        <p:txBody>
-          <a:bodyPr wrap="square" lIns="0" tIns="0" rIns="0" bIns="0" rtlCol="0" anchor="ctr"/>
-          <a:lstStyle/>
-          <a:p>
-            <a:pPr algn="ctr" indent="0" marL="0">
-              <a:buNone/>
-            </a:pPr>
-            <a:r>
-              <a:rPr lang="en-US" sz="900" b="1" dirty="0">
-                <a:solidFill>
-                  <a:srgbClr val="9D174D"/>
-                </a:solidFill>
-                <a:latin typeface="Trebuchet MS" pitchFamily="34" charset="0"/>
-                <a:ea typeface="Trebuchet MS" pitchFamily="34" charset="-122"/>
-                <a:cs typeface="Trebuchet MS" pitchFamily="34" charset="-120"/>
-              </a:rPr>
-              <a:t>i</a:t>
-            </a:r>
-            <a:endParaRPr lang="en-US" sz="900" dirty="0"/>
-          </a:p>
-        </p:txBody>
-      </p:sp>
-      <p:sp>
-        <p:nvSpPr>
-          <p:cNvPr id="48" name="Shape 46"/>
-          <p:cNvSpPr/>
-          <p:nvPr/>
-        </p:nvSpPr>
-        <p:spPr>
-          <a:xfrm>
-            <a:off x="5759577" y="4169664"/>
-            <a:ext cx="685800" cy="384048"/>
-          </a:xfrm>
-          <a:prstGeom prst="rect">
-            <a:avLst>
-              <a:gd name="adj" fmla="val 9524"/>
-            </a:avLst>
-          </a:prstGeom>
-          <a:solidFill>
-            <a:srgbClr val="FFFFFF"/>
-          </a:solidFill>
-          <a:ln w="12700">
-            <a:solidFill>
-              <a:srgbClr val="DB2777"/>
-            </a:solidFill>
-            <a:prstDash val="solid"/>
-          </a:ln>
-        </p:spPr>
-      </p:sp>
-      <p:sp>
-        <p:nvSpPr>
-          <p:cNvPr id="49" name="Text 47"/>
-          <p:cNvSpPr/>
-          <p:nvPr/>
-        </p:nvSpPr>
-        <p:spPr>
-          <a:xfrm>
-            <a:off x="5759577" y="4169664"/>
-            <a:ext cx="685800" cy="384048"/>
-          </a:xfrm>
-          <a:prstGeom prst="rect">
-            <a:avLst/>
-          </a:prstGeom>
-          <a:noFill/>
-          <a:ln/>
-        </p:spPr>
-        <p:txBody>
-          <a:bodyPr wrap="square" lIns="0" tIns="0" rIns="0" bIns="0" rtlCol="0" anchor="ctr"/>
-          <a:lstStyle/>
-          <a:p>
-            <a:pPr algn="ctr" indent="0" marL="0">
-              <a:buNone/>
-            </a:pPr>
-            <a:r>
-              <a:rPr lang="en-US" sz="900" b="1" dirty="0">
-                <a:solidFill>
-                  <a:srgbClr val="9D174D"/>
-                </a:solidFill>
-                <a:latin typeface="Trebuchet MS" pitchFamily="34" charset="0"/>
-                <a:ea typeface="Trebuchet MS" pitchFamily="34" charset="-122"/>
-                <a:cs typeface="Trebuchet MS" pitchFamily="34" charset="-120"/>
-              </a:rPr>
-              <a:t>t</a:t>
-            </a:r>
-            <a:endParaRPr lang="en-US" sz="900" dirty="0"/>
-          </a:p>
-        </p:txBody>
-      </p:sp>
-      <p:sp>
-        <p:nvSpPr>
-          <p:cNvPr id="50" name="Shape 48"/>
-          <p:cNvSpPr/>
-          <p:nvPr/>
-        </p:nvSpPr>
-        <p:spPr>
-          <a:xfrm>
-            <a:off x="6668262" y="4169664"/>
-            <a:ext cx="685800" cy="384048"/>
-          </a:xfrm>
-          <a:prstGeom prst="rect">
-            <a:avLst>
-              <a:gd name="adj" fmla="val 9524"/>
-            </a:avLst>
-          </a:prstGeom>
-          <a:solidFill>
-            <a:srgbClr val="FFFFFF"/>
-          </a:solidFill>
-          <a:ln w="12700">
-            <a:solidFill>
-              <a:srgbClr val="DB2777"/>
-            </a:solidFill>
-            <a:prstDash val="solid"/>
-          </a:ln>
-        </p:spPr>
-      </p:sp>
-      <p:sp>
-        <p:nvSpPr>
-          <p:cNvPr id="51" name="Text 49"/>
-          <p:cNvSpPr/>
-          <p:nvPr/>
-        </p:nvSpPr>
-        <p:spPr>
-          <a:xfrm>
-            <a:off x="6668262" y="4169664"/>
-            <a:ext cx="685800" cy="384048"/>
-          </a:xfrm>
-          <a:prstGeom prst="rect">
-            <a:avLst/>
-          </a:prstGeom>
-          <a:noFill/>
-          <a:ln/>
-        </p:spPr>
-        <p:txBody>
-          <a:bodyPr wrap="square" lIns="0" tIns="0" rIns="0" bIns="0" rtlCol="0" anchor="ctr"/>
-          <a:lstStyle/>
-          <a:p>
-            <a:pPr algn="ctr" indent="0" marL="0">
-              <a:buNone/>
-            </a:pPr>
-            <a:r>
-              <a:rPr lang="en-US" sz="900" b="1" dirty="0">
-                <a:solidFill>
-                  <a:srgbClr val="9D174D"/>
-                </a:solidFill>
-                <a:latin typeface="Trebuchet MS" pitchFamily="34" charset="0"/>
-                <a:ea typeface="Trebuchet MS" pitchFamily="34" charset="-122"/>
-                <a:cs typeface="Trebuchet MS" pitchFamily="34" charset="-120"/>
-              </a:rPr>
-              <a:t>or</a:t>
-            </a:r>
-            <a:endParaRPr lang="en-US" sz="900" dirty="0"/>
-          </a:p>
-        </p:txBody>
-      </p:sp>
-      <p:sp>
-        <p:nvSpPr>
-          <p:cNvPr id="52" name="Shape 50"/>
-          <p:cNvSpPr/>
-          <p:nvPr/>
-        </p:nvSpPr>
-        <p:spPr>
-          <a:xfrm>
-            <a:off x="7576947" y="4169664"/>
-            <a:ext cx="685800" cy="384048"/>
-          </a:xfrm>
-          <a:prstGeom prst="rect">
-            <a:avLst>
-              <a:gd name="adj" fmla="val 9524"/>
-            </a:avLst>
-          </a:prstGeom>
-          <a:solidFill>
-            <a:srgbClr val="FFFFFF"/>
-          </a:solidFill>
-          <a:ln w="12700">
-            <a:solidFill>
-              <a:srgbClr val="DB2777"/>
-            </a:solidFill>
-            <a:prstDash val="solid"/>
-          </a:ln>
-        </p:spPr>
-      </p:sp>
-      <p:sp>
-        <p:nvSpPr>
-          <p:cNvPr id="53" name="Text 51"/>
-          <p:cNvSpPr/>
-          <p:nvPr/>
-        </p:nvSpPr>
-        <p:spPr>
-          <a:xfrm>
-            <a:off x="7576947" y="4169664"/>
-            <a:ext cx="685800" cy="384048"/>
-          </a:xfrm>
-          <a:prstGeom prst="rect">
-            <a:avLst/>
-          </a:prstGeom>
-          <a:noFill/>
-          <a:ln/>
-        </p:spPr>
-        <p:txBody>
-          <a:bodyPr wrap="square" lIns="0" tIns="0" rIns="0" bIns="0" rtlCol="0" anchor="ctr"/>
-          <a:lstStyle/>
-          <a:p>
-            <a:pPr algn="ctr" indent="0" marL="0">
-              <a:buNone/>
-            </a:pPr>
-            <a:r>
-              <a:rPr lang="en-US" sz="900" b="1" dirty="0">
-                <a:solidFill>
-                  <a:srgbClr val="9D174D"/>
-                </a:solidFill>
-                <a:latin typeface="Trebuchet MS" pitchFamily="34" charset="0"/>
-                <a:ea typeface="Trebuchet MS" pitchFamily="34" charset="-122"/>
-                <a:cs typeface="Trebuchet MS" pitchFamily="34" charset="-120"/>
-              </a:rPr>
-              <a:t>s</a:t>
+              <a:t>n</a:t>
             </a:r>
             <a:endParaRPr lang="en-US" sz="900" dirty="0"/>
           </a:p>
@@ -23347,7 +23392,7 @@
                 <a:ea typeface="Trebuchet MS" pitchFamily="34" charset="-122"/>
                 <a:cs typeface="Trebuchet MS" pitchFamily="34" charset="-120"/>
               </a:rPr>
-              <a:t>revisiting</a:t>
+              <a:t>revisit</a:t>
             </a:r>
             <a:endParaRPr lang="en-US" sz="2800" dirty="0"/>
           </a:p>
@@ -24174,7 +24219,7 @@
                 <a:ea typeface="Trebuchet MS" pitchFamily="34" charset="-122"/>
                 <a:cs typeface="Trebuchet MS" pitchFamily="34" charset="-120"/>
               </a:rPr>
-              <a:t>revisiting</a:t>
+              <a:t>revisit</a:t>
             </a:r>
             <a:endParaRPr lang="en-US" sz="2800" dirty="0"/>
           </a:p>
@@ -24254,7 +24299,7 @@
         </p:nvSpPr>
         <p:spPr>
           <a:xfrm>
-            <a:off x="2221992" y="2258568"/>
+            <a:off x="2938272" y="2258568"/>
             <a:ext cx="1828800" cy="292608"/>
           </a:xfrm>
           <a:prstGeom prst="rect">
@@ -24288,7 +24333,7 @@
         </p:nvSpPr>
         <p:spPr>
           <a:xfrm>
-            <a:off x="2221992" y="2258568"/>
+            <a:off x="2938272" y="2258568"/>
             <a:ext cx="1828800" cy="292608"/>
           </a:xfrm>
           <a:prstGeom prst="rect">
@@ -24327,7 +24372,7 @@
         </p:nvSpPr>
         <p:spPr>
           <a:xfrm>
-            <a:off x="2221992" y="2569464"/>
+            <a:off x="2938272" y="2569464"/>
             <a:ext cx="1828800" cy="201168"/>
           </a:xfrm>
           <a:prstGeom prst="rect">
@@ -24366,7 +24411,7 @@
         </p:nvSpPr>
         <p:spPr>
           <a:xfrm>
-            <a:off x="4370832" y="2258568"/>
+            <a:off x="5803392" y="2258568"/>
             <a:ext cx="1828800" cy="292608"/>
           </a:xfrm>
           <a:prstGeom prst="rect">
@@ -24400,7 +24445,7 @@
         </p:nvSpPr>
         <p:spPr>
           <a:xfrm>
-            <a:off x="4370832" y="2258568"/>
+            <a:off x="5803392" y="2258568"/>
             <a:ext cx="1828800" cy="292608"/>
           </a:xfrm>
           <a:prstGeom prst="rect">
@@ -24439,7 +24484,7 @@
         </p:nvSpPr>
         <p:spPr>
           <a:xfrm>
-            <a:off x="4370832" y="2569464"/>
+            <a:off x="5803392" y="2569464"/>
             <a:ext cx="1828800" cy="201168"/>
           </a:xfrm>
           <a:prstGeom prst="rect">
@@ -24478,30 +24523,23 @@
         </p:nvSpPr>
         <p:spPr>
           <a:xfrm>
-            <a:off x="6519672" y="2258568"/>
-            <a:ext cx="1828800" cy="292608"/>
+            <a:off x="365760" y="3273552"/>
+            <a:ext cx="1371600" cy="658368"/>
           </a:xfrm>
           <a:prstGeom prst="rect">
             <a:avLst>
-              <a:gd name="adj" fmla="val 25000"/>
+              <a:gd name="adj" fmla="val 8333"/>
             </a:avLst>
           </a:prstGeom>
           <a:solidFill>
-            <a:srgbClr val="FCE7F3"/>
-          </a:solidFill>
-          <a:ln w="19050">
-            <a:solidFill>
-              <a:srgbClr val="DB2777"/>
-            </a:solidFill>
-            <a:prstDash val="solid"/>
-          </a:ln>
-          <a:effectLst>
-            <a:outerShdw sx="100000" sy="100000" kx="0" ky="0" algn="bl" rotWithShape="0" blurRad="101600" dist="38100" dir="8100000">
-              <a:srgbClr val="000000">
-                <a:alpha val="12000"/>
-              </a:srgbClr>
-            </a:outerShdw>
-          </a:effectLst>
+            <a:srgbClr val="E2E8F0"/>
+          </a:solidFill>
+          <a:ln w="12700">
+            <a:solidFill>
+              <a:srgbClr val="E2E8F0"/>
+            </a:solidFill>
+            <a:prstDash val="solid"/>
+          </a:ln>
         </p:spPr>
       </p:sp>
       <p:sp>
@@ -24512,90 +24550,117 @@
         </p:nvSpPr>
         <p:spPr>
           <a:xfrm>
-            <a:off x="6519672" y="2258568"/>
-            <a:ext cx="1828800" cy="292608"/>
-          </a:xfrm>
-          <a:prstGeom prst="rect">
-            <a:avLst/>
-          </a:prstGeom>
-          <a:noFill/>
-          <a:ln/>
-        </p:spPr>
-        <p:txBody>
-          <a:bodyPr wrap="square" lIns="0" tIns="0" rIns="0" bIns="0" rtlCol="0" anchor="ctr"/>
-          <a:lstStyle/>
-          <a:p>
-            <a:pPr algn="ctr" indent="0" marL="0">
-              <a:buNone/>
-            </a:pPr>
-            <a:r>
-              <a:rPr lang="en-US" sz="1300" b="1" dirty="0">
-                <a:solidFill>
-                  <a:srgbClr val="9D174D"/>
+            <a:off x="365760" y="3273552"/>
+            <a:ext cx="1371600" cy="658368"/>
+          </a:xfrm>
+          <a:prstGeom prst="rect">
+            <a:avLst/>
+          </a:prstGeom>
+          <a:noFill/>
+          <a:ln/>
+        </p:spPr>
+        <p:txBody>
+          <a:bodyPr wrap="square" lIns="0" tIns="0" rIns="0" bIns="0" rtlCol="0" anchor="ctr"/>
+          <a:lstStyle/>
+          <a:p>
+            <a:pPr algn="ctr" indent="0" marL="0">
+              <a:buNone/>
+            </a:pPr>
+            <a:r>
+              <a:rPr lang="en-US" sz="1100" b="1" dirty="0">
+                <a:solidFill>
+                  <a:srgbClr val="475569"/>
                 </a:solidFill>
                 <a:latin typeface="Trebuchet MS" pitchFamily="34" charset="0"/>
                 <a:ea typeface="Trebuchet MS" pitchFamily="34" charset="-122"/>
                 <a:cs typeface="Trebuchet MS" pitchFamily="34" charset="-120"/>
               </a:rPr>
-              <a:t>ing</a:t>
-            </a:r>
-            <a:endParaRPr lang="en-US" sz="1300" dirty="0"/>
-          </a:p>
-        </p:txBody>
-      </p:sp>
-      <p:sp>
-        <p:nvSpPr>
-          <p:cNvPr id="24" name="Text 22"/>
-          <p:cNvSpPr/>
-          <p:nvPr/>
-        </p:nvSpPr>
-        <p:spPr>
-          <a:xfrm>
-            <a:off x="6519672" y="2569464"/>
-            <a:ext cx="1828800" cy="201168"/>
-          </a:xfrm>
-          <a:prstGeom prst="rect">
-            <a:avLst/>
-          </a:prstGeom>
-          <a:noFill/>
-          <a:ln/>
-        </p:spPr>
-        <p:txBody>
-          <a:bodyPr wrap="square" lIns="0" tIns="0" rIns="0" bIns="0" rtlCol="0" anchor="t"/>
-          <a:lstStyle/>
-          <a:p>
-            <a:pPr algn="ctr" indent="0" marL="0">
-              <a:buNone/>
-            </a:pPr>
-            <a:r>
-              <a:rPr lang="en-US" sz="850" dirty="0">
-                <a:solidFill>
-                  <a:srgbClr val="475569"/>
+              <a:t>Syllables</a:t>
+            </a:r>
+            <a:endParaRPr lang="en-US" sz="1100" dirty="0"/>
+          </a:p>
+        </p:txBody>
+      </p:sp>
+      <p:sp>
+        <p:nvSpPr>
+          <p:cNvPr id="24" name="Shape 22"/>
+          <p:cNvSpPr/>
+          <p:nvPr/>
+        </p:nvSpPr>
+        <p:spPr>
+          <a:xfrm>
+            <a:off x="1874520" y="3273552"/>
+            <a:ext cx="6903720" cy="658368"/>
+          </a:xfrm>
+          <a:prstGeom prst="rect">
+            <a:avLst>
+              <a:gd name="adj" fmla="val 8333"/>
+            </a:avLst>
+          </a:prstGeom>
+          <a:solidFill>
+            <a:srgbClr val="F8FAFC"/>
+          </a:solidFill>
+          <a:ln w="12700">
+            <a:solidFill>
+              <a:srgbClr val="E2E8F0"/>
+            </a:solidFill>
+            <a:prstDash val="dash"/>
+          </a:ln>
+        </p:spPr>
+      </p:sp>
+      <p:sp>
+        <p:nvSpPr>
+          <p:cNvPr id="25" name="Text 23"/>
+          <p:cNvSpPr/>
+          <p:nvPr/>
+        </p:nvSpPr>
+        <p:spPr>
+          <a:xfrm>
+            <a:off x="1874520" y="3273552"/>
+            <a:ext cx="6903720" cy="658368"/>
+          </a:xfrm>
+          <a:prstGeom prst="rect">
+            <a:avLst/>
+          </a:prstGeom>
+          <a:noFill/>
+          <a:ln/>
+        </p:spPr>
+        <p:txBody>
+          <a:bodyPr wrap="square" rtlCol="0" anchor="ctr"/>
+          <a:lstStyle/>
+          <a:p>
+            <a:pPr algn="ctr" indent="0" marL="0">
+              <a:buNone/>
+            </a:pPr>
+            <a:r>
+              <a:rPr lang="en-US" sz="1100" i="1" dirty="0">
+                <a:solidFill>
+                  <a:srgbClr val="CBD5E1"/>
                 </a:solidFill>
                 <a:latin typeface="Calibri" pitchFamily="34" charset="0"/>
                 <a:ea typeface="Calibri" pitchFamily="34" charset="-122"/>
                 <a:cs typeface="Calibri" pitchFamily="34" charset="-120"/>
               </a:rPr>
-              <a:t>ongoing action</a:t>
-            </a:r>
-            <a:endParaRPr lang="en-US" sz="850" dirty="0"/>
-          </a:p>
-        </p:txBody>
-      </p:sp>
-      <p:sp>
-        <p:nvSpPr>
-          <p:cNvPr id="25" name="Shape 23"/>
-          <p:cNvSpPr/>
-          <p:nvPr/>
-        </p:nvSpPr>
-        <p:spPr>
-          <a:xfrm>
-            <a:off x="365760" y="3273552"/>
-            <a:ext cx="1371600" cy="658368"/>
+              <a:t>Write here...</a:t>
+            </a:r>
+            <a:endParaRPr lang="en-US" sz="1100" dirty="0"/>
+          </a:p>
+        </p:txBody>
+      </p:sp>
+      <p:sp>
+        <p:nvSpPr>
+          <p:cNvPr id="26" name="Shape 24"/>
+          <p:cNvSpPr/>
+          <p:nvPr/>
+        </p:nvSpPr>
+        <p:spPr>
+          <a:xfrm>
+            <a:off x="365760" y="4096512"/>
+            <a:ext cx="1371600" cy="804672"/>
           </a:xfrm>
           <a:prstGeom prst="rect">
             <a:avLst>
-              <a:gd name="adj" fmla="val 8333"/>
+              <a:gd name="adj" fmla="val 6818"/>
             </a:avLst>
           </a:prstGeom>
           <a:solidFill>
@@ -24611,14 +24676,14 @@
       </p:sp>
       <p:sp>
         <p:nvSpPr>
-          <p:cNvPr id="26" name="Text 24"/>
-          <p:cNvSpPr/>
-          <p:nvPr/>
-        </p:nvSpPr>
-        <p:spPr>
-          <a:xfrm>
-            <a:off x="365760" y="3273552"/>
-            <a:ext cx="1371600" cy="658368"/>
+          <p:cNvPr id="27" name="Text 25"/>
+          <p:cNvSpPr/>
+          <p:nvPr/>
+        </p:nvSpPr>
+        <p:spPr>
+          <a:xfrm>
+            <a:off x="365760" y="4096512"/>
+            <a:ext cx="1371600" cy="804672"/>
           </a:xfrm>
           <a:prstGeom prst="rect">
             <a:avLst/>
@@ -24642,7 +24707,7 @@
                 <a:ea typeface="Trebuchet MS" pitchFamily="34" charset="-122"/>
                 <a:cs typeface="Trebuchet MS" pitchFamily="34" charset="-120"/>
               </a:rPr>
-              <a:t>Syllables</a:t>
+              <a:t>Phonemes</a:t>
             </a:r>
             <a:endParaRPr lang="en-US" sz="1100" dirty="0"/>
           </a:p>
@@ -24650,80 +24715,14 @@
       </p:sp>
       <p:sp>
         <p:nvSpPr>
-          <p:cNvPr id="27" name="Shape 25"/>
-          <p:cNvSpPr/>
-          <p:nvPr/>
-        </p:nvSpPr>
-        <p:spPr>
-          <a:xfrm>
-            <a:off x="1874520" y="3273552"/>
-            <a:ext cx="6903720" cy="658368"/>
-          </a:xfrm>
-          <a:prstGeom prst="rect">
-            <a:avLst>
-              <a:gd name="adj" fmla="val 8333"/>
-            </a:avLst>
-          </a:prstGeom>
-          <a:solidFill>
-            <a:srgbClr val="F8FAFC"/>
-          </a:solidFill>
-          <a:ln w="12700">
-            <a:solidFill>
-              <a:srgbClr val="E2E8F0"/>
-            </a:solidFill>
-            <a:prstDash val="dash"/>
-          </a:ln>
-        </p:spPr>
-      </p:sp>
-      <p:sp>
-        <p:nvSpPr>
-          <p:cNvPr id="28" name="Text 26"/>
-          <p:cNvSpPr/>
-          <p:nvPr/>
-        </p:nvSpPr>
-        <p:spPr>
-          <a:xfrm>
-            <a:off x="1874520" y="3273552"/>
-            <a:ext cx="6903720" cy="658368"/>
-          </a:xfrm>
-          <a:prstGeom prst="rect">
-            <a:avLst/>
-          </a:prstGeom>
-          <a:noFill/>
-          <a:ln/>
-        </p:spPr>
-        <p:txBody>
-          <a:bodyPr wrap="square" rtlCol="0" anchor="ctr"/>
-          <a:lstStyle/>
-          <a:p>
-            <a:pPr algn="ctr" indent="0" marL="0">
-              <a:buNone/>
-            </a:pPr>
-            <a:r>
-              <a:rPr lang="en-US" sz="1100" i="1" dirty="0">
-                <a:solidFill>
-                  <a:srgbClr val="CBD5E1"/>
-                </a:solidFill>
-                <a:latin typeface="Calibri" pitchFamily="34" charset="0"/>
-                <a:ea typeface="Calibri" pitchFamily="34" charset="-122"/>
-                <a:cs typeface="Calibri" pitchFamily="34" charset="-120"/>
-              </a:rPr>
-              <a:t>Write here...</a:t>
-            </a:r>
-            <a:endParaRPr lang="en-US" sz="1100" dirty="0"/>
-          </a:p>
-        </p:txBody>
-      </p:sp>
-      <p:sp>
-        <p:nvSpPr>
-          <p:cNvPr id="29" name="Shape 27"/>
-          <p:cNvSpPr/>
-          <p:nvPr/>
-        </p:nvSpPr>
-        <p:spPr>
-          <a:xfrm>
-            <a:off x="365760" y="4096512"/>
-            <a:ext cx="1371600" cy="804672"/>
+          <p:cNvPr id="28" name="Shape 26"/>
+          <p:cNvSpPr/>
+          <p:nvPr/>
+        </p:nvSpPr>
+        <p:spPr>
+          <a:xfrm>
+            <a:off x="1874520" y="4096512"/>
+            <a:ext cx="6903720" cy="804672"/>
           </a:xfrm>
           <a:prstGeom prst="rect">
             <a:avLst>
@@ -24731,85 +24730,19 @@
             </a:avLst>
           </a:prstGeom>
           <a:solidFill>
-            <a:srgbClr val="E2E8F0"/>
+            <a:srgbClr val="F8FAFC"/>
           </a:solidFill>
           <a:ln w="12700">
             <a:solidFill>
               <a:srgbClr val="E2E8F0"/>
             </a:solidFill>
-            <a:prstDash val="solid"/>
-          </a:ln>
-        </p:spPr>
-      </p:sp>
-      <p:sp>
-        <p:nvSpPr>
-          <p:cNvPr id="30" name="Text 28"/>
-          <p:cNvSpPr/>
-          <p:nvPr/>
-        </p:nvSpPr>
-        <p:spPr>
-          <a:xfrm>
-            <a:off x="365760" y="4096512"/>
-            <a:ext cx="1371600" cy="804672"/>
-          </a:xfrm>
-          <a:prstGeom prst="rect">
-            <a:avLst/>
-          </a:prstGeom>
-          <a:noFill/>
-          <a:ln/>
-        </p:spPr>
-        <p:txBody>
-          <a:bodyPr wrap="square" lIns="0" tIns="0" rIns="0" bIns="0" rtlCol="0" anchor="ctr"/>
-          <a:lstStyle/>
-          <a:p>
-            <a:pPr algn="ctr" indent="0" marL="0">
-              <a:buNone/>
-            </a:pPr>
-            <a:r>
-              <a:rPr lang="en-US" sz="1100" b="1" dirty="0">
-                <a:solidFill>
-                  <a:srgbClr val="475569"/>
-                </a:solidFill>
-                <a:latin typeface="Trebuchet MS" pitchFamily="34" charset="0"/>
-                <a:ea typeface="Trebuchet MS" pitchFamily="34" charset="-122"/>
-                <a:cs typeface="Trebuchet MS" pitchFamily="34" charset="-120"/>
-              </a:rPr>
-              <a:t>Phonemes</a:t>
-            </a:r>
-            <a:endParaRPr lang="en-US" sz="1100" dirty="0"/>
-          </a:p>
-        </p:txBody>
-      </p:sp>
-      <p:sp>
-        <p:nvSpPr>
-          <p:cNvPr id="31" name="Shape 29"/>
-          <p:cNvSpPr/>
-          <p:nvPr/>
-        </p:nvSpPr>
-        <p:spPr>
-          <a:xfrm>
-            <a:off x="1874520" y="4096512"/>
-            <a:ext cx="6903720" cy="804672"/>
-          </a:xfrm>
-          <a:prstGeom prst="rect">
-            <a:avLst>
-              <a:gd name="adj" fmla="val 6818"/>
-            </a:avLst>
-          </a:prstGeom>
-          <a:solidFill>
-            <a:srgbClr val="F8FAFC"/>
-          </a:solidFill>
-          <a:ln w="12700">
-            <a:solidFill>
-              <a:srgbClr val="E2E8F0"/>
-            </a:solidFill>
             <a:prstDash val="dash"/>
           </a:ln>
         </p:spPr>
       </p:sp>
       <p:sp>
         <p:nvSpPr>
-          <p:cNvPr id="32" name="Text 30"/>
+          <p:cNvPr id="29" name="Text 27"/>
           <p:cNvSpPr/>
           <p:nvPr/>
         </p:nvSpPr>
@@ -25990,7 +25923,7 @@
                 <a:ea typeface="Trebuchet MS" pitchFamily="34" charset="-122"/>
                 <a:cs typeface="Trebuchet MS" pitchFamily="34" charset="-120"/>
               </a:rPr>
-              <a:t>revisiting</a:t>
+              <a:t>revisit</a:t>
             </a:r>
             <a:endParaRPr lang="en-US" sz="2800" dirty="0"/>
           </a:p>
@@ -26070,7 +26003,7 @@
         </p:nvSpPr>
         <p:spPr>
           <a:xfrm>
-            <a:off x="2221992" y="2258568"/>
+            <a:off x="2938272" y="2258568"/>
             <a:ext cx="1828800" cy="292608"/>
           </a:xfrm>
           <a:prstGeom prst="rect">
@@ -26104,7 +26037,7 @@
         </p:nvSpPr>
         <p:spPr>
           <a:xfrm>
-            <a:off x="2221992" y="2258568"/>
+            <a:off x="2938272" y="2258568"/>
             <a:ext cx="1828800" cy="292608"/>
           </a:xfrm>
           <a:prstGeom prst="rect">
@@ -26143,7 +26076,7 @@
         </p:nvSpPr>
         <p:spPr>
           <a:xfrm>
-            <a:off x="2221992" y="2569464"/>
+            <a:off x="2938272" y="2569464"/>
             <a:ext cx="1828800" cy="201168"/>
           </a:xfrm>
           <a:prstGeom prst="rect">
@@ -26182,7 +26115,7 @@
         </p:nvSpPr>
         <p:spPr>
           <a:xfrm>
-            <a:off x="4370832" y="2258568"/>
+            <a:off x="5803392" y="2258568"/>
             <a:ext cx="1828800" cy="292608"/>
           </a:xfrm>
           <a:prstGeom prst="rect">
@@ -26216,7 +26149,7 @@
         </p:nvSpPr>
         <p:spPr>
           <a:xfrm>
-            <a:off x="4370832" y="2258568"/>
+            <a:off x="5803392" y="2258568"/>
             <a:ext cx="1828800" cy="292608"/>
           </a:xfrm>
           <a:prstGeom prst="rect">
@@ -26255,7 +26188,7 @@
         </p:nvSpPr>
         <p:spPr>
           <a:xfrm>
-            <a:off x="4370832" y="2569464"/>
+            <a:off x="5803392" y="2569464"/>
             <a:ext cx="1828800" cy="201168"/>
           </a:xfrm>
           <a:prstGeom prst="rect">
@@ -26294,30 +26227,23 @@
         </p:nvSpPr>
         <p:spPr>
           <a:xfrm>
-            <a:off x="6519672" y="2258568"/>
-            <a:ext cx="1828800" cy="292608"/>
+            <a:off x="365760" y="3273552"/>
+            <a:ext cx="1371600" cy="658368"/>
           </a:xfrm>
           <a:prstGeom prst="rect">
             <a:avLst>
-              <a:gd name="adj" fmla="val 25000"/>
+              <a:gd name="adj" fmla="val 8333"/>
             </a:avLst>
           </a:prstGeom>
           <a:solidFill>
-            <a:srgbClr val="FCE7F3"/>
-          </a:solidFill>
-          <a:ln w="19050">
-            <a:solidFill>
-              <a:srgbClr val="DB2777"/>
-            </a:solidFill>
-            <a:prstDash val="solid"/>
-          </a:ln>
-          <a:effectLst>
-            <a:outerShdw sx="100000" sy="100000" kx="0" ky="0" algn="bl" rotWithShape="0" blurRad="101600" dist="38100" dir="8100000">
-              <a:srgbClr val="000000">
-                <a:alpha val="12000"/>
-              </a:srgbClr>
-            </a:outerShdw>
-          </a:effectLst>
+            <a:srgbClr val="E2E8F0"/>
+          </a:solidFill>
+          <a:ln w="12700">
+            <a:solidFill>
+              <a:srgbClr val="E2E8F0"/>
+            </a:solidFill>
+            <a:prstDash val="solid"/>
+          </a:ln>
         </p:spPr>
       </p:sp>
       <p:sp>
@@ -26328,86 +26254,47 @@
         </p:nvSpPr>
         <p:spPr>
           <a:xfrm>
-            <a:off x="6519672" y="2258568"/>
-            <a:ext cx="1828800" cy="292608"/>
-          </a:xfrm>
-          <a:prstGeom prst="rect">
-            <a:avLst/>
-          </a:prstGeom>
-          <a:noFill/>
-          <a:ln/>
-        </p:spPr>
-        <p:txBody>
-          <a:bodyPr wrap="square" lIns="0" tIns="0" rIns="0" bIns="0" rtlCol="0" anchor="ctr"/>
-          <a:lstStyle/>
-          <a:p>
-            <a:pPr algn="ctr" indent="0" marL="0">
-              <a:buNone/>
-            </a:pPr>
-            <a:r>
-              <a:rPr lang="en-US" sz="1300" b="1" dirty="0">
-                <a:solidFill>
-                  <a:srgbClr val="9D174D"/>
+            <a:off x="365760" y="3273552"/>
+            <a:ext cx="1371600" cy="658368"/>
+          </a:xfrm>
+          <a:prstGeom prst="rect">
+            <a:avLst/>
+          </a:prstGeom>
+          <a:noFill/>
+          <a:ln/>
+        </p:spPr>
+        <p:txBody>
+          <a:bodyPr wrap="square" lIns="0" tIns="0" rIns="0" bIns="0" rtlCol="0" anchor="ctr"/>
+          <a:lstStyle/>
+          <a:p>
+            <a:pPr algn="ctr" indent="0" marL="0">
+              <a:buNone/>
+            </a:pPr>
+            <a:r>
+              <a:rPr lang="en-US" sz="1100" b="1" dirty="0">
+                <a:solidFill>
+                  <a:srgbClr val="475569"/>
                 </a:solidFill>
                 <a:latin typeface="Trebuchet MS" pitchFamily="34" charset="0"/>
                 <a:ea typeface="Trebuchet MS" pitchFamily="34" charset="-122"/>
                 <a:cs typeface="Trebuchet MS" pitchFamily="34" charset="-120"/>
               </a:rPr>
-              <a:t>ing</a:t>
-            </a:r>
-            <a:endParaRPr lang="en-US" sz="1300" dirty="0"/>
-          </a:p>
-        </p:txBody>
-      </p:sp>
-      <p:sp>
-        <p:nvSpPr>
-          <p:cNvPr id="24" name="Text 22"/>
-          <p:cNvSpPr/>
-          <p:nvPr/>
-        </p:nvSpPr>
-        <p:spPr>
-          <a:xfrm>
-            <a:off x="6519672" y="2569464"/>
-            <a:ext cx="1828800" cy="201168"/>
-          </a:xfrm>
-          <a:prstGeom prst="rect">
-            <a:avLst/>
-          </a:prstGeom>
-          <a:noFill/>
-          <a:ln/>
-        </p:spPr>
-        <p:txBody>
-          <a:bodyPr wrap="square" lIns="0" tIns="0" rIns="0" bIns="0" rtlCol="0" anchor="t"/>
-          <a:lstStyle/>
-          <a:p>
-            <a:pPr algn="ctr" indent="0" marL="0">
-              <a:buNone/>
-            </a:pPr>
-            <a:r>
-              <a:rPr lang="en-US" sz="850" dirty="0">
-                <a:solidFill>
-                  <a:srgbClr val="475569"/>
-                </a:solidFill>
-                <a:latin typeface="Calibri" pitchFamily="34" charset="0"/>
-                <a:ea typeface="Calibri" pitchFamily="34" charset="-122"/>
-                <a:cs typeface="Calibri" pitchFamily="34" charset="-120"/>
-              </a:rPr>
-              <a:t>ongoing action</a:t>
-            </a:r>
-            <a:endParaRPr lang="en-US" sz="850" dirty="0"/>
-          </a:p>
-        </p:txBody>
-      </p:sp>
-      <p:sp>
-        <p:nvSpPr>
-          <p:cNvPr id="25" name="Shape 23"/>
-          <p:cNvSpPr/>
-          <p:nvPr/>
-        </p:nvSpPr>
-        <p:spPr>
-          <a:xfrm>
-            <a:off x="365760" y="3273552"/>
-            <a:ext cx="1371600" cy="658368"/>
+              <a:t>Syllables</a:t>
+            </a:r>
+            <a:endParaRPr lang="en-US" sz="1100" dirty="0"/>
+          </a:p>
+        </p:txBody>
+      </p:sp>
+      <p:sp>
+        <p:nvSpPr>
+          <p:cNvPr id="24" name="Shape 22"/>
+          <p:cNvSpPr/>
+          <p:nvPr/>
+        </p:nvSpPr>
+        <p:spPr>
+          <a:xfrm>
+            <a:off x="1874520" y="3273552"/>
+            <a:ext cx="6903720" cy="658368"/>
           </a:xfrm>
           <a:prstGeom prst="rect">
             <a:avLst>
@@ -26415,11 +26302,38 @@
             </a:avLst>
           </a:prstGeom>
           <a:solidFill>
-            <a:srgbClr val="E2E8F0"/>
-          </a:solidFill>
-          <a:ln w="12700">
-            <a:solidFill>
-              <a:srgbClr val="E2E8F0"/>
+            <a:srgbClr val="CCFBF1"/>
+          </a:solidFill>
+          <a:ln w="12700">
+            <a:solidFill>
+              <a:srgbClr val="0D9488"/>
+            </a:solidFill>
+            <a:prstDash val="solid"/>
+          </a:ln>
+        </p:spPr>
+      </p:sp>
+      <p:sp>
+        <p:nvSpPr>
+          <p:cNvPr id="25" name="Shape 23"/>
+          <p:cNvSpPr/>
+          <p:nvPr/>
+        </p:nvSpPr>
+        <p:spPr>
+          <a:xfrm>
+            <a:off x="2313432" y="3364992"/>
+            <a:ext cx="1645920" cy="475488"/>
+          </a:xfrm>
+          <a:prstGeom prst="rect">
+            <a:avLst>
+              <a:gd name="adj" fmla="val 9615"/>
+            </a:avLst>
+          </a:prstGeom>
+          <a:solidFill>
+            <a:srgbClr val="FFFFFF"/>
+          </a:solidFill>
+          <a:ln w="12700">
+            <a:solidFill>
+              <a:srgbClr val="0D9488"/>
             </a:solidFill>
             <a:prstDash val="solid"/>
           </a:ln>
@@ -26433,63 +26347,75 @@
         </p:nvSpPr>
         <p:spPr>
           <a:xfrm>
-            <a:off x="365760" y="3273552"/>
-            <a:ext cx="1371600" cy="658368"/>
-          </a:xfrm>
-          <a:prstGeom prst="rect">
-            <a:avLst/>
-          </a:prstGeom>
-          <a:noFill/>
-          <a:ln/>
-        </p:spPr>
-        <p:txBody>
-          <a:bodyPr wrap="square" lIns="0" tIns="0" rIns="0" bIns="0" rtlCol="0" anchor="ctr"/>
-          <a:lstStyle/>
-          <a:p>
-            <a:pPr algn="ctr" indent="0" marL="0">
-              <a:buNone/>
-            </a:pPr>
-            <a:r>
-              <a:rPr lang="en-US" sz="1100" b="1" dirty="0">
-                <a:solidFill>
-                  <a:srgbClr val="475569"/>
+            <a:off x="2313432" y="3364992"/>
+            <a:ext cx="1645920" cy="475488"/>
+          </a:xfrm>
+          <a:prstGeom prst="rect">
+            <a:avLst/>
+          </a:prstGeom>
+          <a:noFill/>
+          <a:ln/>
+        </p:spPr>
+        <p:txBody>
+          <a:bodyPr wrap="square" lIns="0" tIns="0" rIns="0" bIns="0" rtlCol="0" anchor="ctr"/>
+          <a:lstStyle/>
+          <a:p>
+            <a:pPr algn="ctr" indent="0" marL="0">
+              <a:buNone/>
+            </a:pPr>
+            <a:r>
+              <a:rPr lang="en-US" sz="1400" b="1" dirty="0">
+                <a:solidFill>
+                  <a:srgbClr val="0D9488"/>
                 </a:solidFill>
                 <a:latin typeface="Trebuchet MS" pitchFamily="34" charset="0"/>
                 <a:ea typeface="Trebuchet MS" pitchFamily="34" charset="-122"/>
                 <a:cs typeface="Trebuchet MS" pitchFamily="34" charset="-120"/>
               </a:rPr>
-              <a:t>Syllables</a:t>
-            </a:r>
-            <a:endParaRPr lang="en-US" sz="1100" dirty="0"/>
-          </a:p>
-        </p:txBody>
-      </p:sp>
-      <p:sp>
-        <p:nvSpPr>
-          <p:cNvPr id="27" name="Shape 25"/>
-          <p:cNvSpPr/>
-          <p:nvPr/>
-        </p:nvSpPr>
-        <p:spPr>
-          <a:xfrm>
-            <a:off x="1874520" y="3273552"/>
-            <a:ext cx="6903720" cy="658368"/>
-          </a:xfrm>
-          <a:prstGeom prst="rect">
-            <a:avLst>
-              <a:gd name="adj" fmla="val 8333"/>
-            </a:avLst>
-          </a:prstGeom>
-          <a:solidFill>
-            <a:srgbClr val="CCFBF1"/>
-          </a:solidFill>
-          <a:ln w="12700">
-            <a:solidFill>
-              <a:srgbClr val="0D9488"/>
-            </a:solidFill>
-            <a:prstDash val="solid"/>
-          </a:ln>
-        </p:spPr>
+              <a:t>re</a:t>
+            </a:r>
+            <a:endParaRPr lang="en-US" sz="1400" dirty="0"/>
+          </a:p>
+        </p:txBody>
+      </p:sp>
+      <p:sp>
+        <p:nvSpPr>
+          <p:cNvPr id="27" name="Text 25"/>
+          <p:cNvSpPr/>
+          <p:nvPr/>
+        </p:nvSpPr>
+        <p:spPr>
+          <a:xfrm>
+            <a:off x="3959352" y="3364992"/>
+            <a:ext cx="411480" cy="475488"/>
+          </a:xfrm>
+          <a:prstGeom prst="rect">
+            <a:avLst/>
+          </a:prstGeom>
+          <a:noFill/>
+          <a:ln/>
+        </p:spPr>
+        <p:txBody>
+          <a:bodyPr wrap="square" lIns="0" tIns="0" rIns="0" bIns="0" rtlCol="0" anchor="ctr"/>
+          <a:lstStyle/>
+          <a:p>
+            <a:pPr algn="ctr" indent="0" marL="0">
+              <a:buNone/>
+            </a:pPr>
+            <a:r>
+              <a:rPr lang="en-US" sz="1600" b="1" dirty="0">
+                <a:solidFill>
+                  <a:srgbClr val="0D9488"/>
+                </a:solidFill>
+                <a:latin typeface="Trebuchet MS" pitchFamily="34" charset="0"/>
+                <a:ea typeface="Trebuchet MS" pitchFamily="34" charset="-122"/>
+                <a:cs typeface="Trebuchet MS" pitchFamily="34" charset="-120"/>
+              </a:rPr>
+              <a:t>·</a:t>
+            </a:r>
+            <a:endParaRPr lang="en-US" sz="1600" dirty="0"/>
+          </a:p>
+        </p:txBody>
       </p:sp>
       <p:sp>
         <p:nvSpPr>
@@ -26499,8 +26425,8 @@
         </p:nvSpPr>
         <p:spPr>
           <a:xfrm>
-            <a:off x="1975104" y="3364992"/>
-            <a:ext cx="1554480" cy="475488"/>
+            <a:off x="4370832" y="3364992"/>
+            <a:ext cx="1645920" cy="475488"/>
           </a:xfrm>
           <a:prstGeom prst="rect">
             <a:avLst>
@@ -26526,8 +26452,8 @@
         </p:nvSpPr>
         <p:spPr>
           <a:xfrm>
-            <a:off x="1975104" y="3364992"/>
-            <a:ext cx="1554480" cy="475488"/>
+            <a:off x="4370832" y="3364992"/>
+            <a:ext cx="1645920" cy="475488"/>
           </a:xfrm>
           <a:prstGeom prst="rect">
             <a:avLst/>
@@ -26551,7 +26477,7 @@
                 <a:ea typeface="Trebuchet MS" pitchFamily="34" charset="-122"/>
                 <a:cs typeface="Trebuchet MS" pitchFamily="34" charset="-120"/>
               </a:rPr>
-              <a:t>re</a:t>
+              <a:t>vi</a:t>
             </a:r>
             <a:endParaRPr lang="en-US" sz="1400" dirty="0"/>
           </a:p>
@@ -26565,8 +26491,8 @@
         </p:nvSpPr>
         <p:spPr>
           <a:xfrm>
-            <a:off x="3529584" y="3364992"/>
-            <a:ext cx="73152" cy="475488"/>
+            <a:off x="6016752" y="3364992"/>
+            <a:ext cx="411480" cy="475488"/>
           </a:xfrm>
           <a:prstGeom prst="rect">
             <a:avLst/>
@@ -26604,8 +26530,8 @@
         </p:nvSpPr>
         <p:spPr>
           <a:xfrm>
-            <a:off x="3602736" y="3364992"/>
-            <a:ext cx="1554480" cy="475488"/>
+            <a:off x="6428232" y="3364992"/>
+            <a:ext cx="1645920" cy="475488"/>
           </a:xfrm>
           <a:prstGeom prst="rect">
             <a:avLst>
@@ -26631,8 +26557,8 @@
         </p:nvSpPr>
         <p:spPr>
           <a:xfrm>
-            <a:off x="3602736" y="3364992"/>
-            <a:ext cx="1554480" cy="475488"/>
+            <a:off x="6428232" y="3364992"/>
+            <a:ext cx="1645920" cy="475488"/>
           </a:xfrm>
           <a:prstGeom prst="rect">
             <a:avLst/>
@@ -26656,7 +26582,7 @@
                 <a:ea typeface="Trebuchet MS" pitchFamily="34" charset="-122"/>
                 <a:cs typeface="Trebuchet MS" pitchFamily="34" charset="-120"/>
               </a:rPr>
-              <a:t>vis</a:t>
+              <a:t>sit</a:t>
             </a:r>
             <a:endParaRPr lang="en-US" sz="1400" dirty="0"/>
           </a:p>
@@ -26664,224 +26590,80 @@
       </p:sp>
       <p:sp>
         <p:nvSpPr>
-          <p:cNvPr id="33" name="Text 31"/>
-          <p:cNvSpPr/>
-          <p:nvPr/>
-        </p:nvSpPr>
-        <p:spPr>
-          <a:xfrm>
-            <a:off x="5157216" y="3364992"/>
-            <a:ext cx="73152" cy="475488"/>
-          </a:xfrm>
-          <a:prstGeom prst="rect">
-            <a:avLst/>
-          </a:prstGeom>
-          <a:noFill/>
-          <a:ln/>
-        </p:spPr>
-        <p:txBody>
-          <a:bodyPr wrap="square" lIns="0" tIns="0" rIns="0" bIns="0" rtlCol="0" anchor="ctr"/>
-          <a:lstStyle/>
-          <a:p>
-            <a:pPr algn="ctr" indent="0" marL="0">
-              <a:buNone/>
-            </a:pPr>
-            <a:r>
-              <a:rPr lang="en-US" sz="1600" b="1" dirty="0">
-                <a:solidFill>
-                  <a:srgbClr val="0D9488"/>
+          <p:cNvPr id="33" name="Shape 31"/>
+          <p:cNvSpPr/>
+          <p:nvPr/>
+        </p:nvSpPr>
+        <p:spPr>
+          <a:xfrm>
+            <a:off x="365760" y="4096512"/>
+            <a:ext cx="1371600" cy="804672"/>
+          </a:xfrm>
+          <a:prstGeom prst="rect">
+            <a:avLst>
+              <a:gd name="adj" fmla="val 6818"/>
+            </a:avLst>
+          </a:prstGeom>
+          <a:solidFill>
+            <a:srgbClr val="E2E8F0"/>
+          </a:solidFill>
+          <a:ln w="12700">
+            <a:solidFill>
+              <a:srgbClr val="E2E8F0"/>
+            </a:solidFill>
+            <a:prstDash val="solid"/>
+          </a:ln>
+        </p:spPr>
+      </p:sp>
+      <p:sp>
+        <p:nvSpPr>
+          <p:cNvPr id="34" name="Text 32"/>
+          <p:cNvSpPr/>
+          <p:nvPr/>
+        </p:nvSpPr>
+        <p:spPr>
+          <a:xfrm>
+            <a:off x="365760" y="4096512"/>
+            <a:ext cx="1371600" cy="804672"/>
+          </a:xfrm>
+          <a:prstGeom prst="rect">
+            <a:avLst/>
+          </a:prstGeom>
+          <a:noFill/>
+          <a:ln/>
+        </p:spPr>
+        <p:txBody>
+          <a:bodyPr wrap="square" lIns="0" tIns="0" rIns="0" bIns="0" rtlCol="0" anchor="ctr"/>
+          <a:lstStyle/>
+          <a:p>
+            <a:pPr algn="ctr" indent="0" marL="0">
+              <a:buNone/>
+            </a:pPr>
+            <a:r>
+              <a:rPr lang="en-US" sz="1100" b="1" dirty="0">
+                <a:solidFill>
+                  <a:srgbClr val="475569"/>
                 </a:solidFill>
                 <a:latin typeface="Trebuchet MS" pitchFamily="34" charset="0"/>
                 <a:ea typeface="Trebuchet MS" pitchFamily="34" charset="-122"/>
                 <a:cs typeface="Trebuchet MS" pitchFamily="34" charset="-120"/>
               </a:rPr>
-              <a:t>·</a:t>
-            </a:r>
-            <a:endParaRPr lang="en-US" sz="1600" dirty="0"/>
-          </a:p>
-        </p:txBody>
-      </p:sp>
-      <p:sp>
-        <p:nvSpPr>
-          <p:cNvPr id="34" name="Shape 32"/>
-          <p:cNvSpPr/>
-          <p:nvPr/>
-        </p:nvSpPr>
-        <p:spPr>
-          <a:xfrm>
-            <a:off x="5230368" y="3364992"/>
-            <a:ext cx="1554480" cy="475488"/>
-          </a:xfrm>
-          <a:prstGeom prst="rect">
-            <a:avLst>
-              <a:gd name="adj" fmla="val 9615"/>
-            </a:avLst>
-          </a:prstGeom>
-          <a:solidFill>
-            <a:srgbClr val="FFFFFF"/>
-          </a:solidFill>
-          <a:ln w="12700">
-            <a:solidFill>
-              <a:srgbClr val="0D9488"/>
-            </a:solidFill>
-            <a:prstDash val="solid"/>
-          </a:ln>
-        </p:spPr>
-      </p:sp>
-      <p:sp>
-        <p:nvSpPr>
-          <p:cNvPr id="35" name="Text 33"/>
-          <p:cNvSpPr/>
-          <p:nvPr/>
-        </p:nvSpPr>
-        <p:spPr>
-          <a:xfrm>
-            <a:off x="5230368" y="3364992"/>
-            <a:ext cx="1554480" cy="475488"/>
-          </a:xfrm>
-          <a:prstGeom prst="rect">
-            <a:avLst/>
-          </a:prstGeom>
-          <a:noFill/>
-          <a:ln/>
-        </p:spPr>
-        <p:txBody>
-          <a:bodyPr wrap="square" lIns="0" tIns="0" rIns="0" bIns="0" rtlCol="0" anchor="ctr"/>
-          <a:lstStyle/>
-          <a:p>
-            <a:pPr algn="ctr" indent="0" marL="0">
-              <a:buNone/>
-            </a:pPr>
-            <a:r>
-              <a:rPr lang="en-US" sz="1400" b="1" dirty="0">
-                <a:solidFill>
-                  <a:srgbClr val="0D9488"/>
-                </a:solidFill>
-                <a:latin typeface="Trebuchet MS" pitchFamily="34" charset="0"/>
-                <a:ea typeface="Trebuchet MS" pitchFamily="34" charset="-122"/>
-                <a:cs typeface="Trebuchet MS" pitchFamily="34" charset="-120"/>
-              </a:rPr>
-              <a:t>it</a:t>
-            </a:r>
-            <a:endParaRPr lang="en-US" sz="1400" dirty="0"/>
-          </a:p>
-        </p:txBody>
-      </p:sp>
-      <p:sp>
-        <p:nvSpPr>
-          <p:cNvPr id="36" name="Text 34"/>
-          <p:cNvSpPr/>
-          <p:nvPr/>
-        </p:nvSpPr>
-        <p:spPr>
-          <a:xfrm>
-            <a:off x="6784848" y="3364992"/>
-            <a:ext cx="73152" cy="475488"/>
-          </a:xfrm>
-          <a:prstGeom prst="rect">
-            <a:avLst/>
-          </a:prstGeom>
-          <a:noFill/>
-          <a:ln/>
-        </p:spPr>
-        <p:txBody>
-          <a:bodyPr wrap="square" lIns="0" tIns="0" rIns="0" bIns="0" rtlCol="0" anchor="ctr"/>
-          <a:lstStyle/>
-          <a:p>
-            <a:pPr algn="ctr" indent="0" marL="0">
-              <a:buNone/>
-            </a:pPr>
-            <a:r>
-              <a:rPr lang="en-US" sz="1600" b="1" dirty="0">
-                <a:solidFill>
-                  <a:srgbClr val="0D9488"/>
-                </a:solidFill>
-                <a:latin typeface="Trebuchet MS" pitchFamily="34" charset="0"/>
-                <a:ea typeface="Trebuchet MS" pitchFamily="34" charset="-122"/>
-                <a:cs typeface="Trebuchet MS" pitchFamily="34" charset="-120"/>
-              </a:rPr>
-              <a:t>·</a:t>
-            </a:r>
-            <a:endParaRPr lang="en-US" sz="1600" dirty="0"/>
-          </a:p>
-        </p:txBody>
-      </p:sp>
-      <p:sp>
-        <p:nvSpPr>
-          <p:cNvPr id="37" name="Shape 35"/>
-          <p:cNvSpPr/>
-          <p:nvPr/>
-        </p:nvSpPr>
-        <p:spPr>
-          <a:xfrm>
-            <a:off x="6858000" y="3364992"/>
-            <a:ext cx="1554480" cy="475488"/>
-          </a:xfrm>
-          <a:prstGeom prst="rect">
-            <a:avLst>
-              <a:gd name="adj" fmla="val 9615"/>
-            </a:avLst>
-          </a:prstGeom>
-          <a:solidFill>
-            <a:srgbClr val="FFFFFF"/>
-          </a:solidFill>
-          <a:ln w="12700">
-            <a:solidFill>
-              <a:srgbClr val="0D9488"/>
-            </a:solidFill>
-            <a:prstDash val="solid"/>
-          </a:ln>
-        </p:spPr>
-      </p:sp>
-      <p:sp>
-        <p:nvSpPr>
-          <p:cNvPr id="38" name="Text 36"/>
-          <p:cNvSpPr/>
-          <p:nvPr/>
-        </p:nvSpPr>
-        <p:spPr>
-          <a:xfrm>
-            <a:off x="6858000" y="3364992"/>
-            <a:ext cx="1554480" cy="475488"/>
-          </a:xfrm>
-          <a:prstGeom prst="rect">
-            <a:avLst/>
-          </a:prstGeom>
-          <a:noFill/>
-          <a:ln/>
-        </p:spPr>
-        <p:txBody>
-          <a:bodyPr wrap="square" lIns="0" tIns="0" rIns="0" bIns="0" rtlCol="0" anchor="ctr"/>
-          <a:lstStyle/>
-          <a:p>
-            <a:pPr algn="ctr" indent="0" marL="0">
-              <a:buNone/>
-            </a:pPr>
-            <a:r>
-              <a:rPr lang="en-US" sz="1400" b="1" dirty="0">
-                <a:solidFill>
-                  <a:srgbClr val="0D9488"/>
-                </a:solidFill>
-                <a:latin typeface="Trebuchet MS" pitchFamily="34" charset="0"/>
-                <a:ea typeface="Trebuchet MS" pitchFamily="34" charset="-122"/>
-                <a:cs typeface="Trebuchet MS" pitchFamily="34" charset="-120"/>
-              </a:rPr>
-              <a:t>ing</a:t>
-            </a:r>
-            <a:endParaRPr lang="en-US" sz="1400" dirty="0"/>
-          </a:p>
-        </p:txBody>
-      </p:sp>
-      <p:sp>
-        <p:nvSpPr>
-          <p:cNvPr id="39" name="Shape 37"/>
-          <p:cNvSpPr/>
-          <p:nvPr/>
-        </p:nvSpPr>
-        <p:spPr>
-          <a:xfrm>
-            <a:off x="365760" y="4096512"/>
-            <a:ext cx="1371600" cy="804672"/>
+              <a:t>Phonemes</a:t>
+            </a:r>
+            <a:endParaRPr lang="en-US" sz="1100" dirty="0"/>
+          </a:p>
+        </p:txBody>
+      </p:sp>
+      <p:sp>
+        <p:nvSpPr>
+          <p:cNvPr id="35" name="Shape 33"/>
+          <p:cNvSpPr/>
+          <p:nvPr/>
+        </p:nvSpPr>
+        <p:spPr>
+          <a:xfrm>
+            <a:off x="1874520" y="4096512"/>
+            <a:ext cx="6903720" cy="804672"/>
           </a:xfrm>
           <a:prstGeom prst="rect">
             <a:avLst>
@@ -26889,85 +26671,19 @@
             </a:avLst>
           </a:prstGeom>
           <a:solidFill>
-            <a:srgbClr val="E2E8F0"/>
+            <a:srgbClr val="F8FAFC"/>
           </a:solidFill>
           <a:ln w="12700">
             <a:solidFill>
               <a:srgbClr val="E2E8F0"/>
             </a:solidFill>
-            <a:prstDash val="solid"/>
-          </a:ln>
-        </p:spPr>
-      </p:sp>
-      <p:sp>
-        <p:nvSpPr>
-          <p:cNvPr id="40" name="Text 38"/>
-          <p:cNvSpPr/>
-          <p:nvPr/>
-        </p:nvSpPr>
-        <p:spPr>
-          <a:xfrm>
-            <a:off x="365760" y="4096512"/>
-            <a:ext cx="1371600" cy="804672"/>
-          </a:xfrm>
-          <a:prstGeom prst="rect">
-            <a:avLst/>
-          </a:prstGeom>
-          <a:noFill/>
-          <a:ln/>
-        </p:spPr>
-        <p:txBody>
-          <a:bodyPr wrap="square" lIns="0" tIns="0" rIns="0" bIns="0" rtlCol="0" anchor="ctr"/>
-          <a:lstStyle/>
-          <a:p>
-            <a:pPr algn="ctr" indent="0" marL="0">
-              <a:buNone/>
-            </a:pPr>
-            <a:r>
-              <a:rPr lang="en-US" sz="1100" b="1" dirty="0">
-                <a:solidFill>
-                  <a:srgbClr val="475569"/>
-                </a:solidFill>
-                <a:latin typeface="Trebuchet MS" pitchFamily="34" charset="0"/>
-                <a:ea typeface="Trebuchet MS" pitchFamily="34" charset="-122"/>
-                <a:cs typeface="Trebuchet MS" pitchFamily="34" charset="-120"/>
-              </a:rPr>
-              <a:t>Phonemes</a:t>
-            </a:r>
-            <a:endParaRPr lang="en-US" sz="1100" dirty="0"/>
-          </a:p>
-        </p:txBody>
-      </p:sp>
-      <p:sp>
-        <p:nvSpPr>
-          <p:cNvPr id="41" name="Shape 39"/>
-          <p:cNvSpPr/>
-          <p:nvPr/>
-        </p:nvSpPr>
-        <p:spPr>
-          <a:xfrm>
-            <a:off x="1874520" y="4096512"/>
-            <a:ext cx="6903720" cy="804672"/>
-          </a:xfrm>
-          <a:prstGeom prst="rect">
-            <a:avLst>
-              <a:gd name="adj" fmla="val 6818"/>
-            </a:avLst>
-          </a:prstGeom>
-          <a:solidFill>
-            <a:srgbClr val="F8FAFC"/>
-          </a:solidFill>
-          <a:ln w="12700">
-            <a:solidFill>
-              <a:srgbClr val="E2E8F0"/>
-            </a:solidFill>
             <a:prstDash val="dash"/>
           </a:ln>
         </p:spPr>
       </p:sp>
       <p:sp>
         <p:nvSpPr>
-          <p:cNvPr id="42" name="Text 40"/>
+          <p:cNvPr id="36" name="Text 34"/>
           <p:cNvSpPr/>
           <p:nvPr/>
         </p:nvSpPr>
@@ -27429,7 +27145,7 @@
                 <a:ea typeface="Trebuchet MS" pitchFamily="34" charset="-122"/>
                 <a:cs typeface="Trebuchet MS" pitchFamily="34" charset="-120"/>
               </a:rPr>
-              <a:t>revisiting</a:t>
+              <a:t>revisit</a:t>
             </a:r>
             <a:endParaRPr lang="en-US" sz="2800" dirty="0"/>
           </a:p>
@@ -27509,7 +27225,7 @@
         </p:nvSpPr>
         <p:spPr>
           <a:xfrm>
-            <a:off x="2221992" y="2258568"/>
+            <a:off x="2938272" y="2258568"/>
             <a:ext cx="1828800" cy="292608"/>
           </a:xfrm>
           <a:prstGeom prst="rect">
@@ -27543,7 +27259,7 @@
         </p:nvSpPr>
         <p:spPr>
           <a:xfrm>
-            <a:off x="2221992" y="2258568"/>
+            <a:off x="2938272" y="2258568"/>
             <a:ext cx="1828800" cy="292608"/>
           </a:xfrm>
           <a:prstGeom prst="rect">
@@ -27582,7 +27298,7 @@
         </p:nvSpPr>
         <p:spPr>
           <a:xfrm>
-            <a:off x="2221992" y="2569464"/>
+            <a:off x="2938272" y="2569464"/>
             <a:ext cx="1828800" cy="201168"/>
           </a:xfrm>
           <a:prstGeom prst="rect">
@@ -27621,7 +27337,7 @@
         </p:nvSpPr>
         <p:spPr>
           <a:xfrm>
-            <a:off x="4370832" y="2258568"/>
+            <a:off x="5803392" y="2258568"/>
             <a:ext cx="1828800" cy="292608"/>
           </a:xfrm>
           <a:prstGeom prst="rect">
@@ -27655,7 +27371,7 @@
         </p:nvSpPr>
         <p:spPr>
           <a:xfrm>
-            <a:off x="4370832" y="2258568"/>
+            <a:off x="5803392" y="2258568"/>
             <a:ext cx="1828800" cy="292608"/>
           </a:xfrm>
           <a:prstGeom prst="rect">
@@ -27694,7 +27410,7 @@
         </p:nvSpPr>
         <p:spPr>
           <a:xfrm>
-            <a:off x="4370832" y="2569464"/>
+            <a:off x="5803392" y="2569464"/>
             <a:ext cx="1828800" cy="201168"/>
           </a:xfrm>
           <a:prstGeom prst="rect">
@@ -27733,30 +27449,23 @@
         </p:nvSpPr>
         <p:spPr>
           <a:xfrm>
-            <a:off x="6519672" y="2258568"/>
-            <a:ext cx="1828800" cy="292608"/>
+            <a:off x="365760" y="3273552"/>
+            <a:ext cx="1371600" cy="658368"/>
           </a:xfrm>
           <a:prstGeom prst="rect">
             <a:avLst>
-              <a:gd name="adj" fmla="val 25000"/>
+              <a:gd name="adj" fmla="val 8333"/>
             </a:avLst>
           </a:prstGeom>
           <a:solidFill>
-            <a:srgbClr val="FCE7F3"/>
-          </a:solidFill>
-          <a:ln w="19050">
-            <a:solidFill>
-              <a:srgbClr val="DB2777"/>
-            </a:solidFill>
-            <a:prstDash val="solid"/>
-          </a:ln>
-          <a:effectLst>
-            <a:outerShdw sx="100000" sy="100000" kx="0" ky="0" algn="bl" rotWithShape="0" blurRad="101600" dist="38100" dir="8100000">
-              <a:srgbClr val="000000">
-                <a:alpha val="12000"/>
-              </a:srgbClr>
-            </a:outerShdw>
-          </a:effectLst>
+            <a:srgbClr val="E2E8F0"/>
+          </a:solidFill>
+          <a:ln w="12700">
+            <a:solidFill>
+              <a:srgbClr val="E2E8F0"/>
+            </a:solidFill>
+            <a:prstDash val="solid"/>
+          </a:ln>
         </p:spPr>
       </p:sp>
       <p:sp>
@@ -27767,47 +27476,773 @@
         </p:nvSpPr>
         <p:spPr>
           <a:xfrm>
-            <a:off x="6519672" y="2258568"/>
-            <a:ext cx="1828800" cy="292608"/>
-          </a:xfrm>
-          <a:prstGeom prst="rect">
-            <a:avLst/>
-          </a:prstGeom>
-          <a:noFill/>
-          <a:ln/>
-        </p:spPr>
-        <p:txBody>
-          <a:bodyPr wrap="square" lIns="0" tIns="0" rIns="0" bIns="0" rtlCol="0" anchor="ctr"/>
-          <a:lstStyle/>
-          <a:p>
-            <a:pPr algn="ctr" indent="0" marL="0">
-              <a:buNone/>
-            </a:pPr>
-            <a:r>
-              <a:rPr lang="en-US" sz="1300" b="1" dirty="0">
-                <a:solidFill>
-                  <a:srgbClr val="9D174D"/>
+            <a:off x="365760" y="3273552"/>
+            <a:ext cx="1371600" cy="658368"/>
+          </a:xfrm>
+          <a:prstGeom prst="rect">
+            <a:avLst/>
+          </a:prstGeom>
+          <a:noFill/>
+          <a:ln/>
+        </p:spPr>
+        <p:txBody>
+          <a:bodyPr wrap="square" lIns="0" tIns="0" rIns="0" bIns="0" rtlCol="0" anchor="ctr"/>
+          <a:lstStyle/>
+          <a:p>
+            <a:pPr algn="ctr" indent="0" marL="0">
+              <a:buNone/>
+            </a:pPr>
+            <a:r>
+              <a:rPr lang="en-US" sz="1100" b="1" dirty="0">
+                <a:solidFill>
+                  <a:srgbClr val="475569"/>
                 </a:solidFill>
                 <a:latin typeface="Trebuchet MS" pitchFamily="34" charset="0"/>
                 <a:ea typeface="Trebuchet MS" pitchFamily="34" charset="-122"/>
                 <a:cs typeface="Trebuchet MS" pitchFamily="34" charset="-120"/>
               </a:rPr>
-              <a:t>ing</a:t>
-            </a:r>
-            <a:endParaRPr lang="en-US" sz="1300" dirty="0"/>
-          </a:p>
-        </p:txBody>
-      </p:sp>
-      <p:sp>
-        <p:nvSpPr>
-          <p:cNvPr id="24" name="Text 22"/>
-          <p:cNvSpPr/>
-          <p:nvPr/>
-        </p:nvSpPr>
-        <p:spPr>
-          <a:xfrm>
-            <a:off x="6519672" y="2569464"/>
-            <a:ext cx="1828800" cy="201168"/>
+              <a:t>Syllables</a:t>
+            </a:r>
+            <a:endParaRPr lang="en-US" sz="1100" dirty="0"/>
+          </a:p>
+        </p:txBody>
+      </p:sp>
+      <p:sp>
+        <p:nvSpPr>
+          <p:cNvPr id="24" name="Shape 22"/>
+          <p:cNvSpPr/>
+          <p:nvPr/>
+        </p:nvSpPr>
+        <p:spPr>
+          <a:xfrm>
+            <a:off x="1874520" y="3273552"/>
+            <a:ext cx="6903720" cy="658368"/>
+          </a:xfrm>
+          <a:prstGeom prst="rect">
+            <a:avLst>
+              <a:gd name="adj" fmla="val 8333"/>
+            </a:avLst>
+          </a:prstGeom>
+          <a:solidFill>
+            <a:srgbClr val="CCFBF1"/>
+          </a:solidFill>
+          <a:ln w="12700">
+            <a:solidFill>
+              <a:srgbClr val="0D9488"/>
+            </a:solidFill>
+            <a:prstDash val="solid"/>
+          </a:ln>
+        </p:spPr>
+      </p:sp>
+      <p:sp>
+        <p:nvSpPr>
+          <p:cNvPr id="25" name="Shape 23"/>
+          <p:cNvSpPr/>
+          <p:nvPr/>
+        </p:nvSpPr>
+        <p:spPr>
+          <a:xfrm>
+            <a:off x="2313432" y="3364992"/>
+            <a:ext cx="1645920" cy="475488"/>
+          </a:xfrm>
+          <a:prstGeom prst="rect">
+            <a:avLst>
+              <a:gd name="adj" fmla="val 9615"/>
+            </a:avLst>
+          </a:prstGeom>
+          <a:solidFill>
+            <a:srgbClr val="FFFFFF"/>
+          </a:solidFill>
+          <a:ln w="12700">
+            <a:solidFill>
+              <a:srgbClr val="0D9488"/>
+            </a:solidFill>
+            <a:prstDash val="solid"/>
+          </a:ln>
+        </p:spPr>
+      </p:sp>
+      <p:sp>
+        <p:nvSpPr>
+          <p:cNvPr id="26" name="Text 24"/>
+          <p:cNvSpPr/>
+          <p:nvPr/>
+        </p:nvSpPr>
+        <p:spPr>
+          <a:xfrm>
+            <a:off x="2313432" y="3364992"/>
+            <a:ext cx="1645920" cy="475488"/>
+          </a:xfrm>
+          <a:prstGeom prst="rect">
+            <a:avLst/>
+          </a:prstGeom>
+          <a:noFill/>
+          <a:ln/>
+        </p:spPr>
+        <p:txBody>
+          <a:bodyPr wrap="square" lIns="0" tIns="0" rIns="0" bIns="0" rtlCol="0" anchor="ctr"/>
+          <a:lstStyle/>
+          <a:p>
+            <a:pPr algn="ctr" indent="0" marL="0">
+              <a:buNone/>
+            </a:pPr>
+            <a:r>
+              <a:rPr lang="en-US" sz="1400" b="1" dirty="0">
+                <a:solidFill>
+                  <a:srgbClr val="0D9488"/>
+                </a:solidFill>
+                <a:latin typeface="Trebuchet MS" pitchFamily="34" charset="0"/>
+                <a:ea typeface="Trebuchet MS" pitchFamily="34" charset="-122"/>
+                <a:cs typeface="Trebuchet MS" pitchFamily="34" charset="-120"/>
+              </a:rPr>
+              <a:t>re</a:t>
+            </a:r>
+            <a:endParaRPr lang="en-US" sz="1400" dirty="0"/>
+          </a:p>
+        </p:txBody>
+      </p:sp>
+      <p:sp>
+        <p:nvSpPr>
+          <p:cNvPr id="27" name="Text 25"/>
+          <p:cNvSpPr/>
+          <p:nvPr/>
+        </p:nvSpPr>
+        <p:spPr>
+          <a:xfrm>
+            <a:off x="3959352" y="3364992"/>
+            <a:ext cx="411480" cy="475488"/>
+          </a:xfrm>
+          <a:prstGeom prst="rect">
+            <a:avLst/>
+          </a:prstGeom>
+          <a:noFill/>
+          <a:ln/>
+        </p:spPr>
+        <p:txBody>
+          <a:bodyPr wrap="square" lIns="0" tIns="0" rIns="0" bIns="0" rtlCol="0" anchor="ctr"/>
+          <a:lstStyle/>
+          <a:p>
+            <a:pPr algn="ctr" indent="0" marL="0">
+              <a:buNone/>
+            </a:pPr>
+            <a:r>
+              <a:rPr lang="en-US" sz="1600" b="1" dirty="0">
+                <a:solidFill>
+                  <a:srgbClr val="0D9488"/>
+                </a:solidFill>
+                <a:latin typeface="Trebuchet MS" pitchFamily="34" charset="0"/>
+                <a:ea typeface="Trebuchet MS" pitchFamily="34" charset="-122"/>
+                <a:cs typeface="Trebuchet MS" pitchFamily="34" charset="-120"/>
+              </a:rPr>
+              <a:t>·</a:t>
+            </a:r>
+            <a:endParaRPr lang="en-US" sz="1600" dirty="0"/>
+          </a:p>
+        </p:txBody>
+      </p:sp>
+      <p:sp>
+        <p:nvSpPr>
+          <p:cNvPr id="28" name="Shape 26"/>
+          <p:cNvSpPr/>
+          <p:nvPr/>
+        </p:nvSpPr>
+        <p:spPr>
+          <a:xfrm>
+            <a:off x="4370832" y="3364992"/>
+            <a:ext cx="1645920" cy="475488"/>
+          </a:xfrm>
+          <a:prstGeom prst="rect">
+            <a:avLst>
+              <a:gd name="adj" fmla="val 9615"/>
+            </a:avLst>
+          </a:prstGeom>
+          <a:solidFill>
+            <a:srgbClr val="FFFFFF"/>
+          </a:solidFill>
+          <a:ln w="12700">
+            <a:solidFill>
+              <a:srgbClr val="0D9488"/>
+            </a:solidFill>
+            <a:prstDash val="solid"/>
+          </a:ln>
+        </p:spPr>
+      </p:sp>
+      <p:sp>
+        <p:nvSpPr>
+          <p:cNvPr id="29" name="Text 27"/>
+          <p:cNvSpPr/>
+          <p:nvPr/>
+        </p:nvSpPr>
+        <p:spPr>
+          <a:xfrm>
+            <a:off x="4370832" y="3364992"/>
+            <a:ext cx="1645920" cy="475488"/>
+          </a:xfrm>
+          <a:prstGeom prst="rect">
+            <a:avLst/>
+          </a:prstGeom>
+          <a:noFill/>
+          <a:ln/>
+        </p:spPr>
+        <p:txBody>
+          <a:bodyPr wrap="square" lIns="0" tIns="0" rIns="0" bIns="0" rtlCol="0" anchor="ctr"/>
+          <a:lstStyle/>
+          <a:p>
+            <a:pPr algn="ctr" indent="0" marL="0">
+              <a:buNone/>
+            </a:pPr>
+            <a:r>
+              <a:rPr lang="en-US" sz="1400" b="1" dirty="0">
+                <a:solidFill>
+                  <a:srgbClr val="0D9488"/>
+                </a:solidFill>
+                <a:latin typeface="Trebuchet MS" pitchFamily="34" charset="0"/>
+                <a:ea typeface="Trebuchet MS" pitchFamily="34" charset="-122"/>
+                <a:cs typeface="Trebuchet MS" pitchFamily="34" charset="-120"/>
+              </a:rPr>
+              <a:t>vi</a:t>
+            </a:r>
+            <a:endParaRPr lang="en-US" sz="1400" dirty="0"/>
+          </a:p>
+        </p:txBody>
+      </p:sp>
+      <p:sp>
+        <p:nvSpPr>
+          <p:cNvPr id="30" name="Text 28"/>
+          <p:cNvSpPr/>
+          <p:nvPr/>
+        </p:nvSpPr>
+        <p:spPr>
+          <a:xfrm>
+            <a:off x="6016752" y="3364992"/>
+            <a:ext cx="411480" cy="475488"/>
+          </a:xfrm>
+          <a:prstGeom prst="rect">
+            <a:avLst/>
+          </a:prstGeom>
+          <a:noFill/>
+          <a:ln/>
+        </p:spPr>
+        <p:txBody>
+          <a:bodyPr wrap="square" lIns="0" tIns="0" rIns="0" bIns="0" rtlCol="0" anchor="ctr"/>
+          <a:lstStyle/>
+          <a:p>
+            <a:pPr algn="ctr" indent="0" marL="0">
+              <a:buNone/>
+            </a:pPr>
+            <a:r>
+              <a:rPr lang="en-US" sz="1600" b="1" dirty="0">
+                <a:solidFill>
+                  <a:srgbClr val="0D9488"/>
+                </a:solidFill>
+                <a:latin typeface="Trebuchet MS" pitchFamily="34" charset="0"/>
+                <a:ea typeface="Trebuchet MS" pitchFamily="34" charset="-122"/>
+                <a:cs typeface="Trebuchet MS" pitchFamily="34" charset="-120"/>
+              </a:rPr>
+              <a:t>·</a:t>
+            </a:r>
+            <a:endParaRPr lang="en-US" sz="1600" dirty="0"/>
+          </a:p>
+        </p:txBody>
+      </p:sp>
+      <p:sp>
+        <p:nvSpPr>
+          <p:cNvPr id="31" name="Shape 29"/>
+          <p:cNvSpPr/>
+          <p:nvPr/>
+        </p:nvSpPr>
+        <p:spPr>
+          <a:xfrm>
+            <a:off x="6428232" y="3364992"/>
+            <a:ext cx="1645920" cy="475488"/>
+          </a:xfrm>
+          <a:prstGeom prst="rect">
+            <a:avLst>
+              <a:gd name="adj" fmla="val 9615"/>
+            </a:avLst>
+          </a:prstGeom>
+          <a:solidFill>
+            <a:srgbClr val="FFFFFF"/>
+          </a:solidFill>
+          <a:ln w="12700">
+            <a:solidFill>
+              <a:srgbClr val="0D9488"/>
+            </a:solidFill>
+            <a:prstDash val="solid"/>
+          </a:ln>
+        </p:spPr>
+      </p:sp>
+      <p:sp>
+        <p:nvSpPr>
+          <p:cNvPr id="32" name="Text 30"/>
+          <p:cNvSpPr/>
+          <p:nvPr/>
+        </p:nvSpPr>
+        <p:spPr>
+          <a:xfrm>
+            <a:off x="6428232" y="3364992"/>
+            <a:ext cx="1645920" cy="475488"/>
+          </a:xfrm>
+          <a:prstGeom prst="rect">
+            <a:avLst/>
+          </a:prstGeom>
+          <a:noFill/>
+          <a:ln/>
+        </p:spPr>
+        <p:txBody>
+          <a:bodyPr wrap="square" lIns="0" tIns="0" rIns="0" bIns="0" rtlCol="0" anchor="ctr"/>
+          <a:lstStyle/>
+          <a:p>
+            <a:pPr algn="ctr" indent="0" marL="0">
+              <a:buNone/>
+            </a:pPr>
+            <a:r>
+              <a:rPr lang="en-US" sz="1400" b="1" dirty="0">
+                <a:solidFill>
+                  <a:srgbClr val="0D9488"/>
+                </a:solidFill>
+                <a:latin typeface="Trebuchet MS" pitchFamily="34" charset="0"/>
+                <a:ea typeface="Trebuchet MS" pitchFamily="34" charset="-122"/>
+                <a:cs typeface="Trebuchet MS" pitchFamily="34" charset="-120"/>
+              </a:rPr>
+              <a:t>sit</a:t>
+            </a:r>
+            <a:endParaRPr lang="en-US" sz="1400" dirty="0"/>
+          </a:p>
+        </p:txBody>
+      </p:sp>
+      <p:sp>
+        <p:nvSpPr>
+          <p:cNvPr id="33" name="Shape 31"/>
+          <p:cNvSpPr/>
+          <p:nvPr/>
+        </p:nvSpPr>
+        <p:spPr>
+          <a:xfrm>
+            <a:off x="365760" y="4096512"/>
+            <a:ext cx="1371600" cy="804672"/>
+          </a:xfrm>
+          <a:prstGeom prst="rect">
+            <a:avLst>
+              <a:gd name="adj" fmla="val 6818"/>
+            </a:avLst>
+          </a:prstGeom>
+          <a:solidFill>
+            <a:srgbClr val="E2E8F0"/>
+          </a:solidFill>
+          <a:ln w="12700">
+            <a:solidFill>
+              <a:srgbClr val="E2E8F0"/>
+            </a:solidFill>
+            <a:prstDash val="solid"/>
+          </a:ln>
+        </p:spPr>
+      </p:sp>
+      <p:sp>
+        <p:nvSpPr>
+          <p:cNvPr id="34" name="Text 32"/>
+          <p:cNvSpPr/>
+          <p:nvPr/>
+        </p:nvSpPr>
+        <p:spPr>
+          <a:xfrm>
+            <a:off x="365760" y="4096512"/>
+            <a:ext cx="1371600" cy="804672"/>
+          </a:xfrm>
+          <a:prstGeom prst="rect">
+            <a:avLst/>
+          </a:prstGeom>
+          <a:noFill/>
+          <a:ln/>
+        </p:spPr>
+        <p:txBody>
+          <a:bodyPr wrap="square" lIns="0" tIns="0" rIns="0" bIns="0" rtlCol="0" anchor="ctr"/>
+          <a:lstStyle/>
+          <a:p>
+            <a:pPr algn="ctr" indent="0" marL="0">
+              <a:buNone/>
+            </a:pPr>
+            <a:r>
+              <a:rPr lang="en-US" sz="1100" b="1" dirty="0">
+                <a:solidFill>
+                  <a:srgbClr val="475569"/>
+                </a:solidFill>
+                <a:latin typeface="Trebuchet MS" pitchFamily="34" charset="0"/>
+                <a:ea typeface="Trebuchet MS" pitchFamily="34" charset="-122"/>
+                <a:cs typeface="Trebuchet MS" pitchFamily="34" charset="-120"/>
+              </a:rPr>
+              <a:t>Phonemes</a:t>
+            </a:r>
+            <a:endParaRPr lang="en-US" sz="1100" dirty="0"/>
+          </a:p>
+        </p:txBody>
+      </p:sp>
+      <p:sp>
+        <p:nvSpPr>
+          <p:cNvPr id="35" name="Shape 33"/>
+          <p:cNvSpPr/>
+          <p:nvPr/>
+        </p:nvSpPr>
+        <p:spPr>
+          <a:xfrm>
+            <a:off x="1874520" y="4096512"/>
+            <a:ext cx="6903720" cy="804672"/>
+          </a:xfrm>
+          <a:prstGeom prst="rect">
+            <a:avLst>
+              <a:gd name="adj" fmla="val 6818"/>
+            </a:avLst>
+          </a:prstGeom>
+          <a:solidFill>
+            <a:srgbClr val="FCE7F3"/>
+          </a:solidFill>
+          <a:ln w="12700">
+            <a:solidFill>
+              <a:srgbClr val="DB2777"/>
+            </a:solidFill>
+            <a:prstDash val="solid"/>
+          </a:ln>
+        </p:spPr>
+      </p:sp>
+      <p:sp>
+        <p:nvSpPr>
+          <p:cNvPr id="36" name="Shape 34"/>
+          <p:cNvSpPr/>
+          <p:nvPr/>
+        </p:nvSpPr>
+        <p:spPr>
+          <a:xfrm>
+            <a:off x="2124837" y="4169664"/>
+            <a:ext cx="685800" cy="384048"/>
+          </a:xfrm>
+          <a:prstGeom prst="rect">
+            <a:avLst>
+              <a:gd name="adj" fmla="val 9524"/>
+            </a:avLst>
+          </a:prstGeom>
+          <a:solidFill>
+            <a:srgbClr val="FFFFFF"/>
+          </a:solidFill>
+          <a:ln w="12700">
+            <a:solidFill>
+              <a:srgbClr val="DB2777"/>
+            </a:solidFill>
+            <a:prstDash val="solid"/>
+          </a:ln>
+        </p:spPr>
+      </p:sp>
+      <p:sp>
+        <p:nvSpPr>
+          <p:cNvPr id="37" name="Text 35"/>
+          <p:cNvSpPr/>
+          <p:nvPr/>
+        </p:nvSpPr>
+        <p:spPr>
+          <a:xfrm>
+            <a:off x="2124837" y="4169664"/>
+            <a:ext cx="685800" cy="384048"/>
+          </a:xfrm>
+          <a:prstGeom prst="rect">
+            <a:avLst/>
+          </a:prstGeom>
+          <a:noFill/>
+          <a:ln/>
+        </p:spPr>
+        <p:txBody>
+          <a:bodyPr wrap="square" lIns="0" tIns="0" rIns="0" bIns="0" rtlCol="0" anchor="ctr"/>
+          <a:lstStyle/>
+          <a:p>
+            <a:pPr algn="ctr" indent="0" marL="0">
+              <a:buNone/>
+            </a:pPr>
+            <a:r>
+              <a:rPr lang="en-US" sz="900" b="1" dirty="0">
+                <a:solidFill>
+                  <a:srgbClr val="9D174D"/>
+                </a:solidFill>
+                <a:latin typeface="Trebuchet MS" pitchFamily="34" charset="0"/>
+                <a:ea typeface="Trebuchet MS" pitchFamily="34" charset="-122"/>
+                <a:cs typeface="Trebuchet MS" pitchFamily="34" charset="-120"/>
+              </a:rPr>
+              <a:t>r</a:t>
+            </a:r>
+            <a:endParaRPr lang="en-US" sz="900" dirty="0"/>
+          </a:p>
+        </p:txBody>
+      </p:sp>
+      <p:sp>
+        <p:nvSpPr>
+          <p:cNvPr id="38" name="Shape 36"/>
+          <p:cNvSpPr/>
+          <p:nvPr/>
+        </p:nvSpPr>
+        <p:spPr>
+          <a:xfrm>
+            <a:off x="3033522" y="4169664"/>
+            <a:ext cx="685800" cy="384048"/>
+          </a:xfrm>
+          <a:prstGeom prst="rect">
+            <a:avLst>
+              <a:gd name="adj" fmla="val 9524"/>
+            </a:avLst>
+          </a:prstGeom>
+          <a:solidFill>
+            <a:srgbClr val="FFFFFF"/>
+          </a:solidFill>
+          <a:ln w="12700">
+            <a:solidFill>
+              <a:srgbClr val="DB2777"/>
+            </a:solidFill>
+            <a:prstDash val="solid"/>
+          </a:ln>
+        </p:spPr>
+      </p:sp>
+      <p:sp>
+        <p:nvSpPr>
+          <p:cNvPr id="39" name="Text 37"/>
+          <p:cNvSpPr/>
+          <p:nvPr/>
+        </p:nvSpPr>
+        <p:spPr>
+          <a:xfrm>
+            <a:off x="3033522" y="4169664"/>
+            <a:ext cx="685800" cy="384048"/>
+          </a:xfrm>
+          <a:prstGeom prst="rect">
+            <a:avLst/>
+          </a:prstGeom>
+          <a:noFill/>
+          <a:ln/>
+        </p:spPr>
+        <p:txBody>
+          <a:bodyPr wrap="square" lIns="0" tIns="0" rIns="0" bIns="0" rtlCol="0" anchor="ctr"/>
+          <a:lstStyle/>
+          <a:p>
+            <a:pPr algn="ctr" indent="0" marL="0">
+              <a:buNone/>
+            </a:pPr>
+            <a:r>
+              <a:rPr lang="en-US" sz="900" b="1" dirty="0">
+                <a:solidFill>
+                  <a:srgbClr val="9D174D"/>
+                </a:solidFill>
+                <a:latin typeface="Trebuchet MS" pitchFamily="34" charset="0"/>
+                <a:ea typeface="Trebuchet MS" pitchFamily="34" charset="-122"/>
+                <a:cs typeface="Trebuchet MS" pitchFamily="34" charset="-120"/>
+              </a:rPr>
+              <a:t>e</a:t>
+            </a:r>
+            <a:endParaRPr lang="en-US" sz="900" dirty="0"/>
+          </a:p>
+        </p:txBody>
+      </p:sp>
+      <p:sp>
+        <p:nvSpPr>
+          <p:cNvPr id="40" name="Shape 38"/>
+          <p:cNvSpPr/>
+          <p:nvPr/>
+        </p:nvSpPr>
+        <p:spPr>
+          <a:xfrm>
+            <a:off x="3942207" y="4169664"/>
+            <a:ext cx="685800" cy="384048"/>
+          </a:xfrm>
+          <a:prstGeom prst="rect">
+            <a:avLst>
+              <a:gd name="adj" fmla="val 9524"/>
+            </a:avLst>
+          </a:prstGeom>
+          <a:solidFill>
+            <a:srgbClr val="FFFFFF"/>
+          </a:solidFill>
+          <a:ln w="12700">
+            <a:solidFill>
+              <a:srgbClr val="DB2777"/>
+            </a:solidFill>
+            <a:prstDash val="solid"/>
+          </a:ln>
+        </p:spPr>
+      </p:sp>
+      <p:sp>
+        <p:nvSpPr>
+          <p:cNvPr id="41" name="Text 39"/>
+          <p:cNvSpPr/>
+          <p:nvPr/>
+        </p:nvSpPr>
+        <p:spPr>
+          <a:xfrm>
+            <a:off x="3942207" y="4169664"/>
+            <a:ext cx="685800" cy="384048"/>
+          </a:xfrm>
+          <a:prstGeom prst="rect">
+            <a:avLst/>
+          </a:prstGeom>
+          <a:noFill/>
+          <a:ln/>
+        </p:spPr>
+        <p:txBody>
+          <a:bodyPr wrap="square" lIns="0" tIns="0" rIns="0" bIns="0" rtlCol="0" anchor="ctr"/>
+          <a:lstStyle/>
+          <a:p>
+            <a:pPr algn="ctr" indent="0" marL="0">
+              <a:buNone/>
+            </a:pPr>
+            <a:r>
+              <a:rPr lang="en-US" sz="900" b="1" dirty="0">
+                <a:solidFill>
+                  <a:srgbClr val="9D174D"/>
+                </a:solidFill>
+                <a:latin typeface="Trebuchet MS" pitchFamily="34" charset="0"/>
+                <a:ea typeface="Trebuchet MS" pitchFamily="34" charset="-122"/>
+                <a:cs typeface="Trebuchet MS" pitchFamily="34" charset="-120"/>
+              </a:rPr>
+              <a:t>v</a:t>
+            </a:r>
+            <a:endParaRPr lang="en-US" sz="900" dirty="0"/>
+          </a:p>
+        </p:txBody>
+      </p:sp>
+      <p:sp>
+        <p:nvSpPr>
+          <p:cNvPr id="42" name="Shape 40"/>
+          <p:cNvSpPr/>
+          <p:nvPr/>
+        </p:nvSpPr>
+        <p:spPr>
+          <a:xfrm>
+            <a:off x="4850892" y="4169664"/>
+            <a:ext cx="685800" cy="384048"/>
+          </a:xfrm>
+          <a:prstGeom prst="rect">
+            <a:avLst>
+              <a:gd name="adj" fmla="val 9524"/>
+            </a:avLst>
+          </a:prstGeom>
+          <a:solidFill>
+            <a:srgbClr val="FFFFFF"/>
+          </a:solidFill>
+          <a:ln w="12700">
+            <a:solidFill>
+              <a:srgbClr val="DB2777"/>
+            </a:solidFill>
+            <a:prstDash val="solid"/>
+          </a:ln>
+        </p:spPr>
+      </p:sp>
+      <p:sp>
+        <p:nvSpPr>
+          <p:cNvPr id="43" name="Text 41"/>
+          <p:cNvSpPr/>
+          <p:nvPr/>
+        </p:nvSpPr>
+        <p:spPr>
+          <a:xfrm>
+            <a:off x="4850892" y="4169664"/>
+            <a:ext cx="685800" cy="384048"/>
+          </a:xfrm>
+          <a:prstGeom prst="rect">
+            <a:avLst/>
+          </a:prstGeom>
+          <a:noFill/>
+          <a:ln/>
+        </p:spPr>
+        <p:txBody>
+          <a:bodyPr wrap="square" lIns="0" tIns="0" rIns="0" bIns="0" rtlCol="0" anchor="ctr"/>
+          <a:lstStyle/>
+          <a:p>
+            <a:pPr algn="ctr" indent="0" marL="0">
+              <a:buNone/>
+            </a:pPr>
+            <a:r>
+              <a:rPr lang="en-US" sz="900" b="1" dirty="0">
+                <a:solidFill>
+                  <a:srgbClr val="9D174D"/>
+                </a:solidFill>
+                <a:latin typeface="Trebuchet MS" pitchFamily="34" charset="0"/>
+                <a:ea typeface="Trebuchet MS" pitchFamily="34" charset="-122"/>
+                <a:cs typeface="Trebuchet MS" pitchFamily="34" charset="-120"/>
+              </a:rPr>
+              <a:t>i</a:t>
+            </a:r>
+            <a:endParaRPr lang="en-US" sz="900" dirty="0"/>
+          </a:p>
+        </p:txBody>
+      </p:sp>
+      <p:sp>
+        <p:nvSpPr>
+          <p:cNvPr id="44" name="Shape 42"/>
+          <p:cNvSpPr/>
+          <p:nvPr/>
+        </p:nvSpPr>
+        <p:spPr>
+          <a:xfrm>
+            <a:off x="5759577" y="4169664"/>
+            <a:ext cx="685800" cy="384048"/>
+          </a:xfrm>
+          <a:prstGeom prst="rect">
+            <a:avLst>
+              <a:gd name="adj" fmla="val 9524"/>
+            </a:avLst>
+          </a:prstGeom>
+          <a:solidFill>
+            <a:srgbClr val="FFFFFF"/>
+          </a:solidFill>
+          <a:ln w="12700">
+            <a:solidFill>
+              <a:srgbClr val="DB2777"/>
+            </a:solidFill>
+            <a:prstDash val="solid"/>
+          </a:ln>
+        </p:spPr>
+      </p:sp>
+      <p:sp>
+        <p:nvSpPr>
+          <p:cNvPr id="45" name="Text 43"/>
+          <p:cNvSpPr/>
+          <p:nvPr/>
+        </p:nvSpPr>
+        <p:spPr>
+          <a:xfrm>
+            <a:off x="5759577" y="4169664"/>
+            <a:ext cx="685800" cy="384048"/>
+          </a:xfrm>
+          <a:prstGeom prst="rect">
+            <a:avLst/>
+          </a:prstGeom>
+          <a:noFill/>
+          <a:ln/>
+        </p:spPr>
+        <p:txBody>
+          <a:bodyPr wrap="square" lIns="0" tIns="0" rIns="0" bIns="0" rtlCol="0" anchor="ctr"/>
+          <a:lstStyle/>
+          <a:p>
+            <a:pPr algn="ctr" indent="0" marL="0">
+              <a:buNone/>
+            </a:pPr>
+            <a:r>
+              <a:rPr lang="en-US" sz="900" b="1" dirty="0">
+                <a:solidFill>
+                  <a:srgbClr val="9D174D"/>
+                </a:solidFill>
+                <a:latin typeface="Trebuchet MS" pitchFamily="34" charset="0"/>
+                <a:ea typeface="Trebuchet MS" pitchFamily="34" charset="-122"/>
+                <a:cs typeface="Trebuchet MS" pitchFamily="34" charset="-120"/>
+              </a:rPr>
+              <a:t>s</a:t>
+            </a:r>
+            <a:endParaRPr lang="en-US" sz="900" dirty="0"/>
+          </a:p>
+        </p:txBody>
+      </p:sp>
+      <p:sp>
+        <p:nvSpPr>
+          <p:cNvPr id="46" name="Text 44"/>
+          <p:cNvSpPr/>
+          <p:nvPr/>
+        </p:nvSpPr>
+        <p:spPr>
+          <a:xfrm>
+            <a:off x="5759577" y="4572000"/>
+            <a:ext cx="685800" cy="219456"/>
           </a:xfrm>
           <a:prstGeom prst="rect">
             <a:avLst/>
@@ -27823,1149 +28258,147 @@
               <a:buNone/>
             </a:pPr>
             <a:r>
-              <a:rPr lang="en-US" sz="850" dirty="0">
-                <a:solidFill>
-                  <a:srgbClr val="475569"/>
+              <a:rPr lang="en-US" sz="750" i="1" dirty="0">
+                <a:solidFill>
+                  <a:srgbClr val="94A3B8"/>
                 </a:solidFill>
                 <a:latin typeface="Calibri" pitchFamily="34" charset="0"/>
                 <a:ea typeface="Calibri" pitchFamily="34" charset="-122"/>
                 <a:cs typeface="Calibri" pitchFamily="34" charset="-120"/>
               </a:rPr>
-              <a:t>ongoing action</a:t>
-            </a:r>
-            <a:endParaRPr lang="en-US" sz="850" dirty="0"/>
-          </a:p>
-        </p:txBody>
-      </p:sp>
-      <p:sp>
-        <p:nvSpPr>
-          <p:cNvPr id="25" name="Shape 23"/>
-          <p:cNvSpPr/>
-          <p:nvPr/>
-        </p:nvSpPr>
-        <p:spPr>
-          <a:xfrm>
-            <a:off x="365760" y="3273552"/>
-            <a:ext cx="1371600" cy="658368"/>
+              <a:t>/z/</a:t>
+            </a:r>
+            <a:endParaRPr lang="en-US" sz="750" dirty="0"/>
+          </a:p>
+        </p:txBody>
+      </p:sp>
+      <p:sp>
+        <p:nvSpPr>
+          <p:cNvPr id="47" name="Shape 45"/>
+          <p:cNvSpPr/>
+          <p:nvPr/>
+        </p:nvSpPr>
+        <p:spPr>
+          <a:xfrm>
+            <a:off x="6668262" y="4169664"/>
+            <a:ext cx="685800" cy="384048"/>
           </a:xfrm>
           <a:prstGeom prst="rect">
             <a:avLst>
-              <a:gd name="adj" fmla="val 8333"/>
+              <a:gd name="adj" fmla="val 9524"/>
             </a:avLst>
           </a:prstGeom>
           <a:solidFill>
-            <a:srgbClr val="E2E8F0"/>
-          </a:solidFill>
-          <a:ln w="12700">
-            <a:solidFill>
-              <a:srgbClr val="E2E8F0"/>
-            </a:solidFill>
-            <a:prstDash val="solid"/>
-          </a:ln>
-        </p:spPr>
-      </p:sp>
-      <p:sp>
-        <p:nvSpPr>
-          <p:cNvPr id="26" name="Text 24"/>
-          <p:cNvSpPr/>
-          <p:nvPr/>
-        </p:nvSpPr>
-        <p:spPr>
-          <a:xfrm>
-            <a:off x="365760" y="3273552"/>
-            <a:ext cx="1371600" cy="658368"/>
-          </a:xfrm>
-          <a:prstGeom prst="rect">
-            <a:avLst/>
-          </a:prstGeom>
-          <a:noFill/>
-          <a:ln/>
-        </p:spPr>
-        <p:txBody>
-          <a:bodyPr wrap="square" lIns="0" tIns="0" rIns="0" bIns="0" rtlCol="0" anchor="ctr"/>
-          <a:lstStyle/>
-          <a:p>
-            <a:pPr algn="ctr" indent="0" marL="0">
-              <a:buNone/>
-            </a:pPr>
-            <a:r>
-              <a:rPr lang="en-US" sz="1100" b="1" dirty="0">
-                <a:solidFill>
-                  <a:srgbClr val="475569"/>
+            <a:srgbClr val="FFFFFF"/>
+          </a:solidFill>
+          <a:ln w="12700">
+            <a:solidFill>
+              <a:srgbClr val="DB2777"/>
+            </a:solidFill>
+            <a:prstDash val="solid"/>
+          </a:ln>
+        </p:spPr>
+      </p:sp>
+      <p:sp>
+        <p:nvSpPr>
+          <p:cNvPr id="48" name="Text 46"/>
+          <p:cNvSpPr/>
+          <p:nvPr/>
+        </p:nvSpPr>
+        <p:spPr>
+          <a:xfrm>
+            <a:off x="6668262" y="4169664"/>
+            <a:ext cx="685800" cy="384048"/>
+          </a:xfrm>
+          <a:prstGeom prst="rect">
+            <a:avLst/>
+          </a:prstGeom>
+          <a:noFill/>
+          <a:ln/>
+        </p:spPr>
+        <p:txBody>
+          <a:bodyPr wrap="square" lIns="0" tIns="0" rIns="0" bIns="0" rtlCol="0" anchor="ctr"/>
+          <a:lstStyle/>
+          <a:p>
+            <a:pPr algn="ctr" indent="0" marL="0">
+              <a:buNone/>
+            </a:pPr>
+            <a:r>
+              <a:rPr lang="en-US" sz="900" b="1" dirty="0">
+                <a:solidFill>
+                  <a:srgbClr val="9D174D"/>
                 </a:solidFill>
                 <a:latin typeface="Trebuchet MS" pitchFamily="34" charset="0"/>
                 <a:ea typeface="Trebuchet MS" pitchFamily="34" charset="-122"/>
                 <a:cs typeface="Trebuchet MS" pitchFamily="34" charset="-120"/>
               </a:rPr>
-              <a:t>Syllables</a:t>
-            </a:r>
-            <a:endParaRPr lang="en-US" sz="1100" dirty="0"/>
-          </a:p>
-        </p:txBody>
-      </p:sp>
-      <p:sp>
-        <p:nvSpPr>
-          <p:cNvPr id="27" name="Shape 25"/>
-          <p:cNvSpPr/>
-          <p:nvPr/>
-        </p:nvSpPr>
-        <p:spPr>
-          <a:xfrm>
-            <a:off x="1874520" y="3273552"/>
-            <a:ext cx="6903720" cy="658368"/>
+              <a:t>i</a:t>
+            </a:r>
+            <a:endParaRPr lang="en-US" sz="900" dirty="0"/>
+          </a:p>
+        </p:txBody>
+      </p:sp>
+      <p:sp>
+        <p:nvSpPr>
+          <p:cNvPr id="49" name="Shape 47"/>
+          <p:cNvSpPr/>
+          <p:nvPr/>
+        </p:nvSpPr>
+        <p:spPr>
+          <a:xfrm>
+            <a:off x="7576947" y="4169664"/>
+            <a:ext cx="685800" cy="384048"/>
           </a:xfrm>
           <a:prstGeom prst="rect">
             <a:avLst>
-              <a:gd name="adj" fmla="val 8333"/>
+              <a:gd name="adj" fmla="val 9524"/>
             </a:avLst>
           </a:prstGeom>
           <a:solidFill>
-            <a:srgbClr val="CCFBF1"/>
-          </a:solidFill>
-          <a:ln w="12700">
-            <a:solidFill>
-              <a:srgbClr val="0D9488"/>
-            </a:solidFill>
-            <a:prstDash val="solid"/>
-          </a:ln>
-        </p:spPr>
-      </p:sp>
-      <p:sp>
-        <p:nvSpPr>
-          <p:cNvPr id="28" name="Shape 26"/>
-          <p:cNvSpPr/>
-          <p:nvPr/>
-        </p:nvSpPr>
-        <p:spPr>
-          <a:xfrm>
-            <a:off x="1975104" y="3364992"/>
-            <a:ext cx="1554480" cy="475488"/>
-          </a:xfrm>
-          <a:prstGeom prst="rect">
-            <a:avLst>
-              <a:gd name="adj" fmla="val 9615"/>
-            </a:avLst>
-          </a:prstGeom>
-          <a:solidFill>
             <a:srgbClr val="FFFFFF"/>
           </a:solidFill>
           <a:ln w="12700">
             <a:solidFill>
-              <a:srgbClr val="0D9488"/>
-            </a:solidFill>
-            <a:prstDash val="solid"/>
-          </a:ln>
-        </p:spPr>
-      </p:sp>
-      <p:sp>
-        <p:nvSpPr>
-          <p:cNvPr id="29" name="Text 27"/>
-          <p:cNvSpPr/>
-          <p:nvPr/>
-        </p:nvSpPr>
-        <p:spPr>
-          <a:xfrm>
-            <a:off x="1975104" y="3364992"/>
-            <a:ext cx="1554480" cy="475488"/>
-          </a:xfrm>
-          <a:prstGeom prst="rect">
-            <a:avLst/>
-          </a:prstGeom>
-          <a:noFill/>
-          <a:ln/>
-        </p:spPr>
-        <p:txBody>
-          <a:bodyPr wrap="square" lIns="0" tIns="0" rIns="0" bIns="0" rtlCol="0" anchor="ctr"/>
-          <a:lstStyle/>
-          <a:p>
-            <a:pPr algn="ctr" indent="0" marL="0">
-              <a:buNone/>
-            </a:pPr>
-            <a:r>
-              <a:rPr lang="en-US" sz="1400" b="1" dirty="0">
-                <a:solidFill>
-                  <a:srgbClr val="0D9488"/>
+              <a:srgbClr val="DB2777"/>
+            </a:solidFill>
+            <a:prstDash val="solid"/>
+          </a:ln>
+        </p:spPr>
+      </p:sp>
+      <p:sp>
+        <p:nvSpPr>
+          <p:cNvPr id="50" name="Text 48"/>
+          <p:cNvSpPr/>
+          <p:nvPr/>
+        </p:nvSpPr>
+        <p:spPr>
+          <a:xfrm>
+            <a:off x="7576947" y="4169664"/>
+            <a:ext cx="685800" cy="384048"/>
+          </a:xfrm>
+          <a:prstGeom prst="rect">
+            <a:avLst/>
+          </a:prstGeom>
+          <a:noFill/>
+          <a:ln/>
+        </p:spPr>
+        <p:txBody>
+          <a:bodyPr wrap="square" lIns="0" tIns="0" rIns="0" bIns="0" rtlCol="0" anchor="ctr"/>
+          <a:lstStyle/>
+          <a:p>
+            <a:pPr algn="ctr" indent="0" marL="0">
+              <a:buNone/>
+            </a:pPr>
+            <a:r>
+              <a:rPr lang="en-US" sz="900" b="1" dirty="0">
+                <a:solidFill>
+                  <a:srgbClr val="9D174D"/>
                 </a:solidFill>
                 <a:latin typeface="Trebuchet MS" pitchFamily="34" charset="0"/>
                 <a:ea typeface="Trebuchet MS" pitchFamily="34" charset="-122"/>
                 <a:cs typeface="Trebuchet MS" pitchFamily="34" charset="-120"/>
               </a:rPr>
-              <a:t>re</a:t>
-            </a:r>
-            <a:endParaRPr lang="en-US" sz="1400" dirty="0"/>
-          </a:p>
-        </p:txBody>
-      </p:sp>
-      <p:sp>
-        <p:nvSpPr>
-          <p:cNvPr id="30" name="Text 28"/>
-          <p:cNvSpPr/>
-          <p:nvPr/>
-        </p:nvSpPr>
-        <p:spPr>
-          <a:xfrm>
-            <a:off x="3529584" y="3364992"/>
-            <a:ext cx="73152" cy="475488"/>
-          </a:xfrm>
-          <a:prstGeom prst="rect">
-            <a:avLst/>
-          </a:prstGeom>
-          <a:noFill/>
-          <a:ln/>
-        </p:spPr>
-        <p:txBody>
-          <a:bodyPr wrap="square" lIns="0" tIns="0" rIns="0" bIns="0" rtlCol="0" anchor="ctr"/>
-          <a:lstStyle/>
-          <a:p>
-            <a:pPr algn="ctr" indent="0" marL="0">
-              <a:buNone/>
-            </a:pPr>
-            <a:r>
-              <a:rPr lang="en-US" sz="1600" b="1" dirty="0">
-                <a:solidFill>
-                  <a:srgbClr val="0D9488"/>
-                </a:solidFill>
-                <a:latin typeface="Trebuchet MS" pitchFamily="34" charset="0"/>
-                <a:ea typeface="Trebuchet MS" pitchFamily="34" charset="-122"/>
-                <a:cs typeface="Trebuchet MS" pitchFamily="34" charset="-120"/>
-              </a:rPr>
-              <a:t>·</a:t>
-            </a:r>
-            <a:endParaRPr lang="en-US" sz="1600" dirty="0"/>
-          </a:p>
-        </p:txBody>
-      </p:sp>
-      <p:sp>
-        <p:nvSpPr>
-          <p:cNvPr id="31" name="Shape 29"/>
-          <p:cNvSpPr/>
-          <p:nvPr/>
-        </p:nvSpPr>
-        <p:spPr>
-          <a:xfrm>
-            <a:off x="3602736" y="3364992"/>
-            <a:ext cx="1554480" cy="475488"/>
-          </a:xfrm>
-          <a:prstGeom prst="rect">
-            <a:avLst>
-              <a:gd name="adj" fmla="val 9615"/>
-            </a:avLst>
-          </a:prstGeom>
-          <a:solidFill>
-            <a:srgbClr val="FFFFFF"/>
-          </a:solidFill>
-          <a:ln w="12700">
-            <a:solidFill>
-              <a:srgbClr val="0D9488"/>
-            </a:solidFill>
-            <a:prstDash val="solid"/>
-          </a:ln>
-        </p:spPr>
-      </p:sp>
-      <p:sp>
-        <p:nvSpPr>
-          <p:cNvPr id="32" name="Text 30"/>
-          <p:cNvSpPr/>
-          <p:nvPr/>
-        </p:nvSpPr>
-        <p:spPr>
-          <a:xfrm>
-            <a:off x="3602736" y="3364992"/>
-            <a:ext cx="1554480" cy="475488"/>
-          </a:xfrm>
-          <a:prstGeom prst="rect">
-            <a:avLst/>
-          </a:prstGeom>
-          <a:noFill/>
-          <a:ln/>
-        </p:spPr>
-        <p:txBody>
-          <a:bodyPr wrap="square" lIns="0" tIns="0" rIns="0" bIns="0" rtlCol="0" anchor="ctr"/>
-          <a:lstStyle/>
-          <a:p>
-            <a:pPr algn="ctr" indent="0" marL="0">
-              <a:buNone/>
-            </a:pPr>
-            <a:r>
-              <a:rPr lang="en-US" sz="1400" b="1" dirty="0">
-                <a:solidFill>
-                  <a:srgbClr val="0D9488"/>
-                </a:solidFill>
-                <a:latin typeface="Trebuchet MS" pitchFamily="34" charset="0"/>
-                <a:ea typeface="Trebuchet MS" pitchFamily="34" charset="-122"/>
-                <a:cs typeface="Trebuchet MS" pitchFamily="34" charset="-120"/>
-              </a:rPr>
-              <a:t>vis</a:t>
-            </a:r>
-            <a:endParaRPr lang="en-US" sz="1400" dirty="0"/>
-          </a:p>
-        </p:txBody>
-      </p:sp>
-      <p:sp>
-        <p:nvSpPr>
-          <p:cNvPr id="33" name="Text 31"/>
-          <p:cNvSpPr/>
-          <p:nvPr/>
-        </p:nvSpPr>
-        <p:spPr>
-          <a:xfrm>
-            <a:off x="5157216" y="3364992"/>
-            <a:ext cx="73152" cy="475488"/>
-          </a:xfrm>
-          <a:prstGeom prst="rect">
-            <a:avLst/>
-          </a:prstGeom>
-          <a:noFill/>
-          <a:ln/>
-        </p:spPr>
-        <p:txBody>
-          <a:bodyPr wrap="square" lIns="0" tIns="0" rIns="0" bIns="0" rtlCol="0" anchor="ctr"/>
-          <a:lstStyle/>
-          <a:p>
-            <a:pPr algn="ctr" indent="0" marL="0">
-              <a:buNone/>
-            </a:pPr>
-            <a:r>
-              <a:rPr lang="en-US" sz="1600" b="1" dirty="0">
-                <a:solidFill>
-                  <a:srgbClr val="0D9488"/>
-                </a:solidFill>
-                <a:latin typeface="Trebuchet MS" pitchFamily="34" charset="0"/>
-                <a:ea typeface="Trebuchet MS" pitchFamily="34" charset="-122"/>
-                <a:cs typeface="Trebuchet MS" pitchFamily="34" charset="-120"/>
-              </a:rPr>
-              <a:t>·</a:t>
-            </a:r>
-            <a:endParaRPr lang="en-US" sz="1600" dirty="0"/>
-          </a:p>
-        </p:txBody>
-      </p:sp>
-      <p:sp>
-        <p:nvSpPr>
-          <p:cNvPr id="34" name="Shape 32"/>
-          <p:cNvSpPr/>
-          <p:nvPr/>
-        </p:nvSpPr>
-        <p:spPr>
-          <a:xfrm>
-            <a:off x="5230368" y="3364992"/>
-            <a:ext cx="1554480" cy="475488"/>
-          </a:xfrm>
-          <a:prstGeom prst="rect">
-            <a:avLst>
-              <a:gd name="adj" fmla="val 9615"/>
-            </a:avLst>
-          </a:prstGeom>
-          <a:solidFill>
-            <a:srgbClr val="FFFFFF"/>
-          </a:solidFill>
-          <a:ln w="12700">
-            <a:solidFill>
-              <a:srgbClr val="0D9488"/>
-            </a:solidFill>
-            <a:prstDash val="solid"/>
-          </a:ln>
-        </p:spPr>
-      </p:sp>
-      <p:sp>
-        <p:nvSpPr>
-          <p:cNvPr id="35" name="Text 33"/>
-          <p:cNvSpPr/>
-          <p:nvPr/>
-        </p:nvSpPr>
-        <p:spPr>
-          <a:xfrm>
-            <a:off x="5230368" y="3364992"/>
-            <a:ext cx="1554480" cy="475488"/>
-          </a:xfrm>
-          <a:prstGeom prst="rect">
-            <a:avLst/>
-          </a:prstGeom>
-          <a:noFill/>
-          <a:ln/>
-        </p:spPr>
-        <p:txBody>
-          <a:bodyPr wrap="square" lIns="0" tIns="0" rIns="0" bIns="0" rtlCol="0" anchor="ctr"/>
-          <a:lstStyle/>
-          <a:p>
-            <a:pPr algn="ctr" indent="0" marL="0">
-              <a:buNone/>
-            </a:pPr>
-            <a:r>
-              <a:rPr lang="en-US" sz="1400" b="1" dirty="0">
-                <a:solidFill>
-                  <a:srgbClr val="0D9488"/>
-                </a:solidFill>
-                <a:latin typeface="Trebuchet MS" pitchFamily="34" charset="0"/>
-                <a:ea typeface="Trebuchet MS" pitchFamily="34" charset="-122"/>
-                <a:cs typeface="Trebuchet MS" pitchFamily="34" charset="-120"/>
-              </a:rPr>
-              <a:t>it</a:t>
-            </a:r>
-            <a:endParaRPr lang="en-US" sz="1400" dirty="0"/>
-          </a:p>
-        </p:txBody>
-      </p:sp>
-      <p:sp>
-        <p:nvSpPr>
-          <p:cNvPr id="36" name="Text 34"/>
-          <p:cNvSpPr/>
-          <p:nvPr/>
-        </p:nvSpPr>
-        <p:spPr>
-          <a:xfrm>
-            <a:off x="6784848" y="3364992"/>
-            <a:ext cx="73152" cy="475488"/>
-          </a:xfrm>
-          <a:prstGeom prst="rect">
-            <a:avLst/>
-          </a:prstGeom>
-          <a:noFill/>
-          <a:ln/>
-        </p:spPr>
-        <p:txBody>
-          <a:bodyPr wrap="square" lIns="0" tIns="0" rIns="0" bIns="0" rtlCol="0" anchor="ctr"/>
-          <a:lstStyle/>
-          <a:p>
-            <a:pPr algn="ctr" indent="0" marL="0">
-              <a:buNone/>
-            </a:pPr>
-            <a:r>
-              <a:rPr lang="en-US" sz="1600" b="1" dirty="0">
-                <a:solidFill>
-                  <a:srgbClr val="0D9488"/>
-                </a:solidFill>
-                <a:latin typeface="Trebuchet MS" pitchFamily="34" charset="0"/>
-                <a:ea typeface="Trebuchet MS" pitchFamily="34" charset="-122"/>
-                <a:cs typeface="Trebuchet MS" pitchFamily="34" charset="-120"/>
-              </a:rPr>
-              <a:t>·</a:t>
-            </a:r>
-            <a:endParaRPr lang="en-US" sz="1600" dirty="0"/>
-          </a:p>
-        </p:txBody>
-      </p:sp>
-      <p:sp>
-        <p:nvSpPr>
-          <p:cNvPr id="37" name="Shape 35"/>
-          <p:cNvSpPr/>
-          <p:nvPr/>
-        </p:nvSpPr>
-        <p:spPr>
-          <a:xfrm>
-            <a:off x="6858000" y="3364992"/>
-            <a:ext cx="1554480" cy="475488"/>
-          </a:xfrm>
-          <a:prstGeom prst="rect">
-            <a:avLst>
-              <a:gd name="adj" fmla="val 9615"/>
-            </a:avLst>
-          </a:prstGeom>
-          <a:solidFill>
-            <a:srgbClr val="FFFFFF"/>
-          </a:solidFill>
-          <a:ln w="12700">
-            <a:solidFill>
-              <a:srgbClr val="0D9488"/>
-            </a:solidFill>
-            <a:prstDash val="solid"/>
-          </a:ln>
-        </p:spPr>
-      </p:sp>
-      <p:sp>
-        <p:nvSpPr>
-          <p:cNvPr id="38" name="Text 36"/>
-          <p:cNvSpPr/>
-          <p:nvPr/>
-        </p:nvSpPr>
-        <p:spPr>
-          <a:xfrm>
-            <a:off x="6858000" y="3364992"/>
-            <a:ext cx="1554480" cy="475488"/>
-          </a:xfrm>
-          <a:prstGeom prst="rect">
-            <a:avLst/>
-          </a:prstGeom>
-          <a:noFill/>
-          <a:ln/>
-        </p:spPr>
-        <p:txBody>
-          <a:bodyPr wrap="square" lIns="0" tIns="0" rIns="0" bIns="0" rtlCol="0" anchor="ctr"/>
-          <a:lstStyle/>
-          <a:p>
-            <a:pPr algn="ctr" indent="0" marL="0">
-              <a:buNone/>
-            </a:pPr>
-            <a:r>
-              <a:rPr lang="en-US" sz="1400" b="1" dirty="0">
-                <a:solidFill>
-                  <a:srgbClr val="0D9488"/>
-                </a:solidFill>
-                <a:latin typeface="Trebuchet MS" pitchFamily="34" charset="0"/>
-                <a:ea typeface="Trebuchet MS" pitchFamily="34" charset="-122"/>
-                <a:cs typeface="Trebuchet MS" pitchFamily="34" charset="-120"/>
-              </a:rPr>
-              <a:t>ing</a:t>
-            </a:r>
-            <a:endParaRPr lang="en-US" sz="1400" dirty="0"/>
-          </a:p>
-        </p:txBody>
-      </p:sp>
-      <p:sp>
-        <p:nvSpPr>
-          <p:cNvPr id="39" name="Shape 37"/>
-          <p:cNvSpPr/>
-          <p:nvPr/>
-        </p:nvSpPr>
-        <p:spPr>
-          <a:xfrm>
-            <a:off x="365760" y="4096512"/>
-            <a:ext cx="1371600" cy="804672"/>
-          </a:xfrm>
-          <a:prstGeom prst="rect">
-            <a:avLst>
-              <a:gd name="adj" fmla="val 6818"/>
-            </a:avLst>
-          </a:prstGeom>
-          <a:solidFill>
-            <a:srgbClr val="E2E8F0"/>
-          </a:solidFill>
-          <a:ln w="12700">
-            <a:solidFill>
-              <a:srgbClr val="E2E8F0"/>
-            </a:solidFill>
-            <a:prstDash val="solid"/>
-          </a:ln>
-        </p:spPr>
-      </p:sp>
-      <p:sp>
-        <p:nvSpPr>
-          <p:cNvPr id="40" name="Text 38"/>
-          <p:cNvSpPr/>
-          <p:nvPr/>
-        </p:nvSpPr>
-        <p:spPr>
-          <a:xfrm>
-            <a:off x="365760" y="4096512"/>
-            <a:ext cx="1371600" cy="804672"/>
-          </a:xfrm>
-          <a:prstGeom prst="rect">
-            <a:avLst/>
-          </a:prstGeom>
-          <a:noFill/>
-          <a:ln/>
-        </p:spPr>
-        <p:txBody>
-          <a:bodyPr wrap="square" lIns="0" tIns="0" rIns="0" bIns="0" rtlCol="0" anchor="ctr"/>
-          <a:lstStyle/>
-          <a:p>
-            <a:pPr algn="ctr" indent="0" marL="0">
-              <a:buNone/>
-            </a:pPr>
-            <a:r>
-              <a:rPr lang="en-US" sz="1100" b="1" dirty="0">
-                <a:solidFill>
-                  <a:srgbClr val="475569"/>
-                </a:solidFill>
-                <a:latin typeface="Trebuchet MS" pitchFamily="34" charset="0"/>
-                <a:ea typeface="Trebuchet MS" pitchFamily="34" charset="-122"/>
-                <a:cs typeface="Trebuchet MS" pitchFamily="34" charset="-120"/>
-              </a:rPr>
-              <a:t>Phonemes</a:t>
-            </a:r>
-            <a:endParaRPr lang="en-US" sz="1100" dirty="0"/>
-          </a:p>
-        </p:txBody>
-      </p:sp>
-      <p:sp>
-        <p:nvSpPr>
-          <p:cNvPr id="41" name="Shape 39"/>
-          <p:cNvSpPr/>
-          <p:nvPr/>
-        </p:nvSpPr>
-        <p:spPr>
-          <a:xfrm>
-            <a:off x="1874520" y="4096512"/>
-            <a:ext cx="6903720" cy="804672"/>
-          </a:xfrm>
-          <a:prstGeom prst="rect">
-            <a:avLst>
-              <a:gd name="adj" fmla="val 6818"/>
-            </a:avLst>
-          </a:prstGeom>
-          <a:solidFill>
-            <a:srgbClr val="FCE7F3"/>
-          </a:solidFill>
-          <a:ln w="12700">
-            <a:solidFill>
-              <a:srgbClr val="DB2777"/>
-            </a:solidFill>
-            <a:prstDash val="solid"/>
-          </a:ln>
-        </p:spPr>
-      </p:sp>
-      <p:sp>
-        <p:nvSpPr>
-          <p:cNvPr id="42" name="Shape 40"/>
-          <p:cNvSpPr/>
-          <p:nvPr/>
-        </p:nvSpPr>
-        <p:spPr>
-          <a:xfrm>
-            <a:off x="2023872" y="4169664"/>
-            <a:ext cx="685800" cy="384048"/>
-          </a:xfrm>
-          <a:prstGeom prst="rect">
-            <a:avLst>
-              <a:gd name="adj" fmla="val 9524"/>
-            </a:avLst>
-          </a:prstGeom>
-          <a:solidFill>
-            <a:srgbClr val="FFFFFF"/>
-          </a:solidFill>
-          <a:ln w="12700">
-            <a:solidFill>
-              <a:srgbClr val="DB2777"/>
-            </a:solidFill>
-            <a:prstDash val="solid"/>
-          </a:ln>
-        </p:spPr>
-      </p:sp>
-      <p:sp>
-        <p:nvSpPr>
-          <p:cNvPr id="43" name="Text 41"/>
-          <p:cNvSpPr/>
-          <p:nvPr/>
-        </p:nvSpPr>
-        <p:spPr>
-          <a:xfrm>
-            <a:off x="2023872" y="4169664"/>
-            <a:ext cx="685800" cy="384048"/>
-          </a:xfrm>
-          <a:prstGeom prst="rect">
-            <a:avLst/>
-          </a:prstGeom>
-          <a:noFill/>
-          <a:ln/>
-        </p:spPr>
-        <p:txBody>
-          <a:bodyPr wrap="square" lIns="0" tIns="0" rIns="0" bIns="0" rtlCol="0" anchor="ctr"/>
-          <a:lstStyle/>
-          <a:p>
-            <a:pPr algn="ctr" indent="0" marL="0">
-              <a:buNone/>
-            </a:pPr>
-            <a:r>
-              <a:rPr lang="en-US" sz="900" b="1" dirty="0">
-                <a:solidFill>
-                  <a:srgbClr val="9D174D"/>
-                </a:solidFill>
-                <a:latin typeface="Trebuchet MS" pitchFamily="34" charset="0"/>
-                <a:ea typeface="Trebuchet MS" pitchFamily="34" charset="-122"/>
-                <a:cs typeface="Trebuchet MS" pitchFamily="34" charset="-120"/>
-              </a:rPr>
-              <a:t>r</a:t>
-            </a:r>
-            <a:endParaRPr lang="en-US" sz="900" dirty="0"/>
-          </a:p>
-        </p:txBody>
-      </p:sp>
-      <p:sp>
-        <p:nvSpPr>
-          <p:cNvPr id="44" name="Shape 42"/>
-          <p:cNvSpPr/>
-          <p:nvPr/>
-        </p:nvSpPr>
-        <p:spPr>
-          <a:xfrm>
-            <a:off x="2831592" y="4169664"/>
-            <a:ext cx="685800" cy="384048"/>
-          </a:xfrm>
-          <a:prstGeom prst="rect">
-            <a:avLst>
-              <a:gd name="adj" fmla="val 9524"/>
-            </a:avLst>
-          </a:prstGeom>
-          <a:solidFill>
-            <a:srgbClr val="FFFFFF"/>
-          </a:solidFill>
-          <a:ln w="12700">
-            <a:solidFill>
-              <a:srgbClr val="DB2777"/>
-            </a:solidFill>
-            <a:prstDash val="solid"/>
-          </a:ln>
-        </p:spPr>
-      </p:sp>
-      <p:sp>
-        <p:nvSpPr>
-          <p:cNvPr id="45" name="Text 43"/>
-          <p:cNvSpPr/>
-          <p:nvPr/>
-        </p:nvSpPr>
-        <p:spPr>
-          <a:xfrm>
-            <a:off x="2831592" y="4169664"/>
-            <a:ext cx="685800" cy="384048"/>
-          </a:xfrm>
-          <a:prstGeom prst="rect">
-            <a:avLst/>
-          </a:prstGeom>
-          <a:noFill/>
-          <a:ln/>
-        </p:spPr>
-        <p:txBody>
-          <a:bodyPr wrap="square" lIns="0" tIns="0" rIns="0" bIns="0" rtlCol="0" anchor="ctr"/>
-          <a:lstStyle/>
-          <a:p>
-            <a:pPr algn="ctr" indent="0" marL="0">
-              <a:buNone/>
-            </a:pPr>
-            <a:r>
-              <a:rPr lang="en-US" sz="900" b="1" dirty="0">
-                <a:solidFill>
-                  <a:srgbClr val="9D174D"/>
-                </a:solidFill>
-                <a:latin typeface="Trebuchet MS" pitchFamily="34" charset="0"/>
-                <a:ea typeface="Trebuchet MS" pitchFamily="34" charset="-122"/>
-                <a:cs typeface="Trebuchet MS" pitchFamily="34" charset="-120"/>
-              </a:rPr>
-              <a:t>e</a:t>
-            </a:r>
-            <a:endParaRPr lang="en-US" sz="900" dirty="0"/>
-          </a:p>
-        </p:txBody>
-      </p:sp>
-      <p:sp>
-        <p:nvSpPr>
-          <p:cNvPr id="46" name="Shape 44"/>
-          <p:cNvSpPr/>
-          <p:nvPr/>
-        </p:nvSpPr>
-        <p:spPr>
-          <a:xfrm>
-            <a:off x="3639312" y="4169664"/>
-            <a:ext cx="685800" cy="384048"/>
-          </a:xfrm>
-          <a:prstGeom prst="rect">
-            <a:avLst>
-              <a:gd name="adj" fmla="val 9524"/>
-            </a:avLst>
-          </a:prstGeom>
-          <a:solidFill>
-            <a:srgbClr val="FFFFFF"/>
-          </a:solidFill>
-          <a:ln w="12700">
-            <a:solidFill>
-              <a:srgbClr val="DB2777"/>
-            </a:solidFill>
-            <a:prstDash val="solid"/>
-          </a:ln>
-        </p:spPr>
-      </p:sp>
-      <p:sp>
-        <p:nvSpPr>
-          <p:cNvPr id="47" name="Text 45"/>
-          <p:cNvSpPr/>
-          <p:nvPr/>
-        </p:nvSpPr>
-        <p:spPr>
-          <a:xfrm>
-            <a:off x="3639312" y="4169664"/>
-            <a:ext cx="685800" cy="384048"/>
-          </a:xfrm>
-          <a:prstGeom prst="rect">
-            <a:avLst/>
-          </a:prstGeom>
-          <a:noFill/>
-          <a:ln/>
-        </p:spPr>
-        <p:txBody>
-          <a:bodyPr wrap="square" lIns="0" tIns="0" rIns="0" bIns="0" rtlCol="0" anchor="ctr"/>
-          <a:lstStyle/>
-          <a:p>
-            <a:pPr algn="ctr" indent="0" marL="0">
-              <a:buNone/>
-            </a:pPr>
-            <a:r>
-              <a:rPr lang="en-US" sz="900" b="1" dirty="0">
-                <a:solidFill>
-                  <a:srgbClr val="9D174D"/>
-                </a:solidFill>
-                <a:latin typeface="Trebuchet MS" pitchFamily="34" charset="0"/>
-                <a:ea typeface="Trebuchet MS" pitchFamily="34" charset="-122"/>
-                <a:cs typeface="Trebuchet MS" pitchFamily="34" charset="-120"/>
-              </a:rPr>
-              <a:t>v</a:t>
-            </a:r>
-            <a:endParaRPr lang="en-US" sz="900" dirty="0"/>
-          </a:p>
-        </p:txBody>
-      </p:sp>
-      <p:sp>
-        <p:nvSpPr>
-          <p:cNvPr id="48" name="Shape 46"/>
-          <p:cNvSpPr/>
-          <p:nvPr/>
-        </p:nvSpPr>
-        <p:spPr>
-          <a:xfrm>
-            <a:off x="4447032" y="4169664"/>
-            <a:ext cx="685800" cy="384048"/>
-          </a:xfrm>
-          <a:prstGeom prst="rect">
-            <a:avLst>
-              <a:gd name="adj" fmla="val 9524"/>
-            </a:avLst>
-          </a:prstGeom>
-          <a:solidFill>
-            <a:srgbClr val="FFFFFF"/>
-          </a:solidFill>
-          <a:ln w="12700">
-            <a:solidFill>
-              <a:srgbClr val="DB2777"/>
-            </a:solidFill>
-            <a:prstDash val="solid"/>
-          </a:ln>
-        </p:spPr>
-      </p:sp>
-      <p:sp>
-        <p:nvSpPr>
-          <p:cNvPr id="49" name="Text 47"/>
-          <p:cNvSpPr/>
-          <p:nvPr/>
-        </p:nvSpPr>
-        <p:spPr>
-          <a:xfrm>
-            <a:off x="4447032" y="4169664"/>
-            <a:ext cx="685800" cy="384048"/>
-          </a:xfrm>
-          <a:prstGeom prst="rect">
-            <a:avLst/>
-          </a:prstGeom>
-          <a:noFill/>
-          <a:ln/>
-        </p:spPr>
-        <p:txBody>
-          <a:bodyPr wrap="square" lIns="0" tIns="0" rIns="0" bIns="0" rtlCol="0" anchor="ctr"/>
-          <a:lstStyle/>
-          <a:p>
-            <a:pPr algn="ctr" indent="0" marL="0">
-              <a:buNone/>
-            </a:pPr>
-            <a:r>
-              <a:rPr lang="en-US" sz="900" b="1" dirty="0">
-                <a:solidFill>
-                  <a:srgbClr val="9D174D"/>
-                </a:solidFill>
-                <a:latin typeface="Trebuchet MS" pitchFamily="34" charset="0"/>
-                <a:ea typeface="Trebuchet MS" pitchFamily="34" charset="-122"/>
-                <a:cs typeface="Trebuchet MS" pitchFamily="34" charset="-120"/>
-              </a:rPr>
-              <a:t>i</a:t>
-            </a:r>
-            <a:endParaRPr lang="en-US" sz="900" dirty="0"/>
-          </a:p>
-        </p:txBody>
-      </p:sp>
-      <p:sp>
-        <p:nvSpPr>
-          <p:cNvPr id="50" name="Shape 48"/>
-          <p:cNvSpPr/>
-          <p:nvPr/>
-        </p:nvSpPr>
-        <p:spPr>
-          <a:xfrm>
-            <a:off x="5254752" y="4169664"/>
-            <a:ext cx="685800" cy="384048"/>
-          </a:xfrm>
-          <a:prstGeom prst="rect">
-            <a:avLst>
-              <a:gd name="adj" fmla="val 9524"/>
-            </a:avLst>
-          </a:prstGeom>
-          <a:solidFill>
-            <a:srgbClr val="FFFFFF"/>
-          </a:solidFill>
-          <a:ln w="12700">
-            <a:solidFill>
-              <a:srgbClr val="DB2777"/>
-            </a:solidFill>
-            <a:prstDash val="solid"/>
-          </a:ln>
-        </p:spPr>
-      </p:sp>
-      <p:sp>
-        <p:nvSpPr>
-          <p:cNvPr id="51" name="Text 49"/>
-          <p:cNvSpPr/>
-          <p:nvPr/>
-        </p:nvSpPr>
-        <p:spPr>
-          <a:xfrm>
-            <a:off x="5254752" y="4169664"/>
-            <a:ext cx="685800" cy="384048"/>
-          </a:xfrm>
-          <a:prstGeom prst="rect">
-            <a:avLst/>
-          </a:prstGeom>
-          <a:noFill/>
-          <a:ln/>
-        </p:spPr>
-        <p:txBody>
-          <a:bodyPr wrap="square" lIns="0" tIns="0" rIns="0" bIns="0" rtlCol="0" anchor="ctr"/>
-          <a:lstStyle/>
-          <a:p>
-            <a:pPr algn="ctr" indent="0" marL="0">
-              <a:buNone/>
-            </a:pPr>
-            <a:r>
-              <a:rPr lang="en-US" sz="900" b="1" dirty="0">
-                <a:solidFill>
-                  <a:srgbClr val="9D174D"/>
-                </a:solidFill>
-                <a:latin typeface="Trebuchet MS" pitchFamily="34" charset="0"/>
-                <a:ea typeface="Trebuchet MS" pitchFamily="34" charset="-122"/>
-                <a:cs typeface="Trebuchet MS" pitchFamily="34" charset="-120"/>
-              </a:rPr>
-              <a:t>s</a:t>
-            </a:r>
-            <a:endParaRPr lang="en-US" sz="900" dirty="0"/>
-          </a:p>
-        </p:txBody>
-      </p:sp>
-      <p:sp>
-        <p:nvSpPr>
-          <p:cNvPr id="52" name="Text 50"/>
-          <p:cNvSpPr/>
-          <p:nvPr/>
-        </p:nvSpPr>
-        <p:spPr>
-          <a:xfrm>
-            <a:off x="5254752" y="4572000"/>
-            <a:ext cx="685800" cy="219456"/>
-          </a:xfrm>
-          <a:prstGeom prst="rect">
-            <a:avLst/>
-          </a:prstGeom>
-          <a:noFill/>
-          <a:ln/>
-        </p:spPr>
-        <p:txBody>
-          <a:bodyPr wrap="square" lIns="0" tIns="0" rIns="0" bIns="0" rtlCol="0" anchor="t"/>
-          <a:lstStyle/>
-          <a:p>
-            <a:pPr algn="ctr" indent="0" marL="0">
-              <a:buNone/>
-            </a:pPr>
-            <a:r>
-              <a:rPr lang="en-US" sz="750" i="1" dirty="0">
-                <a:solidFill>
-                  <a:srgbClr val="94A3B8"/>
-                </a:solidFill>
-                <a:latin typeface="Calibri" pitchFamily="34" charset="0"/>
-                <a:ea typeface="Calibri" pitchFamily="34" charset="-122"/>
-                <a:cs typeface="Calibri" pitchFamily="34" charset="-120"/>
-              </a:rPr>
-              <a:t>/z/</a:t>
-            </a:r>
-            <a:endParaRPr lang="en-US" sz="750" dirty="0"/>
-          </a:p>
-        </p:txBody>
-      </p:sp>
-      <p:sp>
-        <p:nvSpPr>
-          <p:cNvPr id="53" name="Shape 51"/>
-          <p:cNvSpPr/>
-          <p:nvPr/>
-        </p:nvSpPr>
-        <p:spPr>
-          <a:xfrm>
-            <a:off x="6062472" y="4169664"/>
-            <a:ext cx="685800" cy="384048"/>
-          </a:xfrm>
-          <a:prstGeom prst="rect">
-            <a:avLst>
-              <a:gd name="adj" fmla="val 9524"/>
-            </a:avLst>
-          </a:prstGeom>
-          <a:solidFill>
-            <a:srgbClr val="FFFFFF"/>
-          </a:solidFill>
-          <a:ln w="12700">
-            <a:solidFill>
-              <a:srgbClr val="DB2777"/>
-            </a:solidFill>
-            <a:prstDash val="solid"/>
-          </a:ln>
-        </p:spPr>
-      </p:sp>
-      <p:sp>
-        <p:nvSpPr>
-          <p:cNvPr id="54" name="Text 52"/>
-          <p:cNvSpPr/>
-          <p:nvPr/>
-        </p:nvSpPr>
-        <p:spPr>
-          <a:xfrm>
-            <a:off x="6062472" y="4169664"/>
-            <a:ext cx="685800" cy="384048"/>
-          </a:xfrm>
-          <a:prstGeom prst="rect">
-            <a:avLst/>
-          </a:prstGeom>
-          <a:noFill/>
-          <a:ln/>
-        </p:spPr>
-        <p:txBody>
-          <a:bodyPr wrap="square" lIns="0" tIns="0" rIns="0" bIns="0" rtlCol="0" anchor="ctr"/>
-          <a:lstStyle/>
-          <a:p>
-            <a:pPr algn="ctr" indent="0" marL="0">
-              <a:buNone/>
-            </a:pPr>
-            <a:r>
-              <a:rPr lang="en-US" sz="900" b="1" dirty="0">
-                <a:solidFill>
-                  <a:srgbClr val="9D174D"/>
-                </a:solidFill>
-                <a:latin typeface="Trebuchet MS" pitchFamily="34" charset="0"/>
-                <a:ea typeface="Trebuchet MS" pitchFamily="34" charset="-122"/>
-                <a:cs typeface="Trebuchet MS" pitchFamily="34" charset="-120"/>
-              </a:rPr>
-              <a:t>i</a:t>
-            </a:r>
-            <a:endParaRPr lang="en-US" sz="900" dirty="0"/>
-          </a:p>
-        </p:txBody>
-      </p:sp>
-      <p:sp>
-        <p:nvSpPr>
-          <p:cNvPr id="55" name="Shape 53"/>
-          <p:cNvSpPr/>
-          <p:nvPr/>
-        </p:nvSpPr>
-        <p:spPr>
-          <a:xfrm>
-            <a:off x="6870192" y="4169664"/>
-            <a:ext cx="685800" cy="384048"/>
-          </a:xfrm>
-          <a:prstGeom prst="rect">
-            <a:avLst>
-              <a:gd name="adj" fmla="val 9524"/>
-            </a:avLst>
-          </a:prstGeom>
-          <a:solidFill>
-            <a:srgbClr val="FFFFFF"/>
-          </a:solidFill>
-          <a:ln w="12700">
-            <a:solidFill>
-              <a:srgbClr val="DB2777"/>
-            </a:solidFill>
-            <a:prstDash val="solid"/>
-          </a:ln>
-        </p:spPr>
-      </p:sp>
-      <p:sp>
-        <p:nvSpPr>
-          <p:cNvPr id="56" name="Text 54"/>
-          <p:cNvSpPr/>
-          <p:nvPr/>
-        </p:nvSpPr>
-        <p:spPr>
-          <a:xfrm>
-            <a:off x="6870192" y="4169664"/>
-            <a:ext cx="685800" cy="384048"/>
-          </a:xfrm>
-          <a:prstGeom prst="rect">
-            <a:avLst/>
-          </a:prstGeom>
-          <a:noFill/>
-          <a:ln/>
-        </p:spPr>
-        <p:txBody>
-          <a:bodyPr wrap="square" lIns="0" tIns="0" rIns="0" bIns="0" rtlCol="0" anchor="ctr"/>
-          <a:lstStyle/>
-          <a:p>
-            <a:pPr algn="ctr" indent="0" marL="0">
-              <a:buNone/>
-            </a:pPr>
-            <a:r>
-              <a:rPr lang="en-US" sz="900" b="1" dirty="0">
-                <a:solidFill>
-                  <a:srgbClr val="9D174D"/>
-                </a:solidFill>
-                <a:latin typeface="Trebuchet MS" pitchFamily="34" charset="0"/>
-                <a:ea typeface="Trebuchet MS" pitchFamily="34" charset="-122"/>
-                <a:cs typeface="Trebuchet MS" pitchFamily="34" charset="-120"/>
-              </a:rPr>
               <a:t>t</a:t>
-            </a:r>
-            <a:endParaRPr lang="en-US" sz="900" dirty="0"/>
-          </a:p>
-        </p:txBody>
-      </p:sp>
-      <p:sp>
-        <p:nvSpPr>
-          <p:cNvPr id="57" name="Shape 55"/>
-          <p:cNvSpPr/>
-          <p:nvPr/>
-        </p:nvSpPr>
-        <p:spPr>
-          <a:xfrm>
-            <a:off x="7677912" y="4169664"/>
-            <a:ext cx="685800" cy="384048"/>
-          </a:xfrm>
-          <a:prstGeom prst="rect">
-            <a:avLst>
-              <a:gd name="adj" fmla="val 9524"/>
-            </a:avLst>
-          </a:prstGeom>
-          <a:solidFill>
-            <a:srgbClr val="FFFFFF"/>
-          </a:solidFill>
-          <a:ln w="12700">
-            <a:solidFill>
-              <a:srgbClr val="DB2777"/>
-            </a:solidFill>
-            <a:prstDash val="solid"/>
-          </a:ln>
-        </p:spPr>
-      </p:sp>
-      <p:sp>
-        <p:nvSpPr>
-          <p:cNvPr id="58" name="Text 56"/>
-          <p:cNvSpPr/>
-          <p:nvPr/>
-        </p:nvSpPr>
-        <p:spPr>
-          <a:xfrm>
-            <a:off x="7677912" y="4169664"/>
-            <a:ext cx="685800" cy="384048"/>
-          </a:xfrm>
-          <a:prstGeom prst="rect">
-            <a:avLst/>
-          </a:prstGeom>
-          <a:noFill/>
-          <a:ln/>
-        </p:spPr>
-        <p:txBody>
-          <a:bodyPr wrap="square" lIns="0" tIns="0" rIns="0" bIns="0" rtlCol="0" anchor="ctr"/>
-          <a:lstStyle/>
-          <a:p>
-            <a:pPr algn="ctr" indent="0" marL="0">
-              <a:buNone/>
-            </a:pPr>
-            <a:r>
-              <a:rPr lang="en-US" sz="900" b="1" dirty="0">
-                <a:solidFill>
-                  <a:srgbClr val="9D174D"/>
-                </a:solidFill>
-                <a:latin typeface="Trebuchet MS" pitchFamily="34" charset="0"/>
-                <a:ea typeface="Trebuchet MS" pitchFamily="34" charset="-122"/>
-                <a:cs typeface="Trebuchet MS" pitchFamily="34" charset="-120"/>
-              </a:rPr>
-              <a:t>ing</a:t>
             </a:r>
             <a:endParaRPr lang="en-US" sz="900" dirty="0"/>
           </a:p>
@@ -29396,7 +28829,7 @@
                 <a:ea typeface="Trebuchet MS" pitchFamily="34" charset="-122"/>
                 <a:cs typeface="Trebuchet MS" pitchFamily="34" charset="-120"/>
               </a:rPr>
-              <a:t>visitation</a:t>
+              <a:t>visited</a:t>
             </a:r>
             <a:endParaRPr lang="en-US" sz="2800" dirty="0"/>
           </a:p>
@@ -30223,7 +29656,7 @@
                 <a:ea typeface="Trebuchet MS" pitchFamily="34" charset="-122"/>
                 <a:cs typeface="Trebuchet MS" pitchFamily="34" charset="-120"/>
               </a:rPr>
-              <a:t>visitation</a:t>
+              <a:t>visited</a:t>
             </a:r>
             <a:endParaRPr lang="en-US" sz="2800" dirty="0"/>
           </a:p>
@@ -30474,7 +29907,7 @@
                 <a:ea typeface="Trebuchet MS" pitchFamily="34" charset="-122"/>
                 <a:cs typeface="Trebuchet MS" pitchFamily="34" charset="-120"/>
               </a:rPr>
-              <a:t>ation</a:t>
+              <a:t>ed</a:t>
             </a:r>
             <a:endParaRPr lang="en-US" sz="1300" dirty="0"/>
           </a:p>
@@ -30513,7 +29946,7 @@
                 <a:ea typeface="Calibri" pitchFamily="34" charset="-122"/>
                 <a:cs typeface="Calibri" pitchFamily="34" charset="-120"/>
               </a:rPr>
-              <a:t>the act or result of</a:t>
+              <a:t>happened in the past</a:t>
             </a:r>
             <a:endParaRPr lang="en-US" sz="850" dirty="0"/>
           </a:p>
@@ -31208,7 +30641,7 @@
                 <a:ea typeface="Trebuchet MS" pitchFamily="34" charset="-122"/>
                 <a:cs typeface="Trebuchet MS" pitchFamily="34" charset="-120"/>
               </a:rPr>
-              <a:t>visitation</a:t>
+              <a:t>visited</a:t>
             </a:r>
             <a:endParaRPr lang="en-US" sz="2800" dirty="0"/>
           </a:p>
@@ -31459,7 +30892,7 @@
                 <a:ea typeface="Trebuchet MS" pitchFamily="34" charset="-122"/>
                 <a:cs typeface="Trebuchet MS" pitchFamily="34" charset="-120"/>
               </a:rPr>
-              <a:t>ation</a:t>
+              <a:t>ed</a:t>
             </a:r>
             <a:endParaRPr lang="en-US" sz="1300" dirty="0"/>
           </a:p>
@@ -31498,7 +30931,7 @@
                 <a:ea typeface="Calibri" pitchFamily="34" charset="-122"/>
                 <a:cs typeface="Calibri" pitchFamily="34" charset="-120"/>
               </a:rPr>
-              <a:t>the act or result of</a:t>
+              <a:t>happened in the past</a:t>
             </a:r>
             <a:endParaRPr lang="en-US" sz="850" dirty="0"/>
           </a:p>
@@ -31605,8 +31038,8 @@
         </p:nvSpPr>
         <p:spPr>
           <a:xfrm>
-            <a:off x="1975104" y="3364992"/>
-            <a:ext cx="1554480" cy="475488"/>
+            <a:off x="2313432" y="3364992"/>
+            <a:ext cx="1645920" cy="475488"/>
           </a:xfrm>
           <a:prstGeom prst="rect">
             <a:avLst>
@@ -31632,8 +31065,8 @@
         </p:nvSpPr>
         <p:spPr>
           <a:xfrm>
-            <a:off x="1975104" y="3364992"/>
-            <a:ext cx="1554480" cy="475488"/>
+            <a:off x="2313432" y="3364992"/>
+            <a:ext cx="1645920" cy="475488"/>
           </a:xfrm>
           <a:prstGeom prst="rect">
             <a:avLst/>
@@ -31657,7 +31090,7 @@
                 <a:ea typeface="Trebuchet MS" pitchFamily="34" charset="-122"/>
                 <a:cs typeface="Trebuchet MS" pitchFamily="34" charset="-120"/>
               </a:rPr>
-              <a:t>vis</a:t>
+              <a:t>vi</a:t>
             </a:r>
             <a:endParaRPr lang="en-US" sz="1400" dirty="0"/>
           </a:p>
@@ -31671,8 +31104,8 @@
         </p:nvSpPr>
         <p:spPr>
           <a:xfrm>
-            <a:off x="3529584" y="3364992"/>
-            <a:ext cx="73152" cy="475488"/>
+            <a:off x="3959352" y="3364992"/>
+            <a:ext cx="411480" cy="475488"/>
           </a:xfrm>
           <a:prstGeom prst="rect">
             <a:avLst/>
@@ -31710,8 +31143,8 @@
         </p:nvSpPr>
         <p:spPr>
           <a:xfrm>
-            <a:off x="3602736" y="3364992"/>
-            <a:ext cx="1554480" cy="475488"/>
+            <a:off x="4370832" y="3364992"/>
+            <a:ext cx="1645920" cy="475488"/>
           </a:xfrm>
           <a:prstGeom prst="rect">
             <a:avLst>
@@ -31737,8 +31170,8 @@
         </p:nvSpPr>
         <p:spPr>
           <a:xfrm>
-            <a:off x="3602736" y="3364992"/>
-            <a:ext cx="1554480" cy="475488"/>
+            <a:off x="4370832" y="3364992"/>
+            <a:ext cx="1645920" cy="475488"/>
           </a:xfrm>
           <a:prstGeom prst="rect">
             <a:avLst/>
@@ -31762,7 +31195,7 @@
                 <a:ea typeface="Trebuchet MS" pitchFamily="34" charset="-122"/>
                 <a:cs typeface="Trebuchet MS" pitchFamily="34" charset="-120"/>
               </a:rPr>
-              <a:t>it</a:t>
+              <a:t>si</a:t>
             </a:r>
             <a:endParaRPr lang="en-US" sz="1400" dirty="0"/>
           </a:p>
@@ -31776,8 +31209,8 @@
         </p:nvSpPr>
         <p:spPr>
           <a:xfrm>
-            <a:off x="5157216" y="3364992"/>
-            <a:ext cx="73152" cy="475488"/>
+            <a:off x="6016752" y="3364992"/>
+            <a:ext cx="411480" cy="475488"/>
           </a:xfrm>
           <a:prstGeom prst="rect">
             <a:avLst/>
@@ -31815,8 +31248,8 @@
         </p:nvSpPr>
         <p:spPr>
           <a:xfrm>
-            <a:off x="5230368" y="3364992"/>
-            <a:ext cx="1554480" cy="475488"/>
+            <a:off x="6428232" y="3364992"/>
+            <a:ext cx="1645920" cy="475488"/>
           </a:xfrm>
           <a:prstGeom prst="rect">
             <a:avLst>
@@ -31842,8 +31275,8 @@
         </p:nvSpPr>
         <p:spPr>
           <a:xfrm>
-            <a:off x="5230368" y="3364992"/>
-            <a:ext cx="1554480" cy="475488"/>
+            <a:off x="6428232" y="3364992"/>
+            <a:ext cx="1645920" cy="475488"/>
           </a:xfrm>
           <a:prstGeom prst="rect">
             <a:avLst/>
@@ -31867,7 +31300,7 @@
                 <a:ea typeface="Trebuchet MS" pitchFamily="34" charset="-122"/>
                 <a:cs typeface="Trebuchet MS" pitchFamily="34" charset="-120"/>
               </a:rPr>
-              <a:t>a</a:t>
+              <a:t>ted</a:t>
             </a:r>
             <a:endParaRPr lang="en-US" sz="1400" dirty="0"/>
           </a:p>
@@ -31875,119 +31308,80 @@
       </p:sp>
       <p:sp>
         <p:nvSpPr>
-          <p:cNvPr id="33" name="Text 31"/>
-          <p:cNvSpPr/>
-          <p:nvPr/>
-        </p:nvSpPr>
-        <p:spPr>
-          <a:xfrm>
-            <a:off x="6784848" y="3364992"/>
-            <a:ext cx="73152" cy="475488"/>
-          </a:xfrm>
-          <a:prstGeom prst="rect">
-            <a:avLst/>
-          </a:prstGeom>
-          <a:noFill/>
-          <a:ln/>
-        </p:spPr>
-        <p:txBody>
-          <a:bodyPr wrap="square" lIns="0" tIns="0" rIns="0" bIns="0" rtlCol="0" anchor="ctr"/>
-          <a:lstStyle/>
-          <a:p>
-            <a:pPr algn="ctr" indent="0" marL="0">
-              <a:buNone/>
-            </a:pPr>
-            <a:r>
-              <a:rPr lang="en-US" sz="1600" b="1" dirty="0">
-                <a:solidFill>
-                  <a:srgbClr val="0D9488"/>
+          <p:cNvPr id="33" name="Shape 31"/>
+          <p:cNvSpPr/>
+          <p:nvPr/>
+        </p:nvSpPr>
+        <p:spPr>
+          <a:xfrm>
+            <a:off x="365760" y="4096512"/>
+            <a:ext cx="1371600" cy="804672"/>
+          </a:xfrm>
+          <a:prstGeom prst="rect">
+            <a:avLst>
+              <a:gd name="adj" fmla="val 6818"/>
+            </a:avLst>
+          </a:prstGeom>
+          <a:solidFill>
+            <a:srgbClr val="E2E8F0"/>
+          </a:solidFill>
+          <a:ln w="12700">
+            <a:solidFill>
+              <a:srgbClr val="E2E8F0"/>
+            </a:solidFill>
+            <a:prstDash val="solid"/>
+          </a:ln>
+        </p:spPr>
+      </p:sp>
+      <p:sp>
+        <p:nvSpPr>
+          <p:cNvPr id="34" name="Text 32"/>
+          <p:cNvSpPr/>
+          <p:nvPr/>
+        </p:nvSpPr>
+        <p:spPr>
+          <a:xfrm>
+            <a:off x="365760" y="4096512"/>
+            <a:ext cx="1371600" cy="804672"/>
+          </a:xfrm>
+          <a:prstGeom prst="rect">
+            <a:avLst/>
+          </a:prstGeom>
+          <a:noFill/>
+          <a:ln/>
+        </p:spPr>
+        <p:txBody>
+          <a:bodyPr wrap="square" lIns="0" tIns="0" rIns="0" bIns="0" rtlCol="0" anchor="ctr"/>
+          <a:lstStyle/>
+          <a:p>
+            <a:pPr algn="ctr" indent="0" marL="0">
+              <a:buNone/>
+            </a:pPr>
+            <a:r>
+              <a:rPr lang="en-US" sz="1100" b="1" dirty="0">
+                <a:solidFill>
+                  <a:srgbClr val="475569"/>
                 </a:solidFill>
                 <a:latin typeface="Trebuchet MS" pitchFamily="34" charset="0"/>
                 <a:ea typeface="Trebuchet MS" pitchFamily="34" charset="-122"/>
                 <a:cs typeface="Trebuchet MS" pitchFamily="34" charset="-120"/>
               </a:rPr>
-              <a:t>·</a:t>
-            </a:r>
-            <a:endParaRPr lang="en-US" sz="1600" dirty="0"/>
-          </a:p>
-        </p:txBody>
-      </p:sp>
-      <p:sp>
-        <p:nvSpPr>
-          <p:cNvPr id="34" name="Shape 32"/>
-          <p:cNvSpPr/>
-          <p:nvPr/>
-        </p:nvSpPr>
-        <p:spPr>
-          <a:xfrm>
-            <a:off x="6858000" y="3364992"/>
-            <a:ext cx="1554480" cy="475488"/>
-          </a:xfrm>
-          <a:prstGeom prst="rect">
-            <a:avLst>
-              <a:gd name="adj" fmla="val 9615"/>
-            </a:avLst>
-          </a:prstGeom>
-          <a:solidFill>
-            <a:srgbClr val="FFFFFF"/>
-          </a:solidFill>
-          <a:ln w="12700">
-            <a:solidFill>
-              <a:srgbClr val="0D9488"/>
-            </a:solidFill>
-            <a:prstDash val="solid"/>
-          </a:ln>
-        </p:spPr>
-      </p:sp>
-      <p:sp>
-        <p:nvSpPr>
-          <p:cNvPr id="35" name="Text 33"/>
-          <p:cNvSpPr/>
-          <p:nvPr/>
-        </p:nvSpPr>
-        <p:spPr>
-          <a:xfrm>
-            <a:off x="6858000" y="3364992"/>
-            <a:ext cx="1554480" cy="475488"/>
-          </a:xfrm>
-          <a:prstGeom prst="rect">
-            <a:avLst/>
-          </a:prstGeom>
-          <a:noFill/>
-          <a:ln/>
-        </p:spPr>
-        <p:txBody>
-          <a:bodyPr wrap="square" lIns="0" tIns="0" rIns="0" bIns="0" rtlCol="0" anchor="ctr"/>
-          <a:lstStyle/>
-          <a:p>
-            <a:pPr algn="ctr" indent="0" marL="0">
-              <a:buNone/>
-            </a:pPr>
-            <a:r>
-              <a:rPr lang="en-US" sz="1400" b="1" dirty="0">
-                <a:solidFill>
-                  <a:srgbClr val="0D9488"/>
-                </a:solidFill>
-                <a:latin typeface="Trebuchet MS" pitchFamily="34" charset="0"/>
-                <a:ea typeface="Trebuchet MS" pitchFamily="34" charset="-122"/>
-                <a:cs typeface="Trebuchet MS" pitchFamily="34" charset="-120"/>
-              </a:rPr>
-              <a:t>tion</a:t>
-            </a:r>
-            <a:endParaRPr lang="en-US" sz="1400" dirty="0"/>
-          </a:p>
-        </p:txBody>
-      </p:sp>
-      <p:sp>
-        <p:nvSpPr>
-          <p:cNvPr id="36" name="Shape 34"/>
-          <p:cNvSpPr/>
-          <p:nvPr/>
-        </p:nvSpPr>
-        <p:spPr>
-          <a:xfrm>
-            <a:off x="365760" y="4096512"/>
-            <a:ext cx="1371600" cy="804672"/>
+              <a:t>Phonemes</a:t>
+            </a:r>
+            <a:endParaRPr lang="en-US" sz="1100" dirty="0"/>
+          </a:p>
+        </p:txBody>
+      </p:sp>
+      <p:sp>
+        <p:nvSpPr>
+          <p:cNvPr id="35" name="Shape 33"/>
+          <p:cNvSpPr/>
+          <p:nvPr/>
+        </p:nvSpPr>
+        <p:spPr>
+          <a:xfrm>
+            <a:off x="1874520" y="4096512"/>
+            <a:ext cx="6903720" cy="804672"/>
           </a:xfrm>
           <a:prstGeom prst="rect">
             <a:avLst>
@@ -31995,85 +31389,19 @@
             </a:avLst>
           </a:prstGeom>
           <a:solidFill>
-            <a:srgbClr val="E2E8F0"/>
+            <a:srgbClr val="F8FAFC"/>
           </a:solidFill>
           <a:ln w="12700">
             <a:solidFill>
               <a:srgbClr val="E2E8F0"/>
             </a:solidFill>
-            <a:prstDash val="solid"/>
-          </a:ln>
-        </p:spPr>
-      </p:sp>
-      <p:sp>
-        <p:nvSpPr>
-          <p:cNvPr id="37" name="Text 35"/>
-          <p:cNvSpPr/>
-          <p:nvPr/>
-        </p:nvSpPr>
-        <p:spPr>
-          <a:xfrm>
-            <a:off x="365760" y="4096512"/>
-            <a:ext cx="1371600" cy="804672"/>
-          </a:xfrm>
-          <a:prstGeom prst="rect">
-            <a:avLst/>
-          </a:prstGeom>
-          <a:noFill/>
-          <a:ln/>
-        </p:spPr>
-        <p:txBody>
-          <a:bodyPr wrap="square" lIns="0" tIns="0" rIns="0" bIns="0" rtlCol="0" anchor="ctr"/>
-          <a:lstStyle/>
-          <a:p>
-            <a:pPr algn="ctr" indent="0" marL="0">
-              <a:buNone/>
-            </a:pPr>
-            <a:r>
-              <a:rPr lang="en-US" sz="1100" b="1" dirty="0">
-                <a:solidFill>
-                  <a:srgbClr val="475569"/>
-                </a:solidFill>
-                <a:latin typeface="Trebuchet MS" pitchFamily="34" charset="0"/>
-                <a:ea typeface="Trebuchet MS" pitchFamily="34" charset="-122"/>
-                <a:cs typeface="Trebuchet MS" pitchFamily="34" charset="-120"/>
-              </a:rPr>
-              <a:t>Phonemes</a:t>
-            </a:r>
-            <a:endParaRPr lang="en-US" sz="1100" dirty="0"/>
-          </a:p>
-        </p:txBody>
-      </p:sp>
-      <p:sp>
-        <p:nvSpPr>
-          <p:cNvPr id="38" name="Shape 36"/>
-          <p:cNvSpPr/>
-          <p:nvPr/>
-        </p:nvSpPr>
-        <p:spPr>
-          <a:xfrm>
-            <a:off x="1874520" y="4096512"/>
-            <a:ext cx="6903720" cy="804672"/>
-          </a:xfrm>
-          <a:prstGeom prst="rect">
-            <a:avLst>
-              <a:gd name="adj" fmla="val 6818"/>
-            </a:avLst>
-          </a:prstGeom>
-          <a:solidFill>
-            <a:srgbClr val="F8FAFC"/>
-          </a:solidFill>
-          <a:ln w="12700">
-            <a:solidFill>
-              <a:srgbClr val="E2E8F0"/>
-            </a:solidFill>
             <a:prstDash val="dash"/>
           </a:ln>
         </p:spPr>
       </p:sp>
       <p:sp>
         <p:nvSpPr>
-          <p:cNvPr id="39" name="Text 37"/>
+          <p:cNvPr id="36" name="Text 34"/>
           <p:cNvSpPr/>
           <p:nvPr/>
         </p:nvSpPr>
@@ -32535,7 +31863,7 @@
                 <a:ea typeface="Trebuchet MS" pitchFamily="34" charset="-122"/>
                 <a:cs typeface="Trebuchet MS" pitchFamily="34" charset="-120"/>
               </a:rPr>
-              <a:t>visitation</a:t>
+              <a:t>visited</a:t>
             </a:r>
             <a:endParaRPr lang="en-US" sz="2800" dirty="0"/>
           </a:p>
@@ -32786,7 +32114,7 @@
                 <a:ea typeface="Trebuchet MS" pitchFamily="34" charset="-122"/>
                 <a:cs typeface="Trebuchet MS" pitchFamily="34" charset="-120"/>
               </a:rPr>
-              <a:t>ation</a:t>
+              <a:t>ed</a:t>
             </a:r>
             <a:endParaRPr lang="en-US" sz="1300" dirty="0"/>
           </a:p>
@@ -32825,7 +32153,7 @@
                 <a:ea typeface="Calibri" pitchFamily="34" charset="-122"/>
                 <a:cs typeface="Calibri" pitchFamily="34" charset="-120"/>
               </a:rPr>
-              <a:t>the act or result of</a:t>
+              <a:t>happened in the past</a:t>
             </a:r>
             <a:endParaRPr lang="en-US" sz="850" dirty="0"/>
           </a:p>
@@ -32932,8 +32260,8 @@
         </p:nvSpPr>
         <p:spPr>
           <a:xfrm>
-            <a:off x="1975104" y="3364992"/>
-            <a:ext cx="1554480" cy="475488"/>
+            <a:off x="2313432" y="3364992"/>
+            <a:ext cx="1645920" cy="475488"/>
           </a:xfrm>
           <a:prstGeom prst="rect">
             <a:avLst>
@@ -32959,8 +32287,8 @@
         </p:nvSpPr>
         <p:spPr>
           <a:xfrm>
-            <a:off x="1975104" y="3364992"/>
-            <a:ext cx="1554480" cy="475488"/>
+            <a:off x="2313432" y="3364992"/>
+            <a:ext cx="1645920" cy="475488"/>
           </a:xfrm>
           <a:prstGeom prst="rect">
             <a:avLst/>
@@ -32984,7 +32312,7 @@
                 <a:ea typeface="Trebuchet MS" pitchFamily="34" charset="-122"/>
                 <a:cs typeface="Trebuchet MS" pitchFamily="34" charset="-120"/>
               </a:rPr>
-              <a:t>vis</a:t>
+              <a:t>vi</a:t>
             </a:r>
             <a:endParaRPr lang="en-US" sz="1400" dirty="0"/>
           </a:p>
@@ -32998,8 +32326,8 @@
         </p:nvSpPr>
         <p:spPr>
           <a:xfrm>
-            <a:off x="3529584" y="3364992"/>
-            <a:ext cx="73152" cy="475488"/>
+            <a:off x="3959352" y="3364992"/>
+            <a:ext cx="411480" cy="475488"/>
           </a:xfrm>
           <a:prstGeom prst="rect">
             <a:avLst/>
@@ -33037,8 +32365,8 @@
         </p:nvSpPr>
         <p:spPr>
           <a:xfrm>
-            <a:off x="3602736" y="3364992"/>
-            <a:ext cx="1554480" cy="475488"/>
+            <a:off x="4370832" y="3364992"/>
+            <a:ext cx="1645920" cy="475488"/>
           </a:xfrm>
           <a:prstGeom prst="rect">
             <a:avLst>
@@ -33064,8 +32392,8 @@
         </p:nvSpPr>
         <p:spPr>
           <a:xfrm>
-            <a:off x="3602736" y="3364992"/>
-            <a:ext cx="1554480" cy="475488"/>
+            <a:off x="4370832" y="3364992"/>
+            <a:ext cx="1645920" cy="475488"/>
           </a:xfrm>
           <a:prstGeom prst="rect">
             <a:avLst/>
@@ -33089,7 +32417,7 @@
                 <a:ea typeface="Trebuchet MS" pitchFamily="34" charset="-122"/>
                 <a:cs typeface="Trebuchet MS" pitchFamily="34" charset="-120"/>
               </a:rPr>
-              <a:t>it</a:t>
+              <a:t>si</a:t>
             </a:r>
             <a:endParaRPr lang="en-US" sz="1400" dirty="0"/>
           </a:p>
@@ -33103,8 +32431,8 @@
         </p:nvSpPr>
         <p:spPr>
           <a:xfrm>
-            <a:off x="5157216" y="3364992"/>
-            <a:ext cx="73152" cy="475488"/>
+            <a:off x="6016752" y="3364992"/>
+            <a:ext cx="411480" cy="475488"/>
           </a:xfrm>
           <a:prstGeom prst="rect">
             <a:avLst/>
@@ -33142,8 +32470,8 @@
         </p:nvSpPr>
         <p:spPr>
           <a:xfrm>
-            <a:off x="5230368" y="3364992"/>
-            <a:ext cx="1554480" cy="475488"/>
+            <a:off x="6428232" y="3364992"/>
+            <a:ext cx="1645920" cy="475488"/>
           </a:xfrm>
           <a:prstGeom prst="rect">
             <a:avLst>
@@ -33169,8 +32497,8 @@
         </p:nvSpPr>
         <p:spPr>
           <a:xfrm>
-            <a:off x="5230368" y="3364992"/>
-            <a:ext cx="1554480" cy="475488"/>
+            <a:off x="6428232" y="3364992"/>
+            <a:ext cx="1645920" cy="475488"/>
           </a:xfrm>
           <a:prstGeom prst="rect">
             <a:avLst/>
@@ -33194,7 +32522,7 @@
                 <a:ea typeface="Trebuchet MS" pitchFamily="34" charset="-122"/>
                 <a:cs typeface="Trebuchet MS" pitchFamily="34" charset="-120"/>
               </a:rPr>
-              <a:t>a</a:t>
+              <a:t>ted</a:t>
             </a:r>
             <a:endParaRPr lang="en-US" sz="1400" dirty="0"/>
           </a:p>
@@ -33202,211 +32530,238 @@
       </p:sp>
       <p:sp>
         <p:nvSpPr>
-          <p:cNvPr id="33" name="Text 31"/>
-          <p:cNvSpPr/>
-          <p:nvPr/>
-        </p:nvSpPr>
-        <p:spPr>
-          <a:xfrm>
-            <a:off x="6784848" y="3364992"/>
-            <a:ext cx="73152" cy="475488"/>
-          </a:xfrm>
-          <a:prstGeom prst="rect">
-            <a:avLst/>
-          </a:prstGeom>
-          <a:noFill/>
-          <a:ln/>
-        </p:spPr>
-        <p:txBody>
-          <a:bodyPr wrap="square" lIns="0" tIns="0" rIns="0" bIns="0" rtlCol="0" anchor="ctr"/>
-          <a:lstStyle/>
-          <a:p>
-            <a:pPr algn="ctr" indent="0" marL="0">
-              <a:buNone/>
-            </a:pPr>
-            <a:r>
-              <a:rPr lang="en-US" sz="1600" b="1" dirty="0">
-                <a:solidFill>
-                  <a:srgbClr val="0D9488"/>
+          <p:cNvPr id="33" name="Shape 31"/>
+          <p:cNvSpPr/>
+          <p:nvPr/>
+        </p:nvSpPr>
+        <p:spPr>
+          <a:xfrm>
+            <a:off x="365760" y="4096512"/>
+            <a:ext cx="1371600" cy="804672"/>
+          </a:xfrm>
+          <a:prstGeom prst="rect">
+            <a:avLst>
+              <a:gd name="adj" fmla="val 6818"/>
+            </a:avLst>
+          </a:prstGeom>
+          <a:solidFill>
+            <a:srgbClr val="E2E8F0"/>
+          </a:solidFill>
+          <a:ln w="12700">
+            <a:solidFill>
+              <a:srgbClr val="E2E8F0"/>
+            </a:solidFill>
+            <a:prstDash val="solid"/>
+          </a:ln>
+        </p:spPr>
+      </p:sp>
+      <p:sp>
+        <p:nvSpPr>
+          <p:cNvPr id="34" name="Text 32"/>
+          <p:cNvSpPr/>
+          <p:nvPr/>
+        </p:nvSpPr>
+        <p:spPr>
+          <a:xfrm>
+            <a:off x="365760" y="4096512"/>
+            <a:ext cx="1371600" cy="804672"/>
+          </a:xfrm>
+          <a:prstGeom prst="rect">
+            <a:avLst/>
+          </a:prstGeom>
+          <a:noFill/>
+          <a:ln/>
+        </p:spPr>
+        <p:txBody>
+          <a:bodyPr wrap="square" lIns="0" tIns="0" rIns="0" bIns="0" rtlCol="0" anchor="ctr"/>
+          <a:lstStyle/>
+          <a:p>
+            <a:pPr algn="ctr" indent="0" marL="0">
+              <a:buNone/>
+            </a:pPr>
+            <a:r>
+              <a:rPr lang="en-US" sz="1100" b="1" dirty="0">
+                <a:solidFill>
+                  <a:srgbClr val="475569"/>
                 </a:solidFill>
                 <a:latin typeface="Trebuchet MS" pitchFamily="34" charset="0"/>
                 <a:ea typeface="Trebuchet MS" pitchFamily="34" charset="-122"/>
                 <a:cs typeface="Trebuchet MS" pitchFamily="34" charset="-120"/>
               </a:rPr>
-              <a:t>·</a:t>
-            </a:r>
-            <a:endParaRPr lang="en-US" sz="1600" dirty="0"/>
-          </a:p>
-        </p:txBody>
-      </p:sp>
-      <p:sp>
-        <p:nvSpPr>
-          <p:cNvPr id="34" name="Shape 32"/>
-          <p:cNvSpPr/>
-          <p:nvPr/>
-        </p:nvSpPr>
-        <p:spPr>
-          <a:xfrm>
-            <a:off x="6858000" y="3364992"/>
-            <a:ext cx="1554480" cy="475488"/>
+              <a:t>Phonemes</a:t>
+            </a:r>
+            <a:endParaRPr lang="en-US" sz="1100" dirty="0"/>
+          </a:p>
+        </p:txBody>
+      </p:sp>
+      <p:sp>
+        <p:nvSpPr>
+          <p:cNvPr id="35" name="Shape 33"/>
+          <p:cNvSpPr/>
+          <p:nvPr/>
+        </p:nvSpPr>
+        <p:spPr>
+          <a:xfrm>
+            <a:off x="1874520" y="4096512"/>
+            <a:ext cx="6903720" cy="804672"/>
           </a:xfrm>
           <a:prstGeom prst="rect">
             <a:avLst>
-              <a:gd name="adj" fmla="val 9615"/>
+              <a:gd name="adj" fmla="val 6818"/>
             </a:avLst>
           </a:prstGeom>
           <a:solidFill>
+            <a:srgbClr val="FCE7F3"/>
+          </a:solidFill>
+          <a:ln w="12700">
+            <a:solidFill>
+              <a:srgbClr val="DB2777"/>
+            </a:solidFill>
+            <a:prstDash val="solid"/>
+          </a:ln>
+        </p:spPr>
+      </p:sp>
+      <p:sp>
+        <p:nvSpPr>
+          <p:cNvPr id="36" name="Shape 34"/>
+          <p:cNvSpPr/>
+          <p:nvPr/>
+        </p:nvSpPr>
+        <p:spPr>
+          <a:xfrm>
+            <a:off x="2254649" y="4169664"/>
+            <a:ext cx="685800" cy="384048"/>
+          </a:xfrm>
+          <a:prstGeom prst="rect">
+            <a:avLst>
+              <a:gd name="adj" fmla="val 9524"/>
+            </a:avLst>
+          </a:prstGeom>
+          <a:solidFill>
             <a:srgbClr val="FFFFFF"/>
           </a:solidFill>
           <a:ln w="12700">
             <a:solidFill>
-              <a:srgbClr val="0D9488"/>
-            </a:solidFill>
-            <a:prstDash val="solid"/>
-          </a:ln>
-        </p:spPr>
-      </p:sp>
-      <p:sp>
-        <p:nvSpPr>
-          <p:cNvPr id="35" name="Text 33"/>
-          <p:cNvSpPr/>
-          <p:nvPr/>
-        </p:nvSpPr>
-        <p:spPr>
-          <a:xfrm>
-            <a:off x="6858000" y="3364992"/>
-            <a:ext cx="1554480" cy="475488"/>
-          </a:xfrm>
-          <a:prstGeom prst="rect">
-            <a:avLst/>
-          </a:prstGeom>
-          <a:noFill/>
-          <a:ln/>
-        </p:spPr>
-        <p:txBody>
-          <a:bodyPr wrap="square" lIns="0" tIns="0" rIns="0" bIns="0" rtlCol="0" anchor="ctr"/>
-          <a:lstStyle/>
-          <a:p>
-            <a:pPr algn="ctr" indent="0" marL="0">
-              <a:buNone/>
-            </a:pPr>
-            <a:r>
-              <a:rPr lang="en-US" sz="1400" b="1" dirty="0">
-                <a:solidFill>
-                  <a:srgbClr val="0D9488"/>
+              <a:srgbClr val="DB2777"/>
+            </a:solidFill>
+            <a:prstDash val="solid"/>
+          </a:ln>
+        </p:spPr>
+      </p:sp>
+      <p:sp>
+        <p:nvSpPr>
+          <p:cNvPr id="37" name="Text 35"/>
+          <p:cNvSpPr/>
+          <p:nvPr/>
+        </p:nvSpPr>
+        <p:spPr>
+          <a:xfrm>
+            <a:off x="2254649" y="4169664"/>
+            <a:ext cx="685800" cy="384048"/>
+          </a:xfrm>
+          <a:prstGeom prst="rect">
+            <a:avLst/>
+          </a:prstGeom>
+          <a:noFill/>
+          <a:ln/>
+        </p:spPr>
+        <p:txBody>
+          <a:bodyPr wrap="square" lIns="0" tIns="0" rIns="0" bIns="0" rtlCol="0" anchor="ctr"/>
+          <a:lstStyle/>
+          <a:p>
+            <a:pPr algn="ctr" indent="0" marL="0">
+              <a:buNone/>
+            </a:pPr>
+            <a:r>
+              <a:rPr lang="en-US" sz="900" b="1" dirty="0">
+                <a:solidFill>
+                  <a:srgbClr val="9D174D"/>
                 </a:solidFill>
                 <a:latin typeface="Trebuchet MS" pitchFamily="34" charset="0"/>
                 <a:ea typeface="Trebuchet MS" pitchFamily="34" charset="-122"/>
                 <a:cs typeface="Trebuchet MS" pitchFamily="34" charset="-120"/>
               </a:rPr>
-              <a:t>tion</a:t>
-            </a:r>
-            <a:endParaRPr lang="en-US" sz="1400" dirty="0"/>
-          </a:p>
-        </p:txBody>
-      </p:sp>
-      <p:sp>
-        <p:nvSpPr>
-          <p:cNvPr id="36" name="Shape 34"/>
-          <p:cNvSpPr/>
-          <p:nvPr/>
-        </p:nvSpPr>
-        <p:spPr>
-          <a:xfrm>
-            <a:off x="365760" y="4096512"/>
-            <a:ext cx="1371600" cy="804672"/>
+              <a:t>v</a:t>
+            </a:r>
+            <a:endParaRPr lang="en-US" sz="900" dirty="0"/>
+          </a:p>
+        </p:txBody>
+      </p:sp>
+      <p:sp>
+        <p:nvSpPr>
+          <p:cNvPr id="38" name="Shape 36"/>
+          <p:cNvSpPr/>
+          <p:nvPr/>
+        </p:nvSpPr>
+        <p:spPr>
+          <a:xfrm>
+            <a:off x="3293146" y="4169664"/>
+            <a:ext cx="685800" cy="384048"/>
           </a:xfrm>
           <a:prstGeom prst="rect">
             <a:avLst>
-              <a:gd name="adj" fmla="val 6818"/>
+              <a:gd name="adj" fmla="val 9524"/>
             </a:avLst>
           </a:prstGeom>
           <a:solidFill>
-            <a:srgbClr val="E2E8F0"/>
-          </a:solidFill>
-          <a:ln w="12700">
-            <a:solidFill>
-              <a:srgbClr val="E2E8F0"/>
-            </a:solidFill>
-            <a:prstDash val="solid"/>
-          </a:ln>
-        </p:spPr>
-      </p:sp>
-      <p:sp>
-        <p:nvSpPr>
-          <p:cNvPr id="37" name="Text 35"/>
-          <p:cNvSpPr/>
-          <p:nvPr/>
-        </p:nvSpPr>
-        <p:spPr>
-          <a:xfrm>
-            <a:off x="365760" y="4096512"/>
-            <a:ext cx="1371600" cy="804672"/>
-          </a:xfrm>
-          <a:prstGeom prst="rect">
-            <a:avLst/>
-          </a:prstGeom>
-          <a:noFill/>
-          <a:ln/>
-        </p:spPr>
-        <p:txBody>
-          <a:bodyPr wrap="square" lIns="0" tIns="0" rIns="0" bIns="0" rtlCol="0" anchor="ctr"/>
-          <a:lstStyle/>
-          <a:p>
-            <a:pPr algn="ctr" indent="0" marL="0">
-              <a:buNone/>
-            </a:pPr>
-            <a:r>
-              <a:rPr lang="en-US" sz="1100" b="1" dirty="0">
-                <a:solidFill>
-                  <a:srgbClr val="475569"/>
+            <a:srgbClr val="FFFFFF"/>
+          </a:solidFill>
+          <a:ln w="12700">
+            <a:solidFill>
+              <a:srgbClr val="DB2777"/>
+            </a:solidFill>
+            <a:prstDash val="solid"/>
+          </a:ln>
+        </p:spPr>
+      </p:sp>
+      <p:sp>
+        <p:nvSpPr>
+          <p:cNvPr id="39" name="Text 37"/>
+          <p:cNvSpPr/>
+          <p:nvPr/>
+        </p:nvSpPr>
+        <p:spPr>
+          <a:xfrm>
+            <a:off x="3293146" y="4169664"/>
+            <a:ext cx="685800" cy="384048"/>
+          </a:xfrm>
+          <a:prstGeom prst="rect">
+            <a:avLst/>
+          </a:prstGeom>
+          <a:noFill/>
+          <a:ln/>
+        </p:spPr>
+        <p:txBody>
+          <a:bodyPr wrap="square" lIns="0" tIns="0" rIns="0" bIns="0" rtlCol="0" anchor="ctr"/>
+          <a:lstStyle/>
+          <a:p>
+            <a:pPr algn="ctr" indent="0" marL="0">
+              <a:buNone/>
+            </a:pPr>
+            <a:r>
+              <a:rPr lang="en-US" sz="900" b="1" dirty="0">
+                <a:solidFill>
+                  <a:srgbClr val="9D174D"/>
                 </a:solidFill>
                 <a:latin typeface="Trebuchet MS" pitchFamily="34" charset="0"/>
                 <a:ea typeface="Trebuchet MS" pitchFamily="34" charset="-122"/>
                 <a:cs typeface="Trebuchet MS" pitchFamily="34" charset="-120"/>
               </a:rPr>
-              <a:t>Phonemes</a:t>
-            </a:r>
-            <a:endParaRPr lang="en-US" sz="1100" dirty="0"/>
-          </a:p>
-        </p:txBody>
-      </p:sp>
-      <p:sp>
-        <p:nvSpPr>
-          <p:cNvPr id="38" name="Shape 36"/>
-          <p:cNvSpPr/>
-          <p:nvPr/>
-        </p:nvSpPr>
-        <p:spPr>
-          <a:xfrm>
-            <a:off x="1874520" y="4096512"/>
-            <a:ext cx="6903720" cy="804672"/>
-          </a:xfrm>
-          <a:prstGeom prst="rect">
-            <a:avLst>
-              <a:gd name="adj" fmla="val 6818"/>
-            </a:avLst>
-          </a:prstGeom>
-          <a:solidFill>
-            <a:srgbClr val="FCE7F3"/>
-          </a:solidFill>
-          <a:ln w="12700">
-            <a:solidFill>
-              <a:srgbClr val="DB2777"/>
-            </a:solidFill>
-            <a:prstDash val="solid"/>
-          </a:ln>
-        </p:spPr>
-      </p:sp>
-      <p:sp>
-        <p:nvSpPr>
-          <p:cNvPr id="39" name="Shape 37"/>
-          <p:cNvSpPr/>
-          <p:nvPr/>
-        </p:nvSpPr>
-        <p:spPr>
-          <a:xfrm>
-            <a:off x="2023872" y="4169664"/>
+              <a:t>i</a:t>
+            </a:r>
+            <a:endParaRPr lang="en-US" sz="900" dirty="0"/>
+          </a:p>
+        </p:txBody>
+      </p:sp>
+      <p:sp>
+        <p:nvSpPr>
+          <p:cNvPr id="40" name="Shape 38"/>
+          <p:cNvSpPr/>
+          <p:nvPr/>
+        </p:nvSpPr>
+        <p:spPr>
+          <a:xfrm>
+            <a:off x="4331643" y="4169664"/>
             <a:ext cx="685800" cy="384048"/>
           </a:xfrm>
           <a:prstGeom prst="rect">
@@ -33427,13 +32782,13 @@
       </p:sp>
       <p:sp>
         <p:nvSpPr>
-          <p:cNvPr id="40" name="Text 38"/>
-          <p:cNvSpPr/>
-          <p:nvPr/>
-        </p:nvSpPr>
-        <p:spPr>
-          <a:xfrm>
-            <a:off x="2023872" y="4169664"/>
+          <p:cNvPr id="41" name="Text 39"/>
+          <p:cNvSpPr/>
+          <p:nvPr/>
+        </p:nvSpPr>
+        <p:spPr>
+          <a:xfrm>
+            <a:off x="4331643" y="4169664"/>
             <a:ext cx="685800" cy="384048"/>
           </a:xfrm>
           <a:prstGeom prst="rect">
@@ -33458,7 +32813,7 @@
                 <a:ea typeface="Trebuchet MS" pitchFamily="34" charset="-122"/>
                 <a:cs typeface="Trebuchet MS" pitchFamily="34" charset="-120"/>
               </a:rPr>
-              <a:t>v</a:t>
+              <a:t>s</a:t>
             </a:r>
             <a:endParaRPr lang="en-US" sz="900" dirty="0"/>
           </a:p>
@@ -33466,13 +32821,52 @@
       </p:sp>
       <p:sp>
         <p:nvSpPr>
-          <p:cNvPr id="41" name="Shape 39"/>
-          <p:cNvSpPr/>
-          <p:nvPr/>
-        </p:nvSpPr>
-        <p:spPr>
-          <a:xfrm>
-            <a:off x="2831592" y="4169664"/>
+          <p:cNvPr id="42" name="Text 40"/>
+          <p:cNvSpPr/>
+          <p:nvPr/>
+        </p:nvSpPr>
+        <p:spPr>
+          <a:xfrm>
+            <a:off x="4331643" y="4572000"/>
+            <a:ext cx="685800" cy="219456"/>
+          </a:xfrm>
+          <a:prstGeom prst="rect">
+            <a:avLst/>
+          </a:prstGeom>
+          <a:noFill/>
+          <a:ln/>
+        </p:spPr>
+        <p:txBody>
+          <a:bodyPr wrap="square" lIns="0" tIns="0" rIns="0" bIns="0" rtlCol="0" anchor="t"/>
+          <a:lstStyle/>
+          <a:p>
+            <a:pPr algn="ctr" indent="0" marL="0">
+              <a:buNone/>
+            </a:pPr>
+            <a:r>
+              <a:rPr lang="en-US" sz="750" i="1" dirty="0">
+                <a:solidFill>
+                  <a:srgbClr val="94A3B8"/>
+                </a:solidFill>
+                <a:latin typeface="Calibri" pitchFamily="34" charset="0"/>
+                <a:ea typeface="Calibri" pitchFamily="34" charset="-122"/>
+                <a:cs typeface="Calibri" pitchFamily="34" charset="-120"/>
+              </a:rPr>
+              <a:t>/z/</a:t>
+            </a:r>
+            <a:endParaRPr lang="en-US" sz="750" dirty="0"/>
+          </a:p>
+        </p:txBody>
+      </p:sp>
+      <p:sp>
+        <p:nvSpPr>
+          <p:cNvPr id="43" name="Shape 41"/>
+          <p:cNvSpPr/>
+          <p:nvPr/>
+        </p:nvSpPr>
+        <p:spPr>
+          <a:xfrm>
+            <a:off x="5370141" y="4169664"/>
             <a:ext cx="685800" cy="384048"/>
           </a:xfrm>
           <a:prstGeom prst="rect">
@@ -33493,13 +32887,13 @@
       </p:sp>
       <p:sp>
         <p:nvSpPr>
-          <p:cNvPr id="42" name="Text 40"/>
-          <p:cNvSpPr/>
-          <p:nvPr/>
-        </p:nvSpPr>
-        <p:spPr>
-          <a:xfrm>
-            <a:off x="2831592" y="4169664"/>
+          <p:cNvPr id="44" name="Text 42"/>
+          <p:cNvSpPr/>
+          <p:nvPr/>
+        </p:nvSpPr>
+        <p:spPr>
+          <a:xfrm>
+            <a:off x="5370141" y="4169664"/>
             <a:ext cx="685800" cy="384048"/>
           </a:xfrm>
           <a:prstGeom prst="rect">
@@ -33532,13 +32926,13 @@
       </p:sp>
       <p:sp>
         <p:nvSpPr>
-          <p:cNvPr id="43" name="Shape 41"/>
-          <p:cNvSpPr/>
-          <p:nvPr/>
-        </p:nvSpPr>
-        <p:spPr>
-          <a:xfrm>
-            <a:off x="3639312" y="4169664"/>
+          <p:cNvPr id="45" name="Shape 43"/>
+          <p:cNvSpPr/>
+          <p:nvPr/>
+        </p:nvSpPr>
+        <p:spPr>
+          <a:xfrm>
+            <a:off x="6408638" y="4169664"/>
             <a:ext cx="685800" cy="384048"/>
           </a:xfrm>
           <a:prstGeom prst="rect">
@@ -33559,13 +32953,13 @@
       </p:sp>
       <p:sp>
         <p:nvSpPr>
-          <p:cNvPr id="44" name="Text 42"/>
-          <p:cNvSpPr/>
-          <p:nvPr/>
-        </p:nvSpPr>
-        <p:spPr>
-          <a:xfrm>
-            <a:off x="3639312" y="4169664"/>
+          <p:cNvPr id="46" name="Text 44"/>
+          <p:cNvSpPr/>
+          <p:nvPr/>
+        </p:nvSpPr>
+        <p:spPr>
+          <a:xfrm>
+            <a:off x="6408638" y="4169664"/>
             <a:ext cx="685800" cy="384048"/>
           </a:xfrm>
           <a:prstGeom prst="rect">
@@ -33590,7 +32984,7 @@
                 <a:ea typeface="Trebuchet MS" pitchFamily="34" charset="-122"/>
                 <a:cs typeface="Trebuchet MS" pitchFamily="34" charset="-120"/>
               </a:rPr>
-              <a:t>s</a:t>
+              <a:t>t</a:t>
             </a:r>
             <a:endParaRPr lang="en-US" sz="900" dirty="0"/>
           </a:p>
@@ -33598,52 +32992,13 @@
       </p:sp>
       <p:sp>
         <p:nvSpPr>
-          <p:cNvPr id="45" name="Text 43"/>
-          <p:cNvSpPr/>
-          <p:nvPr/>
-        </p:nvSpPr>
-        <p:spPr>
-          <a:xfrm>
-            <a:off x="3639312" y="4572000"/>
-            <a:ext cx="685800" cy="219456"/>
-          </a:xfrm>
-          <a:prstGeom prst="rect">
-            <a:avLst/>
-          </a:prstGeom>
-          <a:noFill/>
-          <a:ln/>
-        </p:spPr>
-        <p:txBody>
-          <a:bodyPr wrap="square" lIns="0" tIns="0" rIns="0" bIns="0" rtlCol="0" anchor="t"/>
-          <a:lstStyle/>
-          <a:p>
-            <a:pPr algn="ctr" indent="0" marL="0">
-              <a:buNone/>
-            </a:pPr>
-            <a:r>
-              <a:rPr lang="en-US" sz="750" i="1" dirty="0">
-                <a:solidFill>
-                  <a:srgbClr val="94A3B8"/>
-                </a:solidFill>
-                <a:latin typeface="Calibri" pitchFamily="34" charset="0"/>
-                <a:ea typeface="Calibri" pitchFamily="34" charset="-122"/>
-                <a:cs typeface="Calibri" pitchFamily="34" charset="-120"/>
-              </a:rPr>
-              <a:t>/z/</a:t>
-            </a:r>
-            <a:endParaRPr lang="en-US" sz="750" dirty="0"/>
-          </a:p>
-        </p:txBody>
-      </p:sp>
-      <p:sp>
-        <p:nvSpPr>
-          <p:cNvPr id="46" name="Shape 44"/>
-          <p:cNvSpPr/>
-          <p:nvPr/>
-        </p:nvSpPr>
-        <p:spPr>
-          <a:xfrm>
-            <a:off x="4447032" y="4169664"/>
+          <p:cNvPr id="47" name="Shape 45"/>
+          <p:cNvSpPr/>
+          <p:nvPr/>
+        </p:nvSpPr>
+        <p:spPr>
+          <a:xfrm>
+            <a:off x="7447135" y="4169664"/>
             <a:ext cx="685800" cy="384048"/>
           </a:xfrm>
           <a:prstGeom prst="rect">
@@ -33664,13 +33019,13 @@
       </p:sp>
       <p:sp>
         <p:nvSpPr>
-          <p:cNvPr id="47" name="Text 45"/>
-          <p:cNvSpPr/>
-          <p:nvPr/>
-        </p:nvSpPr>
-        <p:spPr>
-          <a:xfrm>
-            <a:off x="4447032" y="4169664"/>
+          <p:cNvPr id="48" name="Text 46"/>
+          <p:cNvSpPr/>
+          <p:nvPr/>
+        </p:nvSpPr>
+        <p:spPr>
+          <a:xfrm>
+            <a:off x="7447135" y="4169664"/>
             <a:ext cx="685800" cy="384048"/>
           </a:xfrm>
           <a:prstGeom prst="rect">
@@ -33695,310 +33050,7 @@
                 <a:ea typeface="Trebuchet MS" pitchFamily="34" charset="-122"/>
                 <a:cs typeface="Trebuchet MS" pitchFamily="34" charset="-120"/>
               </a:rPr>
-              <a:t>i</a:t>
-            </a:r>
-            <a:endParaRPr lang="en-US" sz="900" dirty="0"/>
-          </a:p>
-        </p:txBody>
-      </p:sp>
-      <p:sp>
-        <p:nvSpPr>
-          <p:cNvPr id="48" name="Shape 46"/>
-          <p:cNvSpPr/>
-          <p:nvPr/>
-        </p:nvSpPr>
-        <p:spPr>
-          <a:xfrm>
-            <a:off x="5254752" y="4169664"/>
-            <a:ext cx="685800" cy="384048"/>
-          </a:xfrm>
-          <a:prstGeom prst="rect">
-            <a:avLst>
-              <a:gd name="adj" fmla="val 9524"/>
-            </a:avLst>
-          </a:prstGeom>
-          <a:solidFill>
-            <a:srgbClr val="FFFFFF"/>
-          </a:solidFill>
-          <a:ln w="12700">
-            <a:solidFill>
-              <a:srgbClr val="DB2777"/>
-            </a:solidFill>
-            <a:prstDash val="solid"/>
-          </a:ln>
-        </p:spPr>
-      </p:sp>
-      <p:sp>
-        <p:nvSpPr>
-          <p:cNvPr id="49" name="Text 47"/>
-          <p:cNvSpPr/>
-          <p:nvPr/>
-        </p:nvSpPr>
-        <p:spPr>
-          <a:xfrm>
-            <a:off x="5254752" y="4169664"/>
-            <a:ext cx="685800" cy="384048"/>
-          </a:xfrm>
-          <a:prstGeom prst="rect">
-            <a:avLst/>
-          </a:prstGeom>
-          <a:noFill/>
-          <a:ln/>
-        </p:spPr>
-        <p:txBody>
-          <a:bodyPr wrap="square" lIns="0" tIns="0" rIns="0" bIns="0" rtlCol="0" anchor="ctr"/>
-          <a:lstStyle/>
-          <a:p>
-            <a:pPr algn="ctr" indent="0" marL="0">
-              <a:buNone/>
-            </a:pPr>
-            <a:r>
-              <a:rPr lang="en-US" sz="900" b="1" dirty="0">
-                <a:solidFill>
-                  <a:srgbClr val="9D174D"/>
-                </a:solidFill>
-                <a:latin typeface="Trebuchet MS" pitchFamily="34" charset="0"/>
-                <a:ea typeface="Trebuchet MS" pitchFamily="34" charset="-122"/>
-                <a:cs typeface="Trebuchet MS" pitchFamily="34" charset="-120"/>
-              </a:rPr>
-              <a:t>t</a:t>
-            </a:r>
-            <a:endParaRPr lang="en-US" sz="900" dirty="0"/>
-          </a:p>
-        </p:txBody>
-      </p:sp>
-      <p:sp>
-        <p:nvSpPr>
-          <p:cNvPr id="50" name="Shape 48"/>
-          <p:cNvSpPr/>
-          <p:nvPr/>
-        </p:nvSpPr>
-        <p:spPr>
-          <a:xfrm>
-            <a:off x="6062472" y="4169664"/>
-            <a:ext cx="685800" cy="384048"/>
-          </a:xfrm>
-          <a:prstGeom prst="rect">
-            <a:avLst>
-              <a:gd name="adj" fmla="val 9524"/>
-            </a:avLst>
-          </a:prstGeom>
-          <a:solidFill>
-            <a:srgbClr val="FFFFFF"/>
-          </a:solidFill>
-          <a:ln w="12700">
-            <a:solidFill>
-              <a:srgbClr val="DB2777"/>
-            </a:solidFill>
-            <a:prstDash val="solid"/>
-          </a:ln>
-        </p:spPr>
-      </p:sp>
-      <p:sp>
-        <p:nvSpPr>
-          <p:cNvPr id="51" name="Text 49"/>
-          <p:cNvSpPr/>
-          <p:nvPr/>
-        </p:nvSpPr>
-        <p:spPr>
-          <a:xfrm>
-            <a:off x="6062472" y="4169664"/>
-            <a:ext cx="685800" cy="384048"/>
-          </a:xfrm>
-          <a:prstGeom prst="rect">
-            <a:avLst/>
-          </a:prstGeom>
-          <a:noFill/>
-          <a:ln/>
-        </p:spPr>
-        <p:txBody>
-          <a:bodyPr wrap="square" lIns="0" tIns="0" rIns="0" bIns="0" rtlCol="0" anchor="ctr"/>
-          <a:lstStyle/>
-          <a:p>
-            <a:pPr algn="ctr" indent="0" marL="0">
-              <a:buNone/>
-            </a:pPr>
-            <a:r>
-              <a:rPr lang="en-US" sz="900" b="1" dirty="0">
-                <a:solidFill>
-                  <a:srgbClr val="9D174D"/>
-                </a:solidFill>
-                <a:latin typeface="Trebuchet MS" pitchFamily="34" charset="0"/>
-                <a:ea typeface="Trebuchet MS" pitchFamily="34" charset="-122"/>
-                <a:cs typeface="Trebuchet MS" pitchFamily="34" charset="-120"/>
-              </a:rPr>
-              <a:t>a</a:t>
-            </a:r>
-            <a:endParaRPr lang="en-US" sz="900" dirty="0"/>
-          </a:p>
-        </p:txBody>
-      </p:sp>
-      <p:sp>
-        <p:nvSpPr>
-          <p:cNvPr id="52" name="Shape 50"/>
-          <p:cNvSpPr/>
-          <p:nvPr/>
-        </p:nvSpPr>
-        <p:spPr>
-          <a:xfrm>
-            <a:off x="6870192" y="4169664"/>
-            <a:ext cx="685800" cy="384048"/>
-          </a:xfrm>
-          <a:prstGeom prst="rect">
-            <a:avLst>
-              <a:gd name="adj" fmla="val 9524"/>
-            </a:avLst>
-          </a:prstGeom>
-          <a:solidFill>
-            <a:srgbClr val="FFFFFF"/>
-          </a:solidFill>
-          <a:ln w="12700">
-            <a:solidFill>
-              <a:srgbClr val="DB2777"/>
-            </a:solidFill>
-            <a:prstDash val="solid"/>
-          </a:ln>
-        </p:spPr>
-      </p:sp>
-      <p:sp>
-        <p:nvSpPr>
-          <p:cNvPr id="53" name="Text 51"/>
-          <p:cNvSpPr/>
-          <p:nvPr/>
-        </p:nvSpPr>
-        <p:spPr>
-          <a:xfrm>
-            <a:off x="6870192" y="4169664"/>
-            <a:ext cx="685800" cy="384048"/>
-          </a:xfrm>
-          <a:prstGeom prst="rect">
-            <a:avLst/>
-          </a:prstGeom>
-          <a:noFill/>
-          <a:ln/>
-        </p:spPr>
-        <p:txBody>
-          <a:bodyPr wrap="square" lIns="0" tIns="0" rIns="0" bIns="0" rtlCol="0" anchor="ctr"/>
-          <a:lstStyle/>
-          <a:p>
-            <a:pPr algn="ctr" indent="0" marL="0">
-              <a:buNone/>
-            </a:pPr>
-            <a:r>
-              <a:rPr lang="en-US" sz="900" b="1" dirty="0">
-                <a:solidFill>
-                  <a:srgbClr val="9D174D"/>
-                </a:solidFill>
-                <a:latin typeface="Trebuchet MS" pitchFamily="34" charset="0"/>
-                <a:ea typeface="Trebuchet MS" pitchFamily="34" charset="-122"/>
-                <a:cs typeface="Trebuchet MS" pitchFamily="34" charset="-120"/>
-              </a:rPr>
-              <a:t>ti</a:t>
-            </a:r>
-            <a:endParaRPr lang="en-US" sz="900" dirty="0"/>
-          </a:p>
-        </p:txBody>
-      </p:sp>
-      <p:sp>
-        <p:nvSpPr>
-          <p:cNvPr id="54" name="Text 52"/>
-          <p:cNvSpPr/>
-          <p:nvPr/>
-        </p:nvSpPr>
-        <p:spPr>
-          <a:xfrm>
-            <a:off x="6870192" y="4572000"/>
-            <a:ext cx="685800" cy="219456"/>
-          </a:xfrm>
-          <a:prstGeom prst="rect">
-            <a:avLst/>
-          </a:prstGeom>
-          <a:noFill/>
-          <a:ln/>
-        </p:spPr>
-        <p:txBody>
-          <a:bodyPr wrap="square" lIns="0" tIns="0" rIns="0" bIns="0" rtlCol="0" anchor="t"/>
-          <a:lstStyle/>
-          <a:p>
-            <a:pPr algn="ctr" indent="0" marL="0">
-              <a:buNone/>
-            </a:pPr>
-            <a:r>
-              <a:rPr lang="en-US" sz="750" i="1" dirty="0">
-                <a:solidFill>
-                  <a:srgbClr val="94A3B8"/>
-                </a:solidFill>
-                <a:latin typeface="Calibri" pitchFamily="34" charset="0"/>
-                <a:ea typeface="Calibri" pitchFamily="34" charset="-122"/>
-                <a:cs typeface="Calibri" pitchFamily="34" charset="-120"/>
-              </a:rPr>
-              <a:t>/sh/</a:t>
-            </a:r>
-            <a:endParaRPr lang="en-US" sz="750" dirty="0"/>
-          </a:p>
-        </p:txBody>
-      </p:sp>
-      <p:sp>
-        <p:nvSpPr>
-          <p:cNvPr id="55" name="Shape 53"/>
-          <p:cNvSpPr/>
-          <p:nvPr/>
-        </p:nvSpPr>
-        <p:spPr>
-          <a:xfrm>
-            <a:off x="7677912" y="4169664"/>
-            <a:ext cx="685800" cy="384048"/>
-          </a:xfrm>
-          <a:prstGeom prst="rect">
-            <a:avLst>
-              <a:gd name="adj" fmla="val 9524"/>
-            </a:avLst>
-          </a:prstGeom>
-          <a:solidFill>
-            <a:srgbClr val="FFFFFF"/>
-          </a:solidFill>
-          <a:ln w="12700">
-            <a:solidFill>
-              <a:srgbClr val="DB2777"/>
-            </a:solidFill>
-            <a:prstDash val="solid"/>
-          </a:ln>
-        </p:spPr>
-      </p:sp>
-      <p:sp>
-        <p:nvSpPr>
-          <p:cNvPr id="56" name="Text 54"/>
-          <p:cNvSpPr/>
-          <p:nvPr/>
-        </p:nvSpPr>
-        <p:spPr>
-          <a:xfrm>
-            <a:off x="7677912" y="4169664"/>
-            <a:ext cx="685800" cy="384048"/>
-          </a:xfrm>
-          <a:prstGeom prst="rect">
-            <a:avLst/>
-          </a:prstGeom>
-          <a:noFill/>
-          <a:ln/>
-        </p:spPr>
-        <p:txBody>
-          <a:bodyPr wrap="square" lIns="0" tIns="0" rIns="0" bIns="0" rtlCol="0" anchor="ctr"/>
-          <a:lstStyle/>
-          <a:p>
-            <a:pPr algn="ctr" indent="0" marL="0">
-              <a:buNone/>
-            </a:pPr>
-            <a:r>
-              <a:rPr lang="en-US" sz="900" b="1" dirty="0">
-                <a:solidFill>
-                  <a:srgbClr val="9D174D"/>
-                </a:solidFill>
-                <a:latin typeface="Trebuchet MS" pitchFamily="34" charset="0"/>
-                <a:ea typeface="Trebuchet MS" pitchFamily="34" charset="-122"/>
-                <a:cs typeface="Trebuchet MS" pitchFamily="34" charset="-120"/>
-              </a:rPr>
-              <a:t>on</a:t>
+              <a:t>ed</a:t>
             </a:r>
             <a:endParaRPr lang="en-US" sz="900" dirty="0"/>
           </a:p>
@@ -36105,7 +35157,7 @@
                 <a:ea typeface="Trebuchet MS" pitchFamily="34" charset="-122"/>
                 <a:cs typeface="Trebuchet MS" pitchFamily="34" charset="-120"/>
               </a:rPr>
-              <a:t>pre-</a:t>
+              <a:t>in-</a:t>
             </a:r>
             <a:endParaRPr lang="en-US" sz="1300" dirty="0"/>
           </a:p>
@@ -36258,7 +35310,7 @@
                 <a:ea typeface="Trebuchet MS" pitchFamily="34" charset="-122"/>
                 <a:cs typeface="Trebuchet MS" pitchFamily="34" charset="-120"/>
               </a:rPr>
-              <a:t>in-</a:t>
+              <a:t>over-</a:t>
             </a:r>
             <a:endParaRPr lang="en-US" sz="1300" dirty="0"/>
           </a:p>
@@ -36411,7 +35463,7 @@
                 <a:ea typeface="Trebuchet MS" pitchFamily="34" charset="-122"/>
                 <a:cs typeface="Trebuchet MS" pitchFamily="34" charset="-120"/>
               </a:rPr>
-              <a:t>over-</a:t>
+              <a:t>pre-</a:t>
             </a:r>
             <a:endParaRPr lang="en-US" sz="1300" dirty="0"/>
           </a:p>
@@ -36605,7 +35657,7 @@
                 <a:ea typeface="Trebuchet MS" pitchFamily="34" charset="-122"/>
                 <a:cs typeface="Trebuchet MS" pitchFamily="34" charset="-120"/>
               </a:rPr>
-              <a:t>visitor</a:t>
+              <a:t>visit</a:t>
             </a:r>
             <a:endParaRPr lang="en-US" sz="1200" dirty="0"/>
           </a:p>
@@ -36671,7 +35723,7 @@
                 <a:ea typeface="Trebuchet MS" pitchFamily="34" charset="-122"/>
                 <a:cs typeface="Trebuchet MS" pitchFamily="34" charset="-120"/>
               </a:rPr>
-              <a:t>visited</a:t>
+              <a:t>visitor</a:t>
             </a:r>
             <a:endParaRPr lang="en-US" sz="1200" dirty="0"/>
           </a:p>
@@ -36803,7 +35855,7 @@
                 <a:ea typeface="Trebuchet MS" pitchFamily="34" charset="-122"/>
                 <a:cs typeface="Trebuchet MS" pitchFamily="34" charset="-120"/>
               </a:rPr>
-              <a:t>visitation</a:t>
+              <a:t>visited</a:t>
             </a:r>
             <a:endParaRPr lang="en-US" sz="1200" dirty="0"/>
           </a:p>
@@ -36869,7 +35921,7 @@
                 <a:ea typeface="Trebuchet MS" pitchFamily="34" charset="-122"/>
                 <a:cs typeface="Trebuchet MS" pitchFamily="34" charset="-120"/>
               </a:rPr>
-              <a:t>revisit</a:t>
+              <a:t>visitation</a:t>
             </a:r>
             <a:endParaRPr lang="en-US" sz="1200" dirty="0"/>
           </a:p>
@@ -36935,7 +35987,7 @@
                 <a:ea typeface="Trebuchet MS" pitchFamily="34" charset="-122"/>
                 <a:cs typeface="Trebuchet MS" pitchFamily="34" charset="-120"/>
               </a:rPr>
-              <a:t>visitors</a:t>
+              <a:t>revisit</a:t>
             </a:r>
             <a:endParaRPr lang="en-US" sz="1200" dirty="0"/>
           </a:p>
@@ -37001,7 +36053,7 @@
                 <a:ea typeface="Trebuchet MS" pitchFamily="34" charset="-122"/>
                 <a:cs typeface="Trebuchet MS" pitchFamily="34" charset="-120"/>
               </a:rPr>
-              <a:t>revisiting</a:t>
+              <a:t>visitors</a:t>
             </a:r>
             <a:endParaRPr lang="en-US" sz="1200" dirty="0"/>
           </a:p>
@@ -37067,7 +36119,7 @@
                 <a:ea typeface="Trebuchet MS" pitchFamily="34" charset="-122"/>
                 <a:cs typeface="Trebuchet MS" pitchFamily="34" charset="-120"/>
               </a:rPr>
-              <a:t>revisited</a:t>
+              <a:t>revisiting</a:t>
             </a:r>
             <a:endParaRPr lang="en-US" sz="1200" dirty="0"/>
           </a:p>
@@ -38255,7 +37307,7 @@
                 <a:ea typeface="Calibri" pitchFamily="34" charset="-122"/>
                 <a:cs typeface="Calibri" pitchFamily="34" charset="-120"/>
               </a:rPr>
-              <a:t>1.  The root 'visit' comes from Latin.</a:t>
+              <a:t>1.  The word 'visitor' has no suffix added to the root 'visit'.</a:t>
             </a:r>
             <a:endParaRPr lang="en-US" sz="1300" dirty="0"/>
           </a:p>
@@ -38278,11 +37330,11 @@
             </a:avLst>
           </a:prstGeom>
           <a:solidFill>
-            <a:srgbClr val="DCFCE7"/>
-          </a:solidFill>
-          <a:ln w="12700">
-            <a:solidFill>
-              <a:srgbClr val="16A34A"/>
+            <a:srgbClr val="FEE2E2"/>
+          </a:solidFill>
+          <a:ln w="12700">
+            <a:solidFill>
+              <a:srgbClr val="DC2626"/>
             </a:solidFill>
             <a:prstDash val="solid"/>
           </a:ln>
@@ -38315,13 +37367,13 @@
             <a:r>
               <a:rPr lang="en-US" sz="1100" b="1" dirty="0">
                 <a:solidFill>
-                  <a:srgbClr val="16A34A"/>
+                  <a:srgbClr val="DC2626"/>
                 </a:solidFill>
                 <a:latin typeface="Trebuchet MS" pitchFamily="34" charset="0"/>
                 <a:ea typeface="Trebuchet MS" pitchFamily="34" charset="-122"/>
                 <a:cs typeface="Trebuchet MS" pitchFamily="34" charset="-120"/>
               </a:rPr>
-              <a:t>TRUE</a:t>
+              <a:t>FALSE</a:t>
             </a:r>
             <a:endParaRPr lang="en-US" sz="1100" dirty="0"/>
           </a:p>
@@ -38394,7 +37446,7 @@
                 <a:ea typeface="Calibri" pitchFamily="34" charset="-122"/>
                 <a:cs typeface="Calibri" pitchFamily="34" charset="-120"/>
               </a:rPr>
-              <a:t>2.  The word 'visitor' means the act of visiting, not a person.</a:t>
+              <a:t>2.  Adding 're' before 'visit' makes the word 'revisit', meaning to visit again.</a:t>
             </a:r>
             <a:endParaRPr lang="en-US" sz="1300" dirty="0"/>
           </a:p>
@@ -38417,11 +37469,11 @@
             </a:avLst>
           </a:prstGeom>
           <a:solidFill>
-            <a:srgbClr val="FEE2E2"/>
-          </a:solidFill>
-          <a:ln w="12700">
-            <a:solidFill>
-              <a:srgbClr val="DC2626"/>
+            <a:srgbClr val="DCFCE7"/>
+          </a:solidFill>
+          <a:ln w="12700">
+            <a:solidFill>
+              <a:srgbClr val="16A34A"/>
             </a:solidFill>
             <a:prstDash val="solid"/>
           </a:ln>
@@ -38454,13 +37506,13 @@
             <a:r>
               <a:rPr lang="en-US" sz="1100" b="1" dirty="0">
                 <a:solidFill>
-                  <a:srgbClr val="DC2626"/>
+                  <a:srgbClr val="16A34A"/>
                 </a:solidFill>
                 <a:latin typeface="Trebuchet MS" pitchFamily="34" charset="0"/>
                 <a:ea typeface="Trebuchet MS" pitchFamily="34" charset="-122"/>
                 <a:cs typeface="Trebuchet MS" pitchFamily="34" charset="-120"/>
               </a:rPr>
-              <a:t>FALSE</a:t>
+              <a:t>TRUE</a:t>
             </a:r>
             <a:endParaRPr lang="en-US" sz="1100" dirty="0"/>
           </a:p>
@@ -38533,7 +37585,7 @@
                 <a:ea typeface="Calibri" pitchFamily="34" charset="-122"/>
                 <a:cs typeface="Calibri" pitchFamily="34" charset="-120"/>
               </a:rPr>
-              <a:t>3.  Adding 're-' to 'visit' makes the word 'revisit', meaning to visit again.</a:t>
+              <a:t>3.  The root 'visit' originally comes from a Greek word.</a:t>
             </a:r>
             <a:endParaRPr lang="en-US" sz="1300" dirty="0"/>
           </a:p>
@@ -38556,11 +37608,11 @@
             </a:avLst>
           </a:prstGeom>
           <a:solidFill>
-            <a:srgbClr val="DCFCE7"/>
-          </a:solidFill>
-          <a:ln w="12700">
-            <a:solidFill>
-              <a:srgbClr val="16A34A"/>
+            <a:srgbClr val="FEE2E2"/>
+          </a:solidFill>
+          <a:ln w="12700">
+            <a:solidFill>
+              <a:srgbClr val="DC2626"/>
             </a:solidFill>
             <a:prstDash val="solid"/>
           </a:ln>
@@ -38593,13 +37645,13 @@
             <a:r>
               <a:rPr lang="en-US" sz="1100" b="1" dirty="0">
                 <a:solidFill>
-                  <a:srgbClr val="16A34A"/>
+                  <a:srgbClr val="DC2626"/>
                 </a:solidFill>
                 <a:latin typeface="Trebuchet MS" pitchFamily="34" charset="0"/>
                 <a:ea typeface="Trebuchet MS" pitchFamily="34" charset="-122"/>
                 <a:cs typeface="Trebuchet MS" pitchFamily="34" charset="-120"/>
               </a:rPr>
-              <a:t>TRUE</a:t>
+              <a:t>FALSE</a:t>
             </a:r>
             <a:endParaRPr lang="en-US" sz="1100" dirty="0"/>
           </a:p>
@@ -38672,7 +37724,7 @@
                 <a:ea typeface="Calibri" pitchFamily="34" charset="-122"/>
                 <a:cs typeface="Calibri" pitchFamily="34" charset="-120"/>
               </a:rPr>
-              <a:t>4.  A 'visitation' is a kind of formal or official visit.</a:t>
+              <a:t>4.  The word 'visitation' contains the root 'visit'.</a:t>
             </a:r>
             <a:endParaRPr lang="en-US" sz="1300" dirty="0"/>
           </a:p>
@@ -38811,7 +37863,7 @@
                 <a:ea typeface="Calibri" pitchFamily="34" charset="-122"/>
                 <a:cs typeface="Calibri" pitchFamily="34" charset="-120"/>
               </a:rPr>
-              <a:t>5.  The root 'visit' originally comes from Greek.</a:t>
+              <a:t>5.  The root 'visit' comes from a Latin word meaning to go and see.</a:t>
             </a:r>
             <a:endParaRPr lang="en-US" sz="1300" dirty="0"/>
           </a:p>
@@ -38834,11 +37886,11 @@
             </a:avLst>
           </a:prstGeom>
           <a:solidFill>
-            <a:srgbClr val="FEE2E2"/>
-          </a:solidFill>
-          <a:ln w="12700">
-            <a:solidFill>
-              <a:srgbClr val="DC2626"/>
+            <a:srgbClr val="DCFCE7"/>
+          </a:solidFill>
+          <a:ln w="12700">
+            <a:solidFill>
+              <a:srgbClr val="16A34A"/>
             </a:solidFill>
             <a:prstDash val="solid"/>
           </a:ln>
@@ -38871,13 +37923,13 @@
             <a:r>
               <a:rPr lang="en-US" sz="1100" b="1" dirty="0">
                 <a:solidFill>
-                  <a:srgbClr val="DC2626"/>
+                  <a:srgbClr val="16A34A"/>
                 </a:solidFill>
                 <a:latin typeface="Trebuchet MS" pitchFamily="34" charset="0"/>
                 <a:ea typeface="Trebuchet MS" pitchFamily="34" charset="-122"/>
                 <a:cs typeface="Trebuchet MS" pitchFamily="34" charset="-120"/>
               </a:rPr>
-              <a:t>FALSE</a:t>
+              <a:t>TRUE</a:t>
             </a:r>
             <a:endParaRPr lang="en-US" sz="1100" dirty="0"/>
           </a:p>
@@ -39450,7 +38502,7 @@
                 <a:ea typeface="Trebuchet MS" pitchFamily="34" charset="-122"/>
                 <a:cs typeface="Trebuchet MS" pitchFamily="34" charset="-120"/>
               </a:rPr>
-              <a:t>visitor</a:t>
+              <a:t>visit</a:t>
             </a:r>
             <a:endParaRPr lang="en-US" sz="1300" dirty="0"/>
           </a:p>
@@ -39516,7 +38568,7 @@
                 <a:ea typeface="Trebuchet MS" pitchFamily="34" charset="-122"/>
                 <a:cs typeface="Trebuchet MS" pitchFamily="34" charset="-120"/>
               </a:rPr>
-              <a:t>visited</a:t>
+              <a:t>visitor</a:t>
             </a:r>
             <a:endParaRPr lang="en-US" sz="1300" dirty="0"/>
           </a:p>
@@ -39648,7 +38700,7 @@
                 <a:ea typeface="Trebuchet MS" pitchFamily="34" charset="-122"/>
                 <a:cs typeface="Trebuchet MS" pitchFamily="34" charset="-120"/>
               </a:rPr>
-              <a:t>visitation</a:t>
+              <a:t>visited</a:t>
             </a:r>
             <a:endParaRPr lang="en-US" sz="1300" dirty="0"/>
           </a:p>
@@ -39714,7 +38766,7 @@
                 <a:ea typeface="Trebuchet MS" pitchFamily="34" charset="-122"/>
                 <a:cs typeface="Trebuchet MS" pitchFamily="34" charset="-120"/>
               </a:rPr>
-              <a:t>revisit</a:t>
+              <a:t>visitation</a:t>
             </a:r>
             <a:endParaRPr lang="en-US" sz="1300" dirty="0"/>
           </a:p>
@@ -39780,7 +38832,7 @@
                 <a:ea typeface="Trebuchet MS" pitchFamily="34" charset="-122"/>
                 <a:cs typeface="Trebuchet MS" pitchFamily="34" charset="-120"/>
               </a:rPr>
-              <a:t>visitors</a:t>
+              <a:t>revisit</a:t>
             </a:r>
             <a:endParaRPr lang="en-US" sz="1300" dirty="0"/>
           </a:p>
@@ -39846,7 +38898,7 @@
                 <a:ea typeface="Trebuchet MS" pitchFamily="34" charset="-122"/>
                 <a:cs typeface="Trebuchet MS" pitchFamily="34" charset="-120"/>
               </a:rPr>
-              <a:t>revisiting</a:t>
+              <a:t>visitors</a:t>
             </a:r>
             <a:endParaRPr lang="en-US" sz="1300" dirty="0"/>
           </a:p>
@@ -40784,7 +39836,7 @@
                 <a:ea typeface="Trebuchet MS" pitchFamily="34" charset="-122"/>
                 <a:cs typeface="Trebuchet MS" pitchFamily="34" charset="-120"/>
               </a:rPr>
-              <a:t>pre-</a:t>
+              <a:t>in-</a:t>
             </a:r>
             <a:endParaRPr lang="en-US" sz="1300" dirty="0"/>
           </a:p>
@@ -40937,7 +39989,7 @@
                 <a:ea typeface="Trebuchet MS" pitchFamily="34" charset="-122"/>
                 <a:cs typeface="Trebuchet MS" pitchFamily="34" charset="-120"/>
               </a:rPr>
-              <a:t>in-</a:t>
+              <a:t>over-</a:t>
             </a:r>
             <a:endParaRPr lang="en-US" sz="1300" dirty="0"/>
           </a:p>
@@ -41090,7 +40142,7 @@
                 <a:ea typeface="Trebuchet MS" pitchFamily="34" charset="-122"/>
                 <a:cs typeface="Trebuchet MS" pitchFamily="34" charset="-120"/>
               </a:rPr>
-              <a:t>over-</a:t>
+              <a:t>pre-</a:t>
             </a:r>
             <a:endParaRPr lang="en-US" sz="1300" dirty="0"/>
           </a:p>
@@ -41620,7 +40672,7 @@
                 <a:ea typeface="Trebuchet MS" pitchFamily="34" charset="-122"/>
                 <a:cs typeface="Trebuchet MS" pitchFamily="34" charset="-120"/>
               </a:rPr>
-              <a:t>visitor</a:t>
+              <a:t>visit</a:t>
             </a:r>
             <a:endParaRPr lang="en-US" sz="1400" dirty="0"/>
           </a:p>
@@ -42024,7 +41076,7 @@
                 <a:ea typeface="Trebuchet MS" pitchFamily="34" charset="-122"/>
                 <a:cs typeface="Trebuchet MS" pitchFamily="34" charset="-120"/>
               </a:rPr>
-              <a:t>visitor</a:t>
+              <a:t>visit</a:t>
             </a:r>
             <a:endParaRPr lang="en-US" sz="1200" dirty="0"/>
           </a:p>
@@ -42090,7 +41142,7 @@
                 <a:ea typeface="Calibri" pitchFamily="34" charset="-122"/>
                 <a:cs typeface="Calibri" pitchFamily="34" charset="-120"/>
               </a:rPr>
-              <a:t>The act of going to see someone or somewhere right now.</a:t>
+              <a:t>The action of going to see someone or somewhere.</a:t>
             </a:r>
             <a:endParaRPr lang="en-US" sz="1200" dirty="0"/>
           </a:p>
@@ -42163,7 +41215,7 @@
                 <a:ea typeface="Trebuchet MS" pitchFamily="34" charset="-122"/>
                 <a:cs typeface="Trebuchet MS" pitchFamily="34" charset="-120"/>
               </a:rPr>
-              <a:t>visited</a:t>
+              <a:t>visitor</a:t>
             </a:r>
             <a:endParaRPr lang="en-US" sz="1200" dirty="0"/>
           </a:p>
@@ -42229,7 +41281,7 @@
                 <a:ea typeface="Calibri" pitchFamily="34" charset="-122"/>
                 <a:cs typeface="Calibri" pitchFamily="34" charset="-120"/>
               </a:rPr>
-              <a:t>To go back and visit a place or idea again.</a:t>
+              <a:t>An official or formal visit to a place or person.</a:t>
             </a:r>
             <a:endParaRPr lang="en-US" sz="1200" dirty="0"/>
           </a:p>
@@ -42368,7 +41420,7 @@
                 <a:ea typeface="Calibri" pitchFamily="34" charset="-122"/>
                 <a:cs typeface="Calibri" pitchFamily="34" charset="-120"/>
               </a:rPr>
-              <a:t>A person who comes to see a place or someone.</a:t>
+              <a:t>To go to a place or person to spend time with them.</a:t>
             </a:r>
             <a:endParaRPr lang="en-US" sz="1200" dirty="0"/>
           </a:p>
@@ -42441,7 +41493,7 @@
                 <a:ea typeface="Trebuchet MS" pitchFamily="34" charset="-122"/>
                 <a:cs typeface="Trebuchet MS" pitchFamily="34" charset="-120"/>
               </a:rPr>
-              <a:t>visitation</a:t>
+              <a:t>visited</a:t>
             </a:r>
             <a:endParaRPr lang="en-US" sz="1200" dirty="0"/>
           </a:p>
@@ -42507,7 +41559,7 @@
                 <a:ea typeface="Calibri" pitchFamily="34" charset="-122"/>
                 <a:cs typeface="Calibri" pitchFamily="34" charset="-120"/>
               </a:rPr>
-              <a:t>The act of going back to look at something again.</a:t>
+              <a:t>More than one person who has come to see a place or person.</a:t>
             </a:r>
             <a:endParaRPr lang="en-US" sz="1200" dirty="0"/>
           </a:p>
@@ -42580,7 +41632,7 @@
                 <a:ea typeface="Trebuchet MS" pitchFamily="34" charset="-122"/>
                 <a:cs typeface="Trebuchet MS" pitchFamily="34" charset="-120"/>
               </a:rPr>
-              <a:t>revisit</a:t>
+              <a:t>visitation</a:t>
             </a:r>
             <a:endParaRPr lang="en-US" sz="1200" dirty="0"/>
           </a:p>
@@ -42646,7 +41698,7 @@
                 <a:ea typeface="Calibri" pitchFamily="34" charset="-122"/>
                 <a:cs typeface="Calibri" pitchFamily="34" charset="-120"/>
               </a:rPr>
-              <a:t>More than one person who comes to see a place or someone.</a:t>
+              <a:t>To visit a place or idea again for a second time.</a:t>
             </a:r>
             <a:endParaRPr lang="en-US" sz="1200" dirty="0"/>
           </a:p>
@@ -42719,7 +41771,7 @@
                 <a:ea typeface="Trebuchet MS" pitchFamily="34" charset="-122"/>
                 <a:cs typeface="Trebuchet MS" pitchFamily="34" charset="-120"/>
               </a:rPr>
-              <a:t>visitors</a:t>
+              <a:t>revisit</a:t>
             </a:r>
             <a:endParaRPr lang="en-US" sz="1200" dirty="0"/>
           </a:p>
@@ -42785,7 +41837,7 @@
                 <a:ea typeface="Calibri" pitchFamily="34" charset="-122"/>
                 <a:cs typeface="Calibri" pitchFamily="34" charset="-120"/>
               </a:rPr>
-              <a:t>An official or formal visit to a place or person.</a:t>
+              <a:t>Went to see a person or place in the past.</a:t>
             </a:r>
             <a:endParaRPr lang="en-US" sz="1200" dirty="0"/>
           </a:p>
@@ -42858,7 +41910,7 @@
                 <a:ea typeface="Trebuchet MS" pitchFamily="34" charset="-122"/>
                 <a:cs typeface="Trebuchet MS" pitchFamily="34" charset="-120"/>
               </a:rPr>
-              <a:t>revisiting</a:t>
+              <a:t>visitors</a:t>
             </a:r>
             <a:endParaRPr lang="en-US" sz="1200" dirty="0"/>
           </a:p>
@@ -42924,7 +41976,7 @@
                 <a:ea typeface="Calibri" pitchFamily="34" charset="-122"/>
                 <a:cs typeface="Calibri" pitchFamily="34" charset="-120"/>
               </a:rPr>
-              <a:t>When someone went to see a place or person in the past.</a:t>
+              <a:t>A person who travels to see a place or another person.</a:t>
             </a:r>
             <a:endParaRPr lang="en-US" sz="1200" dirty="0"/>
           </a:p>
@@ -43419,7 +42471,7 @@
                 <a:ea typeface="Calibri" pitchFamily="34" charset="-122"/>
                 <a:cs typeface="Calibri" pitchFamily="34" charset="-120"/>
               </a:rPr>
-              <a:t>The visitor at our school today showed us how to care for native Australian animals.</a:t>
+              <a:t>The visitor from overseas was excited to explore our school and meet the students.</a:t>
             </a:r>
             <a:endParaRPr lang="en-US" sz="1500" dirty="0"/>
           </a:p>
@@ -43583,7 +42635,7 @@
                 <a:ea typeface="Calibri" pitchFamily="34" charset="-122"/>
                 <a:cs typeface="Calibri" pitchFamily="34" charset="-120"/>
               </a:rPr>
-              <a:t>We are revisiting the story we read last week to look for examples of figurative language.</a:t>
+              <a:t>We will revisit the museum next term to see the new dinosaur exhibition.</a:t>
             </a:r>
             <a:endParaRPr lang="en-US" sz="1500" dirty="0"/>
           </a:p>
@@ -43747,7 +42799,7 @@
                 <a:ea typeface="Calibri" pitchFamily="34" charset="-122"/>
                 <a:cs typeface="Calibri" pitchFamily="34" charset="-120"/>
               </a:rPr>
-              <a:t>The visitation from the school inspector made everyone a little nervous.</a:t>
+              <a:t>Our teacher planned a special visitation to the local wildlife sanctuary for our class.</a:t>
             </a:r>
             <a:endParaRPr lang="en-US" sz="1500" dirty="0"/>
           </a:p>
